--- a/output/wordlabs-ous-suffix-3day.pptx
+++ b/output/wordlabs-ous-suffix-3day.pptx
@@ -6057,7 +6057,7 @@
                 <a:ea typeface="Calibri" pitchFamily="34" charset="-122"/>
                 <a:cs typeface="Calibri" pitchFamily="34" charset="-120"/>
               </a:rPr>
-              <a:t>courageous</a:t>
+              <a:t>poisonous</a:t>
             </a:r>
             <a:pPr algn="l" indent="0" marL="0">
               <a:buNone/>
@@ -6071,7 +6071,7 @@
                 <a:ea typeface="Calibri" pitchFamily="34" charset="-122"/>
                 <a:cs typeface="Calibri" pitchFamily="34" charset="-120"/>
               </a:rPr>
-              <a:t> firefighter rescued the family from the </a:t>
+              <a:t> snake was </a:t>
             </a:r>
             <a:pPr algn="l" indent="0" marL="0">
               <a:buNone/>
@@ -6088,7 +6088,7 @@
                 <a:ea typeface="Calibri" pitchFamily="34" charset="-122"/>
                 <a:cs typeface="Calibri" pitchFamily="34" charset="-120"/>
               </a:rPr>
-              <a:t>dangerous</a:t>
+              <a:t>enormous</a:t>
             </a:r>
             <a:pPr algn="l" indent="0" marL="0">
               <a:buNone/>
@@ -6102,7 +6102,7 @@
                 <a:ea typeface="Calibri" pitchFamily="34" charset="-122"/>
                 <a:cs typeface="Calibri" pitchFamily="34" charset="-120"/>
               </a:rPr>
-              <a:t> blaze.</a:t>
+              <a:t> and frightened all the hikers.</a:t>
             </a:r>
             <a:endParaRPr lang="en-US" sz="1800" dirty="0"/>
           </a:p>
@@ -6257,7 +6257,7 @@
                 <a:ea typeface="Trebuchet MS" pitchFamily="34" charset="-122"/>
                 <a:cs typeface="Trebuchet MS" pitchFamily="34" charset="-120"/>
               </a:rPr>
-              <a:t>courageous</a:t>
+              <a:t>poisonous</a:t>
             </a:r>
             <a:endParaRPr lang="en-US" sz="1400" dirty="0"/>
           </a:p>
@@ -6385,7 +6385,7 @@
                 <a:ea typeface="Trebuchet MS" pitchFamily="34" charset="-122"/>
                 <a:cs typeface="Trebuchet MS" pitchFamily="34" charset="-120"/>
               </a:rPr>
-              <a:t>dangerous</a:t>
+              <a:t>enormous</a:t>
             </a:r>
             <a:endParaRPr lang="en-US" sz="1400" dirty="0"/>
           </a:p>
@@ -6855,7 +6855,7 @@
                 <a:ea typeface="Trebuchet MS" pitchFamily="34" charset="-122"/>
                 <a:cs typeface="Trebuchet MS" pitchFamily="34" charset="-120"/>
               </a:rPr>
-              <a:t>courageous</a:t>
+              <a:t>poisonous</a:t>
             </a:r>
             <a:endParaRPr lang="en-US" sz="2800" dirty="0"/>
           </a:p>
@@ -7682,7 +7682,7 @@
                 <a:ea typeface="Trebuchet MS" pitchFamily="34" charset="-122"/>
                 <a:cs typeface="Trebuchet MS" pitchFamily="34" charset="-120"/>
               </a:rPr>
-              <a:t>courageous</a:t>
+              <a:t>poisonous</a:t>
             </a:r>
             <a:endParaRPr lang="en-US" sz="2800" dirty="0"/>
           </a:p>
@@ -7821,7 +7821,7 @@
                 <a:ea typeface="Trebuchet MS" pitchFamily="34" charset="-122"/>
                 <a:cs typeface="Trebuchet MS" pitchFamily="34" charset="-120"/>
               </a:rPr>
-              <a:t>courage</a:t>
+              <a:t>poison</a:t>
             </a:r>
             <a:endParaRPr lang="en-US" sz="1300" dirty="0"/>
           </a:p>
@@ -7860,7 +7860,7 @@
                 <a:ea typeface="Calibri" pitchFamily="34" charset="-122"/>
                 <a:cs typeface="Calibri" pitchFamily="34" charset="-120"/>
               </a:rPr>
-              <a:t>bravery</a:t>
+              <a:t>a harmful substance</a:t>
             </a:r>
             <a:endParaRPr lang="en-US" sz="850" dirty="0"/>
           </a:p>
@@ -7972,7 +7972,7 @@
                 <a:ea typeface="Calibri" pitchFamily="34" charset="-122"/>
                 <a:cs typeface="Calibri" pitchFamily="34" charset="-120"/>
               </a:rPr>
-              <a:t>full of, having quality</a:t>
+              <a:t>full of, having the quality of</a:t>
             </a:r>
             <a:endParaRPr lang="en-US" sz="850" dirty="0"/>
           </a:p>
@@ -7980,57 +7980,150 @@
       </p:sp>
       <p:sp>
         <p:nvSpPr>
-          <p:cNvPr id="22" name="Text 20"/>
-          <p:cNvSpPr/>
-          <p:nvPr/>
-        </p:nvSpPr>
-        <p:spPr>
-          <a:xfrm>
-            <a:off x="5803392" y="2752344"/>
-            <a:ext cx="1828800" cy="182880"/>
-          </a:xfrm>
-          <a:prstGeom prst="rect">
-            <a:avLst/>
-          </a:prstGeom>
-          <a:noFill/>
-          <a:ln/>
-        </p:spPr>
-        <p:txBody>
-          <a:bodyPr wrap="square" lIns="0" tIns="0" rIns="0" bIns="0" rtlCol="0" anchor="t"/>
-          <a:lstStyle/>
-          <a:p>
-            <a:pPr algn="ctr" indent="0" marL="0">
-              <a:buNone/>
-            </a:pPr>
-            <a:r>
-              <a:rPr lang="en-US" sz="700" i="1" dirty="0">
-                <a:solidFill>
-                  <a:srgbClr val="94A3B8"/>
+          <p:cNvPr id="22" name="Shape 20"/>
+          <p:cNvSpPr/>
+          <p:nvPr/>
+        </p:nvSpPr>
+        <p:spPr>
+          <a:xfrm>
+            <a:off x="365760" y="3273552"/>
+            <a:ext cx="1371600" cy="658368"/>
+          </a:xfrm>
+          <a:prstGeom prst="rect">
+            <a:avLst>
+              <a:gd name="adj" fmla="val 8333"/>
+            </a:avLst>
+          </a:prstGeom>
+          <a:solidFill>
+            <a:srgbClr val="E2E8F0"/>
+          </a:solidFill>
+          <a:ln w="12700">
+            <a:solidFill>
+              <a:srgbClr val="E2E8F0"/>
+            </a:solidFill>
+            <a:prstDash val="solid"/>
+          </a:ln>
+        </p:spPr>
+      </p:sp>
+      <p:sp>
+        <p:nvSpPr>
+          <p:cNvPr id="23" name="Text 21"/>
+          <p:cNvSpPr/>
+          <p:nvPr/>
+        </p:nvSpPr>
+        <p:spPr>
+          <a:xfrm>
+            <a:off x="365760" y="3273552"/>
+            <a:ext cx="1371600" cy="658368"/>
+          </a:xfrm>
+          <a:prstGeom prst="rect">
+            <a:avLst/>
+          </a:prstGeom>
+          <a:noFill/>
+          <a:ln/>
+        </p:spPr>
+        <p:txBody>
+          <a:bodyPr wrap="square" lIns="0" tIns="0" rIns="0" bIns="0" rtlCol="0" anchor="ctr"/>
+          <a:lstStyle/>
+          <a:p>
+            <a:pPr algn="ctr" indent="0" marL="0">
+              <a:buNone/>
+            </a:pPr>
+            <a:r>
+              <a:rPr lang="en-US" sz="1100" b="1" dirty="0">
+                <a:solidFill>
+                  <a:srgbClr val="475569"/>
+                </a:solidFill>
+                <a:latin typeface="Trebuchet MS" pitchFamily="34" charset="0"/>
+                <a:ea typeface="Trebuchet MS" pitchFamily="34" charset="-122"/>
+                <a:cs typeface="Trebuchet MS" pitchFamily="34" charset="-120"/>
+              </a:rPr>
+              <a:t>Syllables</a:t>
+            </a:r>
+            <a:endParaRPr lang="en-US" sz="1100" dirty="0"/>
+          </a:p>
+        </p:txBody>
+      </p:sp>
+      <p:sp>
+        <p:nvSpPr>
+          <p:cNvPr id="24" name="Shape 22"/>
+          <p:cNvSpPr/>
+          <p:nvPr/>
+        </p:nvSpPr>
+        <p:spPr>
+          <a:xfrm>
+            <a:off x="1874520" y="3273552"/>
+            <a:ext cx="6903720" cy="658368"/>
+          </a:xfrm>
+          <a:prstGeom prst="rect">
+            <a:avLst>
+              <a:gd name="adj" fmla="val 8333"/>
+            </a:avLst>
+          </a:prstGeom>
+          <a:solidFill>
+            <a:srgbClr val="F8FAFC"/>
+          </a:solidFill>
+          <a:ln w="12700">
+            <a:solidFill>
+              <a:srgbClr val="E2E8F0"/>
+            </a:solidFill>
+            <a:prstDash val="dash"/>
+          </a:ln>
+        </p:spPr>
+      </p:sp>
+      <p:sp>
+        <p:nvSpPr>
+          <p:cNvPr id="25" name="Text 23"/>
+          <p:cNvSpPr/>
+          <p:nvPr/>
+        </p:nvSpPr>
+        <p:spPr>
+          <a:xfrm>
+            <a:off x="1874520" y="3273552"/>
+            <a:ext cx="6903720" cy="658368"/>
+          </a:xfrm>
+          <a:prstGeom prst="rect">
+            <a:avLst/>
+          </a:prstGeom>
+          <a:noFill/>
+          <a:ln/>
+        </p:spPr>
+        <p:txBody>
+          <a:bodyPr wrap="square" rtlCol="0" anchor="ctr"/>
+          <a:lstStyle/>
+          <a:p>
+            <a:pPr algn="ctr" indent="0" marL="0">
+              <a:buNone/>
+            </a:pPr>
+            <a:r>
+              <a:rPr lang="en-US" sz="1100" i="1" dirty="0">
+                <a:solidFill>
+                  <a:srgbClr val="CBD5E1"/>
                 </a:solidFill>
                 <a:latin typeface="Calibri" pitchFamily="34" charset="0"/>
                 <a:ea typeface="Calibri" pitchFamily="34" charset="-122"/>
                 <a:cs typeface="Calibri" pitchFamily="34" charset="-120"/>
               </a:rPr>
-              <a:t>'e' dropped before vowel suffix</a:t>
-            </a:r>
-            <a:endParaRPr lang="en-US" sz="700" dirty="0"/>
-          </a:p>
-        </p:txBody>
-      </p:sp>
-      <p:sp>
-        <p:nvSpPr>
-          <p:cNvPr id="23" name="Shape 21"/>
-          <p:cNvSpPr/>
-          <p:nvPr/>
-        </p:nvSpPr>
-        <p:spPr>
-          <a:xfrm>
-            <a:off x="365760" y="3273552"/>
-            <a:ext cx="1371600" cy="658368"/>
+              <a:t>Write here...</a:t>
+            </a:r>
+            <a:endParaRPr lang="en-US" sz="1100" dirty="0"/>
+          </a:p>
+        </p:txBody>
+      </p:sp>
+      <p:sp>
+        <p:nvSpPr>
+          <p:cNvPr id="26" name="Shape 24"/>
+          <p:cNvSpPr/>
+          <p:nvPr/>
+        </p:nvSpPr>
+        <p:spPr>
+          <a:xfrm>
+            <a:off x="365760" y="4096512"/>
+            <a:ext cx="1371600" cy="804672"/>
           </a:xfrm>
           <a:prstGeom prst="rect">
             <a:avLst>
-              <a:gd name="adj" fmla="val 8333"/>
+              <a:gd name="adj" fmla="val 6818"/>
             </a:avLst>
           </a:prstGeom>
           <a:solidFill>
@@ -8046,14 +8139,14 @@
       </p:sp>
       <p:sp>
         <p:nvSpPr>
-          <p:cNvPr id="24" name="Text 22"/>
-          <p:cNvSpPr/>
-          <p:nvPr/>
-        </p:nvSpPr>
-        <p:spPr>
-          <a:xfrm>
-            <a:off x="365760" y="3273552"/>
-            <a:ext cx="1371600" cy="658368"/>
+          <p:cNvPr id="27" name="Text 25"/>
+          <p:cNvSpPr/>
+          <p:nvPr/>
+        </p:nvSpPr>
+        <p:spPr>
+          <a:xfrm>
+            <a:off x="365760" y="4096512"/>
+            <a:ext cx="1371600" cy="804672"/>
           </a:xfrm>
           <a:prstGeom prst="rect">
             <a:avLst/>
@@ -8077,7 +8170,7 @@
                 <a:ea typeface="Trebuchet MS" pitchFamily="34" charset="-122"/>
                 <a:cs typeface="Trebuchet MS" pitchFamily="34" charset="-120"/>
               </a:rPr>
-              <a:t>Syllables</a:t>
+              <a:t>Phonemes</a:t>
             </a:r>
             <a:endParaRPr lang="en-US" sz="1100" dirty="0"/>
           </a:p>
@@ -8085,80 +8178,14 @@
       </p:sp>
       <p:sp>
         <p:nvSpPr>
-          <p:cNvPr id="25" name="Shape 23"/>
-          <p:cNvSpPr/>
-          <p:nvPr/>
-        </p:nvSpPr>
-        <p:spPr>
-          <a:xfrm>
-            <a:off x="1874520" y="3273552"/>
-            <a:ext cx="6903720" cy="658368"/>
-          </a:xfrm>
-          <a:prstGeom prst="rect">
-            <a:avLst>
-              <a:gd name="adj" fmla="val 8333"/>
-            </a:avLst>
-          </a:prstGeom>
-          <a:solidFill>
-            <a:srgbClr val="F8FAFC"/>
-          </a:solidFill>
-          <a:ln w="12700">
-            <a:solidFill>
-              <a:srgbClr val="E2E8F0"/>
-            </a:solidFill>
-            <a:prstDash val="dash"/>
-          </a:ln>
-        </p:spPr>
-      </p:sp>
-      <p:sp>
-        <p:nvSpPr>
-          <p:cNvPr id="26" name="Text 24"/>
-          <p:cNvSpPr/>
-          <p:nvPr/>
-        </p:nvSpPr>
-        <p:spPr>
-          <a:xfrm>
-            <a:off x="1874520" y="3273552"/>
-            <a:ext cx="6903720" cy="658368"/>
-          </a:xfrm>
-          <a:prstGeom prst="rect">
-            <a:avLst/>
-          </a:prstGeom>
-          <a:noFill/>
-          <a:ln/>
-        </p:spPr>
-        <p:txBody>
-          <a:bodyPr wrap="square" rtlCol="0" anchor="ctr"/>
-          <a:lstStyle/>
-          <a:p>
-            <a:pPr algn="ctr" indent="0" marL="0">
-              <a:buNone/>
-            </a:pPr>
-            <a:r>
-              <a:rPr lang="en-US" sz="1100" i="1" dirty="0">
-                <a:solidFill>
-                  <a:srgbClr val="CBD5E1"/>
-                </a:solidFill>
-                <a:latin typeface="Calibri" pitchFamily="34" charset="0"/>
-                <a:ea typeface="Calibri" pitchFamily="34" charset="-122"/>
-                <a:cs typeface="Calibri" pitchFamily="34" charset="-120"/>
-              </a:rPr>
-              <a:t>Write here...</a:t>
-            </a:r>
-            <a:endParaRPr lang="en-US" sz="1100" dirty="0"/>
-          </a:p>
-        </p:txBody>
-      </p:sp>
-      <p:sp>
-        <p:nvSpPr>
-          <p:cNvPr id="27" name="Shape 25"/>
-          <p:cNvSpPr/>
-          <p:nvPr/>
-        </p:nvSpPr>
-        <p:spPr>
-          <a:xfrm>
-            <a:off x="365760" y="4096512"/>
-            <a:ext cx="1371600" cy="804672"/>
+          <p:cNvPr id="28" name="Shape 26"/>
+          <p:cNvSpPr/>
+          <p:nvPr/>
+        </p:nvSpPr>
+        <p:spPr>
+          <a:xfrm>
+            <a:off x="1874520" y="4096512"/>
+            <a:ext cx="6903720" cy="804672"/>
           </a:xfrm>
           <a:prstGeom prst="rect">
             <a:avLst>
@@ -8166,85 +8193,19 @@
             </a:avLst>
           </a:prstGeom>
           <a:solidFill>
-            <a:srgbClr val="E2E8F0"/>
+            <a:srgbClr val="F8FAFC"/>
           </a:solidFill>
           <a:ln w="12700">
             <a:solidFill>
               <a:srgbClr val="E2E8F0"/>
             </a:solidFill>
-            <a:prstDash val="solid"/>
-          </a:ln>
-        </p:spPr>
-      </p:sp>
-      <p:sp>
-        <p:nvSpPr>
-          <p:cNvPr id="28" name="Text 26"/>
-          <p:cNvSpPr/>
-          <p:nvPr/>
-        </p:nvSpPr>
-        <p:spPr>
-          <a:xfrm>
-            <a:off x="365760" y="4096512"/>
-            <a:ext cx="1371600" cy="804672"/>
-          </a:xfrm>
-          <a:prstGeom prst="rect">
-            <a:avLst/>
-          </a:prstGeom>
-          <a:noFill/>
-          <a:ln/>
-        </p:spPr>
-        <p:txBody>
-          <a:bodyPr wrap="square" lIns="0" tIns="0" rIns="0" bIns="0" rtlCol="0" anchor="ctr"/>
-          <a:lstStyle/>
-          <a:p>
-            <a:pPr algn="ctr" indent="0" marL="0">
-              <a:buNone/>
-            </a:pPr>
-            <a:r>
-              <a:rPr lang="en-US" sz="1100" b="1" dirty="0">
-                <a:solidFill>
-                  <a:srgbClr val="475569"/>
-                </a:solidFill>
-                <a:latin typeface="Trebuchet MS" pitchFamily="34" charset="0"/>
-                <a:ea typeface="Trebuchet MS" pitchFamily="34" charset="-122"/>
-                <a:cs typeface="Trebuchet MS" pitchFamily="34" charset="-120"/>
-              </a:rPr>
-              <a:t>Phonemes</a:t>
-            </a:r>
-            <a:endParaRPr lang="en-US" sz="1100" dirty="0"/>
-          </a:p>
-        </p:txBody>
-      </p:sp>
-      <p:sp>
-        <p:nvSpPr>
-          <p:cNvPr id="29" name="Shape 27"/>
-          <p:cNvSpPr/>
-          <p:nvPr/>
-        </p:nvSpPr>
-        <p:spPr>
-          <a:xfrm>
-            <a:off x="1874520" y="4096512"/>
-            <a:ext cx="6903720" cy="804672"/>
-          </a:xfrm>
-          <a:prstGeom prst="rect">
-            <a:avLst>
-              <a:gd name="adj" fmla="val 6818"/>
-            </a:avLst>
-          </a:prstGeom>
-          <a:solidFill>
-            <a:srgbClr val="F8FAFC"/>
-          </a:solidFill>
-          <a:ln w="12700">
-            <a:solidFill>
-              <a:srgbClr val="E2E8F0"/>
-            </a:solidFill>
             <a:prstDash val="dash"/>
           </a:ln>
         </p:spPr>
       </p:sp>
       <p:sp>
         <p:nvSpPr>
-          <p:cNvPr id="30" name="Text 28"/>
+          <p:cNvPr id="29" name="Text 27"/>
           <p:cNvSpPr/>
           <p:nvPr/>
         </p:nvSpPr>
@@ -8706,7 +8667,7 @@
                 <a:ea typeface="Trebuchet MS" pitchFamily="34" charset="-122"/>
                 <a:cs typeface="Trebuchet MS" pitchFamily="34" charset="-120"/>
               </a:rPr>
-              <a:t>courageous</a:t>
+              <a:t>poisonous</a:t>
             </a:r>
             <a:endParaRPr lang="en-US" sz="2800" dirty="0"/>
           </a:p>
@@ -8845,7 +8806,7 @@
                 <a:ea typeface="Trebuchet MS" pitchFamily="34" charset="-122"/>
                 <a:cs typeface="Trebuchet MS" pitchFamily="34" charset="-120"/>
               </a:rPr>
-              <a:t>courage</a:t>
+              <a:t>poison</a:t>
             </a:r>
             <a:endParaRPr lang="en-US" sz="1300" dirty="0"/>
           </a:p>
@@ -8884,7 +8845,7 @@
                 <a:ea typeface="Calibri" pitchFamily="34" charset="-122"/>
                 <a:cs typeface="Calibri" pitchFamily="34" charset="-120"/>
               </a:rPr>
-              <a:t>bravery</a:t>
+              <a:t>a harmful substance</a:t>
             </a:r>
             <a:endParaRPr lang="en-US" sz="850" dirty="0"/>
           </a:p>
@@ -8996,7 +8957,7 @@
                 <a:ea typeface="Calibri" pitchFamily="34" charset="-122"/>
                 <a:cs typeface="Calibri" pitchFamily="34" charset="-120"/>
               </a:rPr>
-              <a:t>full of, having quality</a:t>
+              <a:t>full of, having the quality of</a:t>
             </a:r>
             <a:endParaRPr lang="en-US" sz="850" dirty="0"/>
           </a:p>
@@ -9004,46 +8965,7 @@
       </p:sp>
       <p:sp>
         <p:nvSpPr>
-          <p:cNvPr id="22" name="Text 20"/>
-          <p:cNvSpPr/>
-          <p:nvPr/>
-        </p:nvSpPr>
-        <p:spPr>
-          <a:xfrm>
-            <a:off x="5803392" y="2752344"/>
-            <a:ext cx="1828800" cy="182880"/>
-          </a:xfrm>
-          <a:prstGeom prst="rect">
-            <a:avLst/>
-          </a:prstGeom>
-          <a:noFill/>
-          <a:ln/>
-        </p:spPr>
-        <p:txBody>
-          <a:bodyPr wrap="square" lIns="0" tIns="0" rIns="0" bIns="0" rtlCol="0" anchor="t"/>
-          <a:lstStyle/>
-          <a:p>
-            <a:pPr algn="ctr" indent="0" marL="0">
-              <a:buNone/>
-            </a:pPr>
-            <a:r>
-              <a:rPr lang="en-US" sz="700" i="1" dirty="0">
-                <a:solidFill>
-                  <a:srgbClr val="94A3B8"/>
-                </a:solidFill>
-                <a:latin typeface="Calibri" pitchFamily="34" charset="0"/>
-                <a:ea typeface="Calibri" pitchFamily="34" charset="-122"/>
-                <a:cs typeface="Calibri" pitchFamily="34" charset="-120"/>
-              </a:rPr>
-              <a:t>'e' dropped before vowel suffix</a:t>
-            </a:r>
-            <a:endParaRPr lang="en-US" sz="700" dirty="0"/>
-          </a:p>
-        </p:txBody>
-      </p:sp>
-      <p:sp>
-        <p:nvSpPr>
-          <p:cNvPr id="23" name="Shape 21"/>
+          <p:cNvPr id="22" name="Shape 20"/>
           <p:cNvSpPr/>
           <p:nvPr/>
         </p:nvSpPr>
@@ -9070,7 +8992,7 @@
       </p:sp>
       <p:sp>
         <p:nvSpPr>
-          <p:cNvPr id="24" name="Text 22"/>
+          <p:cNvPr id="23" name="Text 21"/>
           <p:cNvSpPr/>
           <p:nvPr/>
         </p:nvSpPr>
@@ -9109,7 +9031,7 @@
       </p:sp>
       <p:sp>
         <p:nvSpPr>
-          <p:cNvPr id="25" name="Shape 23"/>
+          <p:cNvPr id="24" name="Shape 22"/>
           <p:cNvSpPr/>
           <p:nvPr/>
         </p:nvSpPr>
@@ -9136,7 +9058,7 @@
       </p:sp>
       <p:sp>
         <p:nvSpPr>
-          <p:cNvPr id="26" name="Shape 24"/>
+          <p:cNvPr id="25" name="Shape 23"/>
           <p:cNvSpPr/>
           <p:nvPr/>
         </p:nvSpPr>
@@ -9163,7 +9085,7 @@
       </p:sp>
       <p:sp>
         <p:nvSpPr>
-          <p:cNvPr id="27" name="Text 25"/>
+          <p:cNvPr id="26" name="Text 24"/>
           <p:cNvSpPr/>
           <p:nvPr/>
         </p:nvSpPr>
@@ -9194,7 +9116,7 @@
                 <a:ea typeface="Trebuchet MS" pitchFamily="34" charset="-122"/>
                 <a:cs typeface="Trebuchet MS" pitchFamily="34" charset="-120"/>
               </a:rPr>
-              <a:t>cou</a:t>
+              <a:t>poi</a:t>
             </a:r>
             <a:endParaRPr lang="en-US" sz="1400" dirty="0"/>
           </a:p>
@@ -9202,7 +9124,7 @@
       </p:sp>
       <p:sp>
         <p:nvSpPr>
-          <p:cNvPr id="28" name="Text 26"/>
+          <p:cNvPr id="27" name="Text 25"/>
           <p:cNvSpPr/>
           <p:nvPr/>
         </p:nvSpPr>
@@ -9241,7 +9163,7 @@
       </p:sp>
       <p:sp>
         <p:nvSpPr>
-          <p:cNvPr id="29" name="Shape 27"/>
+          <p:cNvPr id="28" name="Shape 26"/>
           <p:cNvSpPr/>
           <p:nvPr/>
         </p:nvSpPr>
@@ -9268,7 +9190,7 @@
       </p:sp>
       <p:sp>
         <p:nvSpPr>
-          <p:cNvPr id="30" name="Text 28"/>
+          <p:cNvPr id="29" name="Text 27"/>
           <p:cNvSpPr/>
           <p:nvPr/>
         </p:nvSpPr>
@@ -9299,7 +9221,7 @@
                 <a:ea typeface="Trebuchet MS" pitchFamily="34" charset="-122"/>
                 <a:cs typeface="Trebuchet MS" pitchFamily="34" charset="-120"/>
               </a:rPr>
-              <a:t>ra</a:t>
+              <a:t>son</a:t>
             </a:r>
             <a:endParaRPr lang="en-US" sz="1400" dirty="0"/>
           </a:p>
@@ -9307,7 +9229,7 @@
       </p:sp>
       <p:sp>
         <p:nvSpPr>
-          <p:cNvPr id="31" name="Text 29"/>
+          <p:cNvPr id="30" name="Text 28"/>
           <p:cNvSpPr/>
           <p:nvPr/>
         </p:nvSpPr>
@@ -9346,7 +9268,7 @@
       </p:sp>
       <p:sp>
         <p:nvSpPr>
-          <p:cNvPr id="32" name="Shape 30"/>
+          <p:cNvPr id="31" name="Shape 29"/>
           <p:cNvSpPr/>
           <p:nvPr/>
         </p:nvSpPr>
@@ -9373,7 +9295,7 @@
       </p:sp>
       <p:sp>
         <p:nvSpPr>
-          <p:cNvPr id="33" name="Text 31"/>
+          <p:cNvPr id="32" name="Text 30"/>
           <p:cNvSpPr/>
           <p:nvPr/>
         </p:nvSpPr>
@@ -9404,7 +9326,7 @@
                 <a:ea typeface="Trebuchet MS" pitchFamily="34" charset="-122"/>
                 <a:cs typeface="Trebuchet MS" pitchFamily="34" charset="-120"/>
               </a:rPr>
-              <a:t>geous</a:t>
+              <a:t>ous</a:t>
             </a:r>
             <a:endParaRPr lang="en-US" sz="1400" dirty="0"/>
           </a:p>
@@ -9412,7 +9334,7 @@
       </p:sp>
       <p:sp>
         <p:nvSpPr>
-          <p:cNvPr id="34" name="Shape 32"/>
+          <p:cNvPr id="33" name="Shape 31"/>
           <p:cNvSpPr/>
           <p:nvPr/>
         </p:nvSpPr>
@@ -9439,7 +9361,7 @@
       </p:sp>
       <p:sp>
         <p:nvSpPr>
-          <p:cNvPr id="35" name="Text 33"/>
+          <p:cNvPr id="34" name="Text 32"/>
           <p:cNvSpPr/>
           <p:nvPr/>
         </p:nvSpPr>
@@ -9478,7 +9400,7 @@
       </p:sp>
       <p:sp>
         <p:nvSpPr>
-          <p:cNvPr id="36" name="Shape 34"/>
+          <p:cNvPr id="35" name="Shape 33"/>
           <p:cNvSpPr/>
           <p:nvPr/>
         </p:nvSpPr>
@@ -9505,7 +9427,7 @@
       </p:sp>
       <p:sp>
         <p:nvSpPr>
-          <p:cNvPr id="37" name="Text 35"/>
+          <p:cNvPr id="36" name="Text 34"/>
           <p:cNvSpPr/>
           <p:nvPr/>
         </p:nvSpPr>
@@ -9967,7 +9889,7 @@
                 <a:ea typeface="Trebuchet MS" pitchFamily="34" charset="-122"/>
                 <a:cs typeface="Trebuchet MS" pitchFamily="34" charset="-120"/>
               </a:rPr>
-              <a:t>courageous</a:t>
+              <a:t>poisonous</a:t>
             </a:r>
             <a:endParaRPr lang="en-US" sz="2800" dirty="0"/>
           </a:p>
@@ -10106,7 +10028,7 @@
                 <a:ea typeface="Trebuchet MS" pitchFamily="34" charset="-122"/>
                 <a:cs typeface="Trebuchet MS" pitchFamily="34" charset="-120"/>
               </a:rPr>
-              <a:t>courage</a:t>
+              <a:t>poison</a:t>
             </a:r>
             <a:endParaRPr lang="en-US" sz="1300" dirty="0"/>
           </a:p>
@@ -10145,7 +10067,7 @@
                 <a:ea typeface="Calibri" pitchFamily="34" charset="-122"/>
                 <a:cs typeface="Calibri" pitchFamily="34" charset="-120"/>
               </a:rPr>
-              <a:t>bravery</a:t>
+              <a:t>a harmful substance</a:t>
             </a:r>
             <a:endParaRPr lang="en-US" sz="850" dirty="0"/>
           </a:p>
@@ -10257,7 +10179,7 @@
                 <a:ea typeface="Calibri" pitchFamily="34" charset="-122"/>
                 <a:cs typeface="Calibri" pitchFamily="34" charset="-120"/>
               </a:rPr>
-              <a:t>full of, having quality</a:t>
+              <a:t>full of, having the quality of</a:t>
             </a:r>
             <a:endParaRPr lang="en-US" sz="850" dirty="0"/>
           </a:p>
@@ -10265,14 +10187,740 @@
       </p:sp>
       <p:sp>
         <p:nvSpPr>
-          <p:cNvPr id="22" name="Text 20"/>
-          <p:cNvSpPr/>
-          <p:nvPr/>
-        </p:nvSpPr>
-        <p:spPr>
-          <a:xfrm>
-            <a:off x="5803392" y="2752344"/>
-            <a:ext cx="1828800" cy="182880"/>
+          <p:cNvPr id="22" name="Shape 20"/>
+          <p:cNvSpPr/>
+          <p:nvPr/>
+        </p:nvSpPr>
+        <p:spPr>
+          <a:xfrm>
+            <a:off x="365760" y="3273552"/>
+            <a:ext cx="1371600" cy="658368"/>
+          </a:xfrm>
+          <a:prstGeom prst="rect">
+            <a:avLst>
+              <a:gd name="adj" fmla="val 8333"/>
+            </a:avLst>
+          </a:prstGeom>
+          <a:solidFill>
+            <a:srgbClr val="E2E8F0"/>
+          </a:solidFill>
+          <a:ln w="12700">
+            <a:solidFill>
+              <a:srgbClr val="E2E8F0"/>
+            </a:solidFill>
+            <a:prstDash val="solid"/>
+          </a:ln>
+        </p:spPr>
+      </p:sp>
+      <p:sp>
+        <p:nvSpPr>
+          <p:cNvPr id="23" name="Text 21"/>
+          <p:cNvSpPr/>
+          <p:nvPr/>
+        </p:nvSpPr>
+        <p:spPr>
+          <a:xfrm>
+            <a:off x="365760" y="3273552"/>
+            <a:ext cx="1371600" cy="658368"/>
+          </a:xfrm>
+          <a:prstGeom prst="rect">
+            <a:avLst/>
+          </a:prstGeom>
+          <a:noFill/>
+          <a:ln/>
+        </p:spPr>
+        <p:txBody>
+          <a:bodyPr wrap="square" lIns="0" tIns="0" rIns="0" bIns="0" rtlCol="0" anchor="ctr"/>
+          <a:lstStyle/>
+          <a:p>
+            <a:pPr algn="ctr" indent="0" marL="0">
+              <a:buNone/>
+            </a:pPr>
+            <a:r>
+              <a:rPr lang="en-US" sz="1100" b="1" dirty="0">
+                <a:solidFill>
+                  <a:srgbClr val="475569"/>
+                </a:solidFill>
+                <a:latin typeface="Trebuchet MS" pitchFamily="34" charset="0"/>
+                <a:ea typeface="Trebuchet MS" pitchFamily="34" charset="-122"/>
+                <a:cs typeface="Trebuchet MS" pitchFamily="34" charset="-120"/>
+              </a:rPr>
+              <a:t>Syllables</a:t>
+            </a:r>
+            <a:endParaRPr lang="en-US" sz="1100" dirty="0"/>
+          </a:p>
+        </p:txBody>
+      </p:sp>
+      <p:sp>
+        <p:nvSpPr>
+          <p:cNvPr id="24" name="Shape 22"/>
+          <p:cNvSpPr/>
+          <p:nvPr/>
+        </p:nvSpPr>
+        <p:spPr>
+          <a:xfrm>
+            <a:off x="1874520" y="3273552"/>
+            <a:ext cx="6903720" cy="658368"/>
+          </a:xfrm>
+          <a:prstGeom prst="rect">
+            <a:avLst>
+              <a:gd name="adj" fmla="val 8333"/>
+            </a:avLst>
+          </a:prstGeom>
+          <a:solidFill>
+            <a:srgbClr val="CCFBF1"/>
+          </a:solidFill>
+          <a:ln w="12700">
+            <a:solidFill>
+              <a:srgbClr val="0D9488"/>
+            </a:solidFill>
+            <a:prstDash val="solid"/>
+          </a:ln>
+        </p:spPr>
+      </p:sp>
+      <p:sp>
+        <p:nvSpPr>
+          <p:cNvPr id="25" name="Shape 23"/>
+          <p:cNvSpPr/>
+          <p:nvPr/>
+        </p:nvSpPr>
+        <p:spPr>
+          <a:xfrm>
+            <a:off x="2313432" y="3364992"/>
+            <a:ext cx="1645920" cy="475488"/>
+          </a:xfrm>
+          <a:prstGeom prst="rect">
+            <a:avLst>
+              <a:gd name="adj" fmla="val 9615"/>
+            </a:avLst>
+          </a:prstGeom>
+          <a:solidFill>
+            <a:srgbClr val="FFFFFF"/>
+          </a:solidFill>
+          <a:ln w="12700">
+            <a:solidFill>
+              <a:srgbClr val="0D9488"/>
+            </a:solidFill>
+            <a:prstDash val="solid"/>
+          </a:ln>
+        </p:spPr>
+      </p:sp>
+      <p:sp>
+        <p:nvSpPr>
+          <p:cNvPr id="26" name="Text 24"/>
+          <p:cNvSpPr/>
+          <p:nvPr/>
+        </p:nvSpPr>
+        <p:spPr>
+          <a:xfrm>
+            <a:off x="2313432" y="3364992"/>
+            <a:ext cx="1645920" cy="475488"/>
+          </a:xfrm>
+          <a:prstGeom prst="rect">
+            <a:avLst/>
+          </a:prstGeom>
+          <a:noFill/>
+          <a:ln/>
+        </p:spPr>
+        <p:txBody>
+          <a:bodyPr wrap="square" lIns="0" tIns="0" rIns="0" bIns="0" rtlCol="0" anchor="ctr"/>
+          <a:lstStyle/>
+          <a:p>
+            <a:pPr algn="ctr" indent="0" marL="0">
+              <a:buNone/>
+            </a:pPr>
+            <a:r>
+              <a:rPr lang="en-US" sz="1400" b="1" dirty="0">
+                <a:solidFill>
+                  <a:srgbClr val="0D9488"/>
+                </a:solidFill>
+                <a:latin typeface="Trebuchet MS" pitchFamily="34" charset="0"/>
+                <a:ea typeface="Trebuchet MS" pitchFamily="34" charset="-122"/>
+                <a:cs typeface="Trebuchet MS" pitchFamily="34" charset="-120"/>
+              </a:rPr>
+              <a:t>poi</a:t>
+            </a:r>
+            <a:endParaRPr lang="en-US" sz="1400" dirty="0"/>
+          </a:p>
+        </p:txBody>
+      </p:sp>
+      <p:sp>
+        <p:nvSpPr>
+          <p:cNvPr id="27" name="Text 25"/>
+          <p:cNvSpPr/>
+          <p:nvPr/>
+        </p:nvSpPr>
+        <p:spPr>
+          <a:xfrm>
+            <a:off x="3959352" y="3364992"/>
+            <a:ext cx="411480" cy="475488"/>
+          </a:xfrm>
+          <a:prstGeom prst="rect">
+            <a:avLst/>
+          </a:prstGeom>
+          <a:noFill/>
+          <a:ln/>
+        </p:spPr>
+        <p:txBody>
+          <a:bodyPr wrap="square" lIns="0" tIns="0" rIns="0" bIns="0" rtlCol="0" anchor="ctr"/>
+          <a:lstStyle/>
+          <a:p>
+            <a:pPr algn="ctr" indent="0" marL="0">
+              <a:buNone/>
+            </a:pPr>
+            <a:r>
+              <a:rPr lang="en-US" sz="1600" b="1" dirty="0">
+                <a:solidFill>
+                  <a:srgbClr val="0D9488"/>
+                </a:solidFill>
+                <a:latin typeface="Trebuchet MS" pitchFamily="34" charset="0"/>
+                <a:ea typeface="Trebuchet MS" pitchFamily="34" charset="-122"/>
+                <a:cs typeface="Trebuchet MS" pitchFamily="34" charset="-120"/>
+              </a:rPr>
+              <a:t>·</a:t>
+            </a:r>
+            <a:endParaRPr lang="en-US" sz="1600" dirty="0"/>
+          </a:p>
+        </p:txBody>
+      </p:sp>
+      <p:sp>
+        <p:nvSpPr>
+          <p:cNvPr id="28" name="Shape 26"/>
+          <p:cNvSpPr/>
+          <p:nvPr/>
+        </p:nvSpPr>
+        <p:spPr>
+          <a:xfrm>
+            <a:off x="4370832" y="3364992"/>
+            <a:ext cx="1645920" cy="475488"/>
+          </a:xfrm>
+          <a:prstGeom prst="rect">
+            <a:avLst>
+              <a:gd name="adj" fmla="val 9615"/>
+            </a:avLst>
+          </a:prstGeom>
+          <a:solidFill>
+            <a:srgbClr val="FFFFFF"/>
+          </a:solidFill>
+          <a:ln w="12700">
+            <a:solidFill>
+              <a:srgbClr val="0D9488"/>
+            </a:solidFill>
+            <a:prstDash val="solid"/>
+          </a:ln>
+        </p:spPr>
+      </p:sp>
+      <p:sp>
+        <p:nvSpPr>
+          <p:cNvPr id="29" name="Text 27"/>
+          <p:cNvSpPr/>
+          <p:nvPr/>
+        </p:nvSpPr>
+        <p:spPr>
+          <a:xfrm>
+            <a:off x="4370832" y="3364992"/>
+            <a:ext cx="1645920" cy="475488"/>
+          </a:xfrm>
+          <a:prstGeom prst="rect">
+            <a:avLst/>
+          </a:prstGeom>
+          <a:noFill/>
+          <a:ln/>
+        </p:spPr>
+        <p:txBody>
+          <a:bodyPr wrap="square" lIns="0" tIns="0" rIns="0" bIns="0" rtlCol="0" anchor="ctr"/>
+          <a:lstStyle/>
+          <a:p>
+            <a:pPr algn="ctr" indent="0" marL="0">
+              <a:buNone/>
+            </a:pPr>
+            <a:r>
+              <a:rPr lang="en-US" sz="1400" b="1" dirty="0">
+                <a:solidFill>
+                  <a:srgbClr val="0D9488"/>
+                </a:solidFill>
+                <a:latin typeface="Trebuchet MS" pitchFamily="34" charset="0"/>
+                <a:ea typeface="Trebuchet MS" pitchFamily="34" charset="-122"/>
+                <a:cs typeface="Trebuchet MS" pitchFamily="34" charset="-120"/>
+              </a:rPr>
+              <a:t>son</a:t>
+            </a:r>
+            <a:endParaRPr lang="en-US" sz="1400" dirty="0"/>
+          </a:p>
+        </p:txBody>
+      </p:sp>
+      <p:sp>
+        <p:nvSpPr>
+          <p:cNvPr id="30" name="Text 28"/>
+          <p:cNvSpPr/>
+          <p:nvPr/>
+        </p:nvSpPr>
+        <p:spPr>
+          <a:xfrm>
+            <a:off x="6016752" y="3364992"/>
+            <a:ext cx="411480" cy="475488"/>
+          </a:xfrm>
+          <a:prstGeom prst="rect">
+            <a:avLst/>
+          </a:prstGeom>
+          <a:noFill/>
+          <a:ln/>
+        </p:spPr>
+        <p:txBody>
+          <a:bodyPr wrap="square" lIns="0" tIns="0" rIns="0" bIns="0" rtlCol="0" anchor="ctr"/>
+          <a:lstStyle/>
+          <a:p>
+            <a:pPr algn="ctr" indent="0" marL="0">
+              <a:buNone/>
+            </a:pPr>
+            <a:r>
+              <a:rPr lang="en-US" sz="1600" b="1" dirty="0">
+                <a:solidFill>
+                  <a:srgbClr val="0D9488"/>
+                </a:solidFill>
+                <a:latin typeface="Trebuchet MS" pitchFamily="34" charset="0"/>
+                <a:ea typeface="Trebuchet MS" pitchFamily="34" charset="-122"/>
+                <a:cs typeface="Trebuchet MS" pitchFamily="34" charset="-120"/>
+              </a:rPr>
+              <a:t>·</a:t>
+            </a:r>
+            <a:endParaRPr lang="en-US" sz="1600" dirty="0"/>
+          </a:p>
+        </p:txBody>
+      </p:sp>
+      <p:sp>
+        <p:nvSpPr>
+          <p:cNvPr id="31" name="Shape 29"/>
+          <p:cNvSpPr/>
+          <p:nvPr/>
+        </p:nvSpPr>
+        <p:spPr>
+          <a:xfrm>
+            <a:off x="6428232" y="3364992"/>
+            <a:ext cx="1645920" cy="475488"/>
+          </a:xfrm>
+          <a:prstGeom prst="rect">
+            <a:avLst>
+              <a:gd name="adj" fmla="val 9615"/>
+            </a:avLst>
+          </a:prstGeom>
+          <a:solidFill>
+            <a:srgbClr val="FFFFFF"/>
+          </a:solidFill>
+          <a:ln w="12700">
+            <a:solidFill>
+              <a:srgbClr val="0D9488"/>
+            </a:solidFill>
+            <a:prstDash val="solid"/>
+          </a:ln>
+        </p:spPr>
+      </p:sp>
+      <p:sp>
+        <p:nvSpPr>
+          <p:cNvPr id="32" name="Text 30"/>
+          <p:cNvSpPr/>
+          <p:nvPr/>
+        </p:nvSpPr>
+        <p:spPr>
+          <a:xfrm>
+            <a:off x="6428232" y="3364992"/>
+            <a:ext cx="1645920" cy="475488"/>
+          </a:xfrm>
+          <a:prstGeom prst="rect">
+            <a:avLst/>
+          </a:prstGeom>
+          <a:noFill/>
+          <a:ln/>
+        </p:spPr>
+        <p:txBody>
+          <a:bodyPr wrap="square" lIns="0" tIns="0" rIns="0" bIns="0" rtlCol="0" anchor="ctr"/>
+          <a:lstStyle/>
+          <a:p>
+            <a:pPr algn="ctr" indent="0" marL="0">
+              <a:buNone/>
+            </a:pPr>
+            <a:r>
+              <a:rPr lang="en-US" sz="1400" b="1" dirty="0">
+                <a:solidFill>
+                  <a:srgbClr val="0D9488"/>
+                </a:solidFill>
+                <a:latin typeface="Trebuchet MS" pitchFamily="34" charset="0"/>
+                <a:ea typeface="Trebuchet MS" pitchFamily="34" charset="-122"/>
+                <a:cs typeface="Trebuchet MS" pitchFamily="34" charset="-120"/>
+              </a:rPr>
+              <a:t>ous</a:t>
+            </a:r>
+            <a:endParaRPr lang="en-US" sz="1400" dirty="0"/>
+          </a:p>
+        </p:txBody>
+      </p:sp>
+      <p:sp>
+        <p:nvSpPr>
+          <p:cNvPr id="33" name="Shape 31"/>
+          <p:cNvSpPr/>
+          <p:nvPr/>
+        </p:nvSpPr>
+        <p:spPr>
+          <a:xfrm>
+            <a:off x="365760" y="4096512"/>
+            <a:ext cx="1371600" cy="804672"/>
+          </a:xfrm>
+          <a:prstGeom prst="rect">
+            <a:avLst>
+              <a:gd name="adj" fmla="val 6818"/>
+            </a:avLst>
+          </a:prstGeom>
+          <a:solidFill>
+            <a:srgbClr val="E2E8F0"/>
+          </a:solidFill>
+          <a:ln w="12700">
+            <a:solidFill>
+              <a:srgbClr val="E2E8F0"/>
+            </a:solidFill>
+            <a:prstDash val="solid"/>
+          </a:ln>
+        </p:spPr>
+      </p:sp>
+      <p:sp>
+        <p:nvSpPr>
+          <p:cNvPr id="34" name="Text 32"/>
+          <p:cNvSpPr/>
+          <p:nvPr/>
+        </p:nvSpPr>
+        <p:spPr>
+          <a:xfrm>
+            <a:off x="365760" y="4096512"/>
+            <a:ext cx="1371600" cy="804672"/>
+          </a:xfrm>
+          <a:prstGeom prst="rect">
+            <a:avLst/>
+          </a:prstGeom>
+          <a:noFill/>
+          <a:ln/>
+        </p:spPr>
+        <p:txBody>
+          <a:bodyPr wrap="square" lIns="0" tIns="0" rIns="0" bIns="0" rtlCol="0" anchor="ctr"/>
+          <a:lstStyle/>
+          <a:p>
+            <a:pPr algn="ctr" indent="0" marL="0">
+              <a:buNone/>
+            </a:pPr>
+            <a:r>
+              <a:rPr lang="en-US" sz="1100" b="1" dirty="0">
+                <a:solidFill>
+                  <a:srgbClr val="475569"/>
+                </a:solidFill>
+                <a:latin typeface="Trebuchet MS" pitchFamily="34" charset="0"/>
+                <a:ea typeface="Trebuchet MS" pitchFamily="34" charset="-122"/>
+                <a:cs typeface="Trebuchet MS" pitchFamily="34" charset="-120"/>
+              </a:rPr>
+              <a:t>Phonemes</a:t>
+            </a:r>
+            <a:endParaRPr lang="en-US" sz="1100" dirty="0"/>
+          </a:p>
+        </p:txBody>
+      </p:sp>
+      <p:sp>
+        <p:nvSpPr>
+          <p:cNvPr id="35" name="Shape 33"/>
+          <p:cNvSpPr/>
+          <p:nvPr/>
+        </p:nvSpPr>
+        <p:spPr>
+          <a:xfrm>
+            <a:off x="1874520" y="4096512"/>
+            <a:ext cx="6903720" cy="804672"/>
+          </a:xfrm>
+          <a:prstGeom prst="rect">
+            <a:avLst>
+              <a:gd name="adj" fmla="val 6818"/>
+            </a:avLst>
+          </a:prstGeom>
+          <a:solidFill>
+            <a:srgbClr val="FCE7F3"/>
+          </a:solidFill>
+          <a:ln w="12700">
+            <a:solidFill>
+              <a:srgbClr val="DB2777"/>
+            </a:solidFill>
+            <a:prstDash val="solid"/>
+          </a:ln>
+        </p:spPr>
+      </p:sp>
+      <p:sp>
+        <p:nvSpPr>
+          <p:cNvPr id="36" name="Shape 34"/>
+          <p:cNvSpPr/>
+          <p:nvPr/>
+        </p:nvSpPr>
+        <p:spPr>
+          <a:xfrm>
+            <a:off x="2427732" y="4169664"/>
+            <a:ext cx="685800" cy="384048"/>
+          </a:xfrm>
+          <a:prstGeom prst="rect">
+            <a:avLst>
+              <a:gd name="adj" fmla="val 9524"/>
+            </a:avLst>
+          </a:prstGeom>
+          <a:solidFill>
+            <a:srgbClr val="FFFFFF"/>
+          </a:solidFill>
+          <a:ln w="12700">
+            <a:solidFill>
+              <a:srgbClr val="DB2777"/>
+            </a:solidFill>
+            <a:prstDash val="solid"/>
+          </a:ln>
+        </p:spPr>
+      </p:sp>
+      <p:sp>
+        <p:nvSpPr>
+          <p:cNvPr id="37" name="Text 35"/>
+          <p:cNvSpPr/>
+          <p:nvPr/>
+        </p:nvSpPr>
+        <p:spPr>
+          <a:xfrm>
+            <a:off x="2427732" y="4169664"/>
+            <a:ext cx="685800" cy="384048"/>
+          </a:xfrm>
+          <a:prstGeom prst="rect">
+            <a:avLst/>
+          </a:prstGeom>
+          <a:noFill/>
+          <a:ln/>
+        </p:spPr>
+        <p:txBody>
+          <a:bodyPr wrap="square" lIns="0" tIns="0" rIns="0" bIns="0" rtlCol="0" anchor="ctr"/>
+          <a:lstStyle/>
+          <a:p>
+            <a:pPr algn="ctr" indent="0" marL="0">
+              <a:buNone/>
+            </a:pPr>
+            <a:r>
+              <a:rPr lang="en-US" sz="900" b="1" dirty="0">
+                <a:solidFill>
+                  <a:srgbClr val="9D174D"/>
+                </a:solidFill>
+                <a:latin typeface="Trebuchet MS" pitchFamily="34" charset="0"/>
+                <a:ea typeface="Trebuchet MS" pitchFamily="34" charset="-122"/>
+                <a:cs typeface="Trebuchet MS" pitchFamily="34" charset="-120"/>
+              </a:rPr>
+              <a:t>oi</a:t>
+            </a:r>
+            <a:endParaRPr lang="en-US" sz="900" dirty="0"/>
+          </a:p>
+        </p:txBody>
+      </p:sp>
+      <p:sp>
+        <p:nvSpPr>
+          <p:cNvPr id="38" name="Shape 36"/>
+          <p:cNvSpPr/>
+          <p:nvPr/>
+        </p:nvSpPr>
+        <p:spPr>
+          <a:xfrm>
+            <a:off x="3639312" y="4169664"/>
+            <a:ext cx="685800" cy="384048"/>
+          </a:xfrm>
+          <a:prstGeom prst="rect">
+            <a:avLst>
+              <a:gd name="adj" fmla="val 9524"/>
+            </a:avLst>
+          </a:prstGeom>
+          <a:solidFill>
+            <a:srgbClr val="FFFFFF"/>
+          </a:solidFill>
+          <a:ln w="12700">
+            <a:solidFill>
+              <a:srgbClr val="DB2777"/>
+            </a:solidFill>
+            <a:prstDash val="solid"/>
+          </a:ln>
+        </p:spPr>
+      </p:sp>
+      <p:sp>
+        <p:nvSpPr>
+          <p:cNvPr id="39" name="Text 37"/>
+          <p:cNvSpPr/>
+          <p:nvPr/>
+        </p:nvSpPr>
+        <p:spPr>
+          <a:xfrm>
+            <a:off x="3639312" y="4169664"/>
+            <a:ext cx="685800" cy="384048"/>
+          </a:xfrm>
+          <a:prstGeom prst="rect">
+            <a:avLst/>
+          </a:prstGeom>
+          <a:noFill/>
+          <a:ln/>
+        </p:spPr>
+        <p:txBody>
+          <a:bodyPr wrap="square" lIns="0" tIns="0" rIns="0" bIns="0" rtlCol="0" anchor="ctr"/>
+          <a:lstStyle/>
+          <a:p>
+            <a:pPr algn="ctr" indent="0" marL="0">
+              <a:buNone/>
+            </a:pPr>
+            <a:r>
+              <a:rPr lang="en-US" sz="900" b="1" dirty="0">
+                <a:solidFill>
+                  <a:srgbClr val="9D174D"/>
+                </a:solidFill>
+                <a:latin typeface="Trebuchet MS" pitchFamily="34" charset="0"/>
+                <a:ea typeface="Trebuchet MS" pitchFamily="34" charset="-122"/>
+                <a:cs typeface="Trebuchet MS" pitchFamily="34" charset="-120"/>
+              </a:rPr>
+              <a:t>s</a:t>
+            </a:r>
+            <a:endParaRPr lang="en-US" sz="900" dirty="0"/>
+          </a:p>
+        </p:txBody>
+      </p:sp>
+      <p:sp>
+        <p:nvSpPr>
+          <p:cNvPr id="40" name="Shape 38"/>
+          <p:cNvSpPr/>
+          <p:nvPr/>
+        </p:nvSpPr>
+        <p:spPr>
+          <a:xfrm>
+            <a:off x="4850892" y="4169664"/>
+            <a:ext cx="685800" cy="384048"/>
+          </a:xfrm>
+          <a:prstGeom prst="rect">
+            <a:avLst>
+              <a:gd name="adj" fmla="val 9524"/>
+            </a:avLst>
+          </a:prstGeom>
+          <a:solidFill>
+            <a:srgbClr val="FFFFFF"/>
+          </a:solidFill>
+          <a:ln w="12700">
+            <a:solidFill>
+              <a:srgbClr val="DB2777"/>
+            </a:solidFill>
+            <a:prstDash val="solid"/>
+          </a:ln>
+        </p:spPr>
+      </p:sp>
+      <p:sp>
+        <p:nvSpPr>
+          <p:cNvPr id="41" name="Text 39"/>
+          <p:cNvSpPr/>
+          <p:nvPr/>
+        </p:nvSpPr>
+        <p:spPr>
+          <a:xfrm>
+            <a:off x="4850892" y="4169664"/>
+            <a:ext cx="685800" cy="384048"/>
+          </a:xfrm>
+          <a:prstGeom prst="rect">
+            <a:avLst/>
+          </a:prstGeom>
+          <a:noFill/>
+          <a:ln/>
+        </p:spPr>
+        <p:txBody>
+          <a:bodyPr wrap="square" lIns="0" tIns="0" rIns="0" bIns="0" rtlCol="0" anchor="ctr"/>
+          <a:lstStyle/>
+          <a:p>
+            <a:pPr algn="ctr" indent="0" marL="0">
+              <a:buNone/>
+            </a:pPr>
+            <a:r>
+              <a:rPr lang="en-US" sz="900" b="1" dirty="0">
+                <a:solidFill>
+                  <a:srgbClr val="9D174D"/>
+                </a:solidFill>
+                <a:latin typeface="Trebuchet MS" pitchFamily="34" charset="0"/>
+                <a:ea typeface="Trebuchet MS" pitchFamily="34" charset="-122"/>
+                <a:cs typeface="Trebuchet MS" pitchFamily="34" charset="-120"/>
+              </a:rPr>
+              <a:t>on</a:t>
+            </a:r>
+            <a:endParaRPr lang="en-US" sz="900" dirty="0"/>
+          </a:p>
+        </p:txBody>
+      </p:sp>
+      <p:sp>
+        <p:nvSpPr>
+          <p:cNvPr id="42" name="Shape 40"/>
+          <p:cNvSpPr/>
+          <p:nvPr/>
+        </p:nvSpPr>
+        <p:spPr>
+          <a:xfrm>
+            <a:off x="6062472" y="4169664"/>
+            <a:ext cx="685800" cy="384048"/>
+          </a:xfrm>
+          <a:prstGeom prst="rect">
+            <a:avLst>
+              <a:gd name="adj" fmla="val 9524"/>
+            </a:avLst>
+          </a:prstGeom>
+          <a:solidFill>
+            <a:srgbClr val="FFFFFF"/>
+          </a:solidFill>
+          <a:ln w="12700">
+            <a:solidFill>
+              <a:srgbClr val="DB2777"/>
+            </a:solidFill>
+            <a:prstDash val="solid"/>
+          </a:ln>
+        </p:spPr>
+      </p:sp>
+      <p:sp>
+        <p:nvSpPr>
+          <p:cNvPr id="43" name="Text 41"/>
+          <p:cNvSpPr/>
+          <p:nvPr/>
+        </p:nvSpPr>
+        <p:spPr>
+          <a:xfrm>
+            <a:off x="6062472" y="4169664"/>
+            <a:ext cx="685800" cy="384048"/>
+          </a:xfrm>
+          <a:prstGeom prst="rect">
+            <a:avLst/>
+          </a:prstGeom>
+          <a:noFill/>
+          <a:ln/>
+        </p:spPr>
+        <p:txBody>
+          <a:bodyPr wrap="square" lIns="0" tIns="0" rIns="0" bIns="0" rtlCol="0" anchor="ctr"/>
+          <a:lstStyle/>
+          <a:p>
+            <a:pPr algn="ctr" indent="0" marL="0">
+              <a:buNone/>
+            </a:pPr>
+            <a:r>
+              <a:rPr lang="en-US" sz="900" b="1" dirty="0">
+                <a:solidFill>
+                  <a:srgbClr val="9D174D"/>
+                </a:solidFill>
+                <a:latin typeface="Trebuchet MS" pitchFamily="34" charset="0"/>
+                <a:ea typeface="Trebuchet MS" pitchFamily="34" charset="-122"/>
+                <a:cs typeface="Trebuchet MS" pitchFamily="34" charset="-120"/>
+              </a:rPr>
+              <a:t>ou</a:t>
+            </a:r>
+            <a:endParaRPr lang="en-US" sz="900" dirty="0"/>
+          </a:p>
+        </p:txBody>
+      </p:sp>
+      <p:sp>
+        <p:nvSpPr>
+          <p:cNvPr id="44" name="Text 42"/>
+          <p:cNvSpPr/>
+          <p:nvPr/>
+        </p:nvSpPr>
+        <p:spPr>
+          <a:xfrm>
+            <a:off x="6062472" y="4572000"/>
+            <a:ext cx="685800" cy="219456"/>
           </a:xfrm>
           <a:prstGeom prst="rect">
             <a:avLst/>
@@ -10288,7 +10936,7 @@
               <a:buNone/>
             </a:pPr>
             <a:r>
-              <a:rPr lang="en-US" sz="700" i="1" dirty="0">
+              <a:rPr lang="en-US" sz="750" i="1" dirty="0">
                 <a:solidFill>
                   <a:srgbClr val="94A3B8"/>
                 </a:solidFill>
@@ -10296,49 +10944,49 @@
                 <a:ea typeface="Calibri" pitchFamily="34" charset="-122"/>
                 <a:cs typeface="Calibri" pitchFamily="34" charset="-120"/>
               </a:rPr>
-              <a:t>'e' dropped before vowel suffix</a:t>
-            </a:r>
-            <a:endParaRPr lang="en-US" sz="700" dirty="0"/>
-          </a:p>
-        </p:txBody>
-      </p:sp>
-      <p:sp>
-        <p:nvSpPr>
-          <p:cNvPr id="23" name="Shape 21"/>
-          <p:cNvSpPr/>
-          <p:nvPr/>
-        </p:nvSpPr>
-        <p:spPr>
-          <a:xfrm>
-            <a:off x="365760" y="3273552"/>
-            <a:ext cx="1371600" cy="658368"/>
+              <a:t>/u/</a:t>
+            </a:r>
+            <a:endParaRPr lang="en-US" sz="750" dirty="0"/>
+          </a:p>
+        </p:txBody>
+      </p:sp>
+      <p:sp>
+        <p:nvSpPr>
+          <p:cNvPr id="45" name="Shape 43"/>
+          <p:cNvSpPr/>
+          <p:nvPr/>
+        </p:nvSpPr>
+        <p:spPr>
+          <a:xfrm>
+            <a:off x="7274052" y="4169664"/>
+            <a:ext cx="685800" cy="384048"/>
           </a:xfrm>
           <a:prstGeom prst="rect">
             <a:avLst>
-              <a:gd name="adj" fmla="val 8333"/>
+              <a:gd name="adj" fmla="val 9524"/>
             </a:avLst>
           </a:prstGeom>
           <a:solidFill>
-            <a:srgbClr val="E2E8F0"/>
-          </a:solidFill>
-          <a:ln w="12700">
-            <a:solidFill>
-              <a:srgbClr val="E2E8F0"/>
-            </a:solidFill>
-            <a:prstDash val="solid"/>
-          </a:ln>
-        </p:spPr>
-      </p:sp>
-      <p:sp>
-        <p:nvSpPr>
-          <p:cNvPr id="24" name="Text 22"/>
-          <p:cNvSpPr/>
-          <p:nvPr/>
-        </p:nvSpPr>
-        <p:spPr>
-          <a:xfrm>
-            <a:off x="365760" y="3273552"/>
-            <a:ext cx="1371600" cy="658368"/>
+            <a:srgbClr val="FFFFFF"/>
+          </a:solidFill>
+          <a:ln w="12700">
+            <a:solidFill>
+              <a:srgbClr val="DB2777"/>
+            </a:solidFill>
+            <a:prstDash val="solid"/>
+          </a:ln>
+        </p:spPr>
+      </p:sp>
+      <p:sp>
+        <p:nvSpPr>
+          <p:cNvPr id="46" name="Text 44"/>
+          <p:cNvSpPr/>
+          <p:nvPr/>
+        </p:nvSpPr>
+        <p:spPr>
+          <a:xfrm>
+            <a:off x="7274052" y="4169664"/>
+            <a:ext cx="685800" cy="384048"/>
           </a:xfrm>
           <a:prstGeom prst="rect">
             <a:avLst/>
@@ -10354,887 +11002,17 @@
               <a:buNone/>
             </a:pPr>
             <a:r>
-              <a:rPr lang="en-US" sz="1100" b="1" dirty="0">
-                <a:solidFill>
-                  <a:srgbClr val="475569"/>
+              <a:rPr lang="en-US" sz="900" b="1" dirty="0">
+                <a:solidFill>
+                  <a:srgbClr val="9D174D"/>
                 </a:solidFill>
                 <a:latin typeface="Trebuchet MS" pitchFamily="34" charset="0"/>
                 <a:ea typeface="Trebuchet MS" pitchFamily="34" charset="-122"/>
                 <a:cs typeface="Trebuchet MS" pitchFamily="34" charset="-120"/>
               </a:rPr>
-              <a:t>Syllables</a:t>
-            </a:r>
-            <a:endParaRPr lang="en-US" sz="1100" dirty="0"/>
-          </a:p>
-        </p:txBody>
-      </p:sp>
-      <p:sp>
-        <p:nvSpPr>
-          <p:cNvPr id="25" name="Shape 23"/>
-          <p:cNvSpPr/>
-          <p:nvPr/>
-        </p:nvSpPr>
-        <p:spPr>
-          <a:xfrm>
-            <a:off x="1874520" y="3273552"/>
-            <a:ext cx="6903720" cy="658368"/>
-          </a:xfrm>
-          <a:prstGeom prst="rect">
-            <a:avLst>
-              <a:gd name="adj" fmla="val 8333"/>
-            </a:avLst>
-          </a:prstGeom>
-          <a:solidFill>
-            <a:srgbClr val="CCFBF1"/>
-          </a:solidFill>
-          <a:ln w="12700">
-            <a:solidFill>
-              <a:srgbClr val="0D9488"/>
-            </a:solidFill>
-            <a:prstDash val="solid"/>
-          </a:ln>
-        </p:spPr>
-      </p:sp>
-      <p:sp>
-        <p:nvSpPr>
-          <p:cNvPr id="26" name="Shape 24"/>
-          <p:cNvSpPr/>
-          <p:nvPr/>
-        </p:nvSpPr>
-        <p:spPr>
-          <a:xfrm>
-            <a:off x="2313432" y="3364992"/>
-            <a:ext cx="1645920" cy="475488"/>
-          </a:xfrm>
-          <a:prstGeom prst="rect">
-            <a:avLst>
-              <a:gd name="adj" fmla="val 9615"/>
-            </a:avLst>
-          </a:prstGeom>
-          <a:solidFill>
-            <a:srgbClr val="FFFFFF"/>
-          </a:solidFill>
-          <a:ln w="12700">
-            <a:solidFill>
-              <a:srgbClr val="0D9488"/>
-            </a:solidFill>
-            <a:prstDash val="solid"/>
-          </a:ln>
-        </p:spPr>
-      </p:sp>
-      <p:sp>
-        <p:nvSpPr>
-          <p:cNvPr id="27" name="Text 25"/>
-          <p:cNvSpPr/>
-          <p:nvPr/>
-        </p:nvSpPr>
-        <p:spPr>
-          <a:xfrm>
-            <a:off x="2313432" y="3364992"/>
-            <a:ext cx="1645920" cy="475488"/>
-          </a:xfrm>
-          <a:prstGeom prst="rect">
-            <a:avLst/>
-          </a:prstGeom>
-          <a:noFill/>
-          <a:ln/>
-        </p:spPr>
-        <p:txBody>
-          <a:bodyPr wrap="square" lIns="0" tIns="0" rIns="0" bIns="0" rtlCol="0" anchor="ctr"/>
-          <a:lstStyle/>
-          <a:p>
-            <a:pPr algn="ctr" indent="0" marL="0">
-              <a:buNone/>
-            </a:pPr>
-            <a:r>
-              <a:rPr lang="en-US" sz="1400" b="1" dirty="0">
-                <a:solidFill>
-                  <a:srgbClr val="0D9488"/>
-                </a:solidFill>
-                <a:latin typeface="Trebuchet MS" pitchFamily="34" charset="0"/>
-                <a:ea typeface="Trebuchet MS" pitchFamily="34" charset="-122"/>
-                <a:cs typeface="Trebuchet MS" pitchFamily="34" charset="-120"/>
-              </a:rPr>
-              <a:t>cou</a:t>
-            </a:r>
-            <a:endParaRPr lang="en-US" sz="1400" dirty="0"/>
-          </a:p>
-        </p:txBody>
-      </p:sp>
-      <p:sp>
-        <p:nvSpPr>
-          <p:cNvPr id="28" name="Text 26"/>
-          <p:cNvSpPr/>
-          <p:nvPr/>
-        </p:nvSpPr>
-        <p:spPr>
-          <a:xfrm>
-            <a:off x="3959352" y="3364992"/>
-            <a:ext cx="411480" cy="475488"/>
-          </a:xfrm>
-          <a:prstGeom prst="rect">
-            <a:avLst/>
-          </a:prstGeom>
-          <a:noFill/>
-          <a:ln/>
-        </p:spPr>
-        <p:txBody>
-          <a:bodyPr wrap="square" lIns="0" tIns="0" rIns="0" bIns="0" rtlCol="0" anchor="ctr"/>
-          <a:lstStyle/>
-          <a:p>
-            <a:pPr algn="ctr" indent="0" marL="0">
-              <a:buNone/>
-            </a:pPr>
-            <a:r>
-              <a:rPr lang="en-US" sz="1600" b="1" dirty="0">
-                <a:solidFill>
-                  <a:srgbClr val="0D9488"/>
-                </a:solidFill>
-                <a:latin typeface="Trebuchet MS" pitchFamily="34" charset="0"/>
-                <a:ea typeface="Trebuchet MS" pitchFamily="34" charset="-122"/>
-                <a:cs typeface="Trebuchet MS" pitchFamily="34" charset="-120"/>
-              </a:rPr>
-              <a:t>·</a:t>
-            </a:r>
-            <a:endParaRPr lang="en-US" sz="1600" dirty="0"/>
-          </a:p>
-        </p:txBody>
-      </p:sp>
-      <p:sp>
-        <p:nvSpPr>
-          <p:cNvPr id="29" name="Shape 27"/>
-          <p:cNvSpPr/>
-          <p:nvPr/>
-        </p:nvSpPr>
-        <p:spPr>
-          <a:xfrm>
-            <a:off x="4370832" y="3364992"/>
-            <a:ext cx="1645920" cy="475488"/>
-          </a:xfrm>
-          <a:prstGeom prst="rect">
-            <a:avLst>
-              <a:gd name="adj" fmla="val 9615"/>
-            </a:avLst>
-          </a:prstGeom>
-          <a:solidFill>
-            <a:srgbClr val="FFFFFF"/>
-          </a:solidFill>
-          <a:ln w="12700">
-            <a:solidFill>
-              <a:srgbClr val="0D9488"/>
-            </a:solidFill>
-            <a:prstDash val="solid"/>
-          </a:ln>
-        </p:spPr>
-      </p:sp>
-      <p:sp>
-        <p:nvSpPr>
-          <p:cNvPr id="30" name="Text 28"/>
-          <p:cNvSpPr/>
-          <p:nvPr/>
-        </p:nvSpPr>
-        <p:spPr>
-          <a:xfrm>
-            <a:off x="4370832" y="3364992"/>
-            <a:ext cx="1645920" cy="475488"/>
-          </a:xfrm>
-          <a:prstGeom prst="rect">
-            <a:avLst/>
-          </a:prstGeom>
-          <a:noFill/>
-          <a:ln/>
-        </p:spPr>
-        <p:txBody>
-          <a:bodyPr wrap="square" lIns="0" tIns="0" rIns="0" bIns="0" rtlCol="0" anchor="ctr"/>
-          <a:lstStyle/>
-          <a:p>
-            <a:pPr algn="ctr" indent="0" marL="0">
-              <a:buNone/>
-            </a:pPr>
-            <a:r>
-              <a:rPr lang="en-US" sz="1400" b="1" dirty="0">
-                <a:solidFill>
-                  <a:srgbClr val="0D9488"/>
-                </a:solidFill>
-                <a:latin typeface="Trebuchet MS" pitchFamily="34" charset="0"/>
-                <a:ea typeface="Trebuchet MS" pitchFamily="34" charset="-122"/>
-                <a:cs typeface="Trebuchet MS" pitchFamily="34" charset="-120"/>
-              </a:rPr>
-              <a:t>ra</a:t>
-            </a:r>
-            <a:endParaRPr lang="en-US" sz="1400" dirty="0"/>
-          </a:p>
-        </p:txBody>
-      </p:sp>
-      <p:sp>
-        <p:nvSpPr>
-          <p:cNvPr id="31" name="Text 29"/>
-          <p:cNvSpPr/>
-          <p:nvPr/>
-        </p:nvSpPr>
-        <p:spPr>
-          <a:xfrm>
-            <a:off x="6016752" y="3364992"/>
-            <a:ext cx="411480" cy="475488"/>
-          </a:xfrm>
-          <a:prstGeom prst="rect">
-            <a:avLst/>
-          </a:prstGeom>
-          <a:noFill/>
-          <a:ln/>
-        </p:spPr>
-        <p:txBody>
-          <a:bodyPr wrap="square" lIns="0" tIns="0" rIns="0" bIns="0" rtlCol="0" anchor="ctr"/>
-          <a:lstStyle/>
-          <a:p>
-            <a:pPr algn="ctr" indent="0" marL="0">
-              <a:buNone/>
-            </a:pPr>
-            <a:r>
-              <a:rPr lang="en-US" sz="1600" b="1" dirty="0">
-                <a:solidFill>
-                  <a:srgbClr val="0D9488"/>
-                </a:solidFill>
-                <a:latin typeface="Trebuchet MS" pitchFamily="34" charset="0"/>
-                <a:ea typeface="Trebuchet MS" pitchFamily="34" charset="-122"/>
-                <a:cs typeface="Trebuchet MS" pitchFamily="34" charset="-120"/>
-              </a:rPr>
-              <a:t>·</a:t>
-            </a:r>
-            <a:endParaRPr lang="en-US" sz="1600" dirty="0"/>
-          </a:p>
-        </p:txBody>
-      </p:sp>
-      <p:sp>
-        <p:nvSpPr>
-          <p:cNvPr id="32" name="Shape 30"/>
-          <p:cNvSpPr/>
-          <p:nvPr/>
-        </p:nvSpPr>
-        <p:spPr>
-          <a:xfrm>
-            <a:off x="6428232" y="3364992"/>
-            <a:ext cx="1645920" cy="475488"/>
-          </a:xfrm>
-          <a:prstGeom prst="rect">
-            <a:avLst>
-              <a:gd name="adj" fmla="val 9615"/>
-            </a:avLst>
-          </a:prstGeom>
-          <a:solidFill>
-            <a:srgbClr val="FFFFFF"/>
-          </a:solidFill>
-          <a:ln w="12700">
-            <a:solidFill>
-              <a:srgbClr val="0D9488"/>
-            </a:solidFill>
-            <a:prstDash val="solid"/>
-          </a:ln>
-        </p:spPr>
-      </p:sp>
-      <p:sp>
-        <p:nvSpPr>
-          <p:cNvPr id="33" name="Text 31"/>
-          <p:cNvSpPr/>
-          <p:nvPr/>
-        </p:nvSpPr>
-        <p:spPr>
-          <a:xfrm>
-            <a:off x="6428232" y="3364992"/>
-            <a:ext cx="1645920" cy="475488"/>
-          </a:xfrm>
-          <a:prstGeom prst="rect">
-            <a:avLst/>
-          </a:prstGeom>
-          <a:noFill/>
-          <a:ln/>
-        </p:spPr>
-        <p:txBody>
-          <a:bodyPr wrap="square" lIns="0" tIns="0" rIns="0" bIns="0" rtlCol="0" anchor="ctr"/>
-          <a:lstStyle/>
-          <a:p>
-            <a:pPr algn="ctr" indent="0" marL="0">
-              <a:buNone/>
-            </a:pPr>
-            <a:r>
-              <a:rPr lang="en-US" sz="1400" b="1" dirty="0">
-                <a:solidFill>
-                  <a:srgbClr val="0D9488"/>
-                </a:solidFill>
-                <a:latin typeface="Trebuchet MS" pitchFamily="34" charset="0"/>
-                <a:ea typeface="Trebuchet MS" pitchFamily="34" charset="-122"/>
-                <a:cs typeface="Trebuchet MS" pitchFamily="34" charset="-120"/>
-              </a:rPr>
-              <a:t>geous</a:t>
-            </a:r>
-            <a:endParaRPr lang="en-US" sz="1400" dirty="0"/>
-          </a:p>
-        </p:txBody>
-      </p:sp>
-      <p:sp>
-        <p:nvSpPr>
-          <p:cNvPr id="34" name="Shape 32"/>
-          <p:cNvSpPr/>
-          <p:nvPr/>
-        </p:nvSpPr>
-        <p:spPr>
-          <a:xfrm>
-            <a:off x="365760" y="4096512"/>
-            <a:ext cx="1371600" cy="804672"/>
-          </a:xfrm>
-          <a:prstGeom prst="rect">
-            <a:avLst>
-              <a:gd name="adj" fmla="val 6818"/>
-            </a:avLst>
-          </a:prstGeom>
-          <a:solidFill>
-            <a:srgbClr val="E2E8F0"/>
-          </a:solidFill>
-          <a:ln w="12700">
-            <a:solidFill>
-              <a:srgbClr val="E2E8F0"/>
-            </a:solidFill>
-            <a:prstDash val="solid"/>
-          </a:ln>
-        </p:spPr>
-      </p:sp>
-      <p:sp>
-        <p:nvSpPr>
-          <p:cNvPr id="35" name="Text 33"/>
-          <p:cNvSpPr/>
-          <p:nvPr/>
-        </p:nvSpPr>
-        <p:spPr>
-          <a:xfrm>
-            <a:off x="365760" y="4096512"/>
-            <a:ext cx="1371600" cy="804672"/>
-          </a:xfrm>
-          <a:prstGeom prst="rect">
-            <a:avLst/>
-          </a:prstGeom>
-          <a:noFill/>
-          <a:ln/>
-        </p:spPr>
-        <p:txBody>
-          <a:bodyPr wrap="square" lIns="0" tIns="0" rIns="0" bIns="0" rtlCol="0" anchor="ctr"/>
-          <a:lstStyle/>
-          <a:p>
-            <a:pPr algn="ctr" indent="0" marL="0">
-              <a:buNone/>
-            </a:pPr>
-            <a:r>
-              <a:rPr lang="en-US" sz="1100" b="1" dirty="0">
-                <a:solidFill>
-                  <a:srgbClr val="475569"/>
-                </a:solidFill>
-                <a:latin typeface="Trebuchet MS" pitchFamily="34" charset="0"/>
-                <a:ea typeface="Trebuchet MS" pitchFamily="34" charset="-122"/>
-                <a:cs typeface="Trebuchet MS" pitchFamily="34" charset="-120"/>
-              </a:rPr>
-              <a:t>Phonemes</a:t>
-            </a:r>
-            <a:endParaRPr lang="en-US" sz="1100" dirty="0"/>
-          </a:p>
-        </p:txBody>
-      </p:sp>
-      <p:sp>
-        <p:nvSpPr>
-          <p:cNvPr id="36" name="Shape 34"/>
-          <p:cNvSpPr/>
-          <p:nvPr/>
-        </p:nvSpPr>
-        <p:spPr>
-          <a:xfrm>
-            <a:off x="1874520" y="4096512"/>
-            <a:ext cx="6903720" cy="804672"/>
-          </a:xfrm>
-          <a:prstGeom prst="rect">
-            <a:avLst>
-              <a:gd name="adj" fmla="val 6818"/>
-            </a:avLst>
-          </a:prstGeom>
-          <a:solidFill>
-            <a:srgbClr val="FCE7F3"/>
-          </a:solidFill>
-          <a:ln w="12700">
-            <a:solidFill>
-              <a:srgbClr val="DB2777"/>
-            </a:solidFill>
-            <a:prstDash val="solid"/>
-          </a:ln>
-        </p:spPr>
-      </p:sp>
-      <p:sp>
-        <p:nvSpPr>
-          <p:cNvPr id="37" name="Shape 35"/>
-          <p:cNvSpPr/>
-          <p:nvPr/>
-        </p:nvSpPr>
-        <p:spPr>
-          <a:xfrm>
-            <a:off x="2254649" y="4169664"/>
-            <a:ext cx="685800" cy="384048"/>
-          </a:xfrm>
-          <a:prstGeom prst="rect">
-            <a:avLst>
-              <a:gd name="adj" fmla="val 9524"/>
-            </a:avLst>
-          </a:prstGeom>
-          <a:solidFill>
-            <a:srgbClr val="FFFFFF"/>
-          </a:solidFill>
-          <a:ln w="12700">
-            <a:solidFill>
-              <a:srgbClr val="DB2777"/>
-            </a:solidFill>
-            <a:prstDash val="solid"/>
-          </a:ln>
-        </p:spPr>
-      </p:sp>
-      <p:sp>
-        <p:nvSpPr>
-          <p:cNvPr id="38" name="Text 36"/>
-          <p:cNvSpPr/>
-          <p:nvPr/>
-        </p:nvSpPr>
-        <p:spPr>
-          <a:xfrm>
-            <a:off x="2254649" y="4169664"/>
-            <a:ext cx="685800" cy="384048"/>
-          </a:xfrm>
-          <a:prstGeom prst="rect">
-            <a:avLst/>
-          </a:prstGeom>
-          <a:noFill/>
-          <a:ln/>
-        </p:spPr>
-        <p:txBody>
-          <a:bodyPr wrap="square" lIns="0" tIns="0" rIns="0" bIns="0" rtlCol="0" anchor="ctr"/>
-          <a:lstStyle/>
-          <a:p>
-            <a:pPr algn="ctr" indent="0" marL="0">
-              <a:buNone/>
-            </a:pPr>
-            <a:r>
-              <a:rPr lang="en-US" sz="900" b="1" dirty="0">
-                <a:solidFill>
-                  <a:srgbClr val="9D174D"/>
-                </a:solidFill>
-                <a:latin typeface="Trebuchet MS" pitchFamily="34" charset="0"/>
-                <a:ea typeface="Trebuchet MS" pitchFamily="34" charset="-122"/>
-                <a:cs typeface="Trebuchet MS" pitchFamily="34" charset="-120"/>
-              </a:rPr>
-              <a:t>c</a:t>
+              <a:t>s</a:t>
             </a:r>
             <a:endParaRPr lang="en-US" sz="900" dirty="0"/>
-          </a:p>
-        </p:txBody>
-      </p:sp>
-      <p:sp>
-        <p:nvSpPr>
-          <p:cNvPr id="39" name="Text 37"/>
-          <p:cNvSpPr/>
-          <p:nvPr/>
-        </p:nvSpPr>
-        <p:spPr>
-          <a:xfrm>
-            <a:off x="2254649" y="4572000"/>
-            <a:ext cx="685800" cy="219456"/>
-          </a:xfrm>
-          <a:prstGeom prst="rect">
-            <a:avLst/>
-          </a:prstGeom>
-          <a:noFill/>
-          <a:ln/>
-        </p:spPr>
-        <p:txBody>
-          <a:bodyPr wrap="square" lIns="0" tIns="0" rIns="0" bIns="0" rtlCol="0" anchor="t"/>
-          <a:lstStyle/>
-          <a:p>
-            <a:pPr algn="ctr" indent="0" marL="0">
-              <a:buNone/>
-            </a:pPr>
-            <a:r>
-              <a:rPr lang="en-US" sz="750" i="1" dirty="0">
-                <a:solidFill>
-                  <a:srgbClr val="94A3B8"/>
-                </a:solidFill>
-                <a:latin typeface="Calibri" pitchFamily="34" charset="0"/>
-                <a:ea typeface="Calibri" pitchFamily="34" charset="-122"/>
-                <a:cs typeface="Calibri" pitchFamily="34" charset="-120"/>
-              </a:rPr>
-              <a:t>/k/</a:t>
-            </a:r>
-            <a:endParaRPr lang="en-US" sz="750" dirty="0"/>
-          </a:p>
-        </p:txBody>
-      </p:sp>
-      <p:sp>
-        <p:nvSpPr>
-          <p:cNvPr id="40" name="Shape 38"/>
-          <p:cNvSpPr/>
-          <p:nvPr/>
-        </p:nvSpPr>
-        <p:spPr>
-          <a:xfrm>
-            <a:off x="3293146" y="4169664"/>
-            <a:ext cx="685800" cy="384048"/>
-          </a:xfrm>
-          <a:prstGeom prst="rect">
-            <a:avLst>
-              <a:gd name="adj" fmla="val 9524"/>
-            </a:avLst>
-          </a:prstGeom>
-          <a:solidFill>
-            <a:srgbClr val="FFFFFF"/>
-          </a:solidFill>
-          <a:ln w="12700">
-            <a:solidFill>
-              <a:srgbClr val="DB2777"/>
-            </a:solidFill>
-            <a:prstDash val="solid"/>
-          </a:ln>
-        </p:spPr>
-      </p:sp>
-      <p:sp>
-        <p:nvSpPr>
-          <p:cNvPr id="41" name="Text 39"/>
-          <p:cNvSpPr/>
-          <p:nvPr/>
-        </p:nvSpPr>
-        <p:spPr>
-          <a:xfrm>
-            <a:off x="3293146" y="4169664"/>
-            <a:ext cx="685800" cy="384048"/>
-          </a:xfrm>
-          <a:prstGeom prst="rect">
-            <a:avLst/>
-          </a:prstGeom>
-          <a:noFill/>
-          <a:ln/>
-        </p:spPr>
-        <p:txBody>
-          <a:bodyPr wrap="square" lIns="0" tIns="0" rIns="0" bIns="0" rtlCol="0" anchor="ctr"/>
-          <a:lstStyle/>
-          <a:p>
-            <a:pPr algn="ctr" indent="0" marL="0">
-              <a:buNone/>
-            </a:pPr>
-            <a:r>
-              <a:rPr lang="en-US" sz="900" b="1" dirty="0">
-                <a:solidFill>
-                  <a:srgbClr val="9D174D"/>
-                </a:solidFill>
-                <a:latin typeface="Trebuchet MS" pitchFamily="34" charset="0"/>
-                <a:ea typeface="Trebuchet MS" pitchFamily="34" charset="-122"/>
-                <a:cs typeface="Trebuchet MS" pitchFamily="34" charset="-120"/>
-              </a:rPr>
-              <a:t>ou</a:t>
-            </a:r>
-            <a:endParaRPr lang="en-US" sz="900" dirty="0"/>
-          </a:p>
-        </p:txBody>
-      </p:sp>
-      <p:sp>
-        <p:nvSpPr>
-          <p:cNvPr id="42" name="Shape 40"/>
-          <p:cNvSpPr/>
-          <p:nvPr/>
-        </p:nvSpPr>
-        <p:spPr>
-          <a:xfrm>
-            <a:off x="4331643" y="4169664"/>
-            <a:ext cx="685800" cy="384048"/>
-          </a:xfrm>
-          <a:prstGeom prst="rect">
-            <a:avLst>
-              <a:gd name="adj" fmla="val 9524"/>
-            </a:avLst>
-          </a:prstGeom>
-          <a:solidFill>
-            <a:srgbClr val="FFFFFF"/>
-          </a:solidFill>
-          <a:ln w="12700">
-            <a:solidFill>
-              <a:srgbClr val="DB2777"/>
-            </a:solidFill>
-            <a:prstDash val="solid"/>
-          </a:ln>
-        </p:spPr>
-      </p:sp>
-      <p:sp>
-        <p:nvSpPr>
-          <p:cNvPr id="43" name="Text 41"/>
-          <p:cNvSpPr/>
-          <p:nvPr/>
-        </p:nvSpPr>
-        <p:spPr>
-          <a:xfrm>
-            <a:off x="4331643" y="4169664"/>
-            <a:ext cx="685800" cy="384048"/>
-          </a:xfrm>
-          <a:prstGeom prst="rect">
-            <a:avLst/>
-          </a:prstGeom>
-          <a:noFill/>
-          <a:ln/>
-        </p:spPr>
-        <p:txBody>
-          <a:bodyPr wrap="square" lIns="0" tIns="0" rIns="0" bIns="0" rtlCol="0" anchor="ctr"/>
-          <a:lstStyle/>
-          <a:p>
-            <a:pPr algn="ctr" indent="0" marL="0">
-              <a:buNone/>
-            </a:pPr>
-            <a:r>
-              <a:rPr lang="en-US" sz="900" b="1" dirty="0">
-                <a:solidFill>
-                  <a:srgbClr val="9D174D"/>
-                </a:solidFill>
-                <a:latin typeface="Trebuchet MS" pitchFamily="34" charset="0"/>
-                <a:ea typeface="Trebuchet MS" pitchFamily="34" charset="-122"/>
-                <a:cs typeface="Trebuchet MS" pitchFamily="34" charset="-120"/>
-              </a:rPr>
-              <a:t>r</a:t>
-            </a:r>
-            <a:endParaRPr lang="en-US" sz="900" dirty="0"/>
-          </a:p>
-        </p:txBody>
-      </p:sp>
-      <p:sp>
-        <p:nvSpPr>
-          <p:cNvPr id="44" name="Shape 42"/>
-          <p:cNvSpPr/>
-          <p:nvPr/>
-        </p:nvSpPr>
-        <p:spPr>
-          <a:xfrm>
-            <a:off x="5370141" y="4169664"/>
-            <a:ext cx="685800" cy="384048"/>
-          </a:xfrm>
-          <a:prstGeom prst="rect">
-            <a:avLst>
-              <a:gd name="adj" fmla="val 9524"/>
-            </a:avLst>
-          </a:prstGeom>
-          <a:solidFill>
-            <a:srgbClr val="FFFFFF"/>
-          </a:solidFill>
-          <a:ln w="12700">
-            <a:solidFill>
-              <a:srgbClr val="DB2777"/>
-            </a:solidFill>
-            <a:prstDash val="solid"/>
-          </a:ln>
-        </p:spPr>
-      </p:sp>
-      <p:sp>
-        <p:nvSpPr>
-          <p:cNvPr id="45" name="Text 43"/>
-          <p:cNvSpPr/>
-          <p:nvPr/>
-        </p:nvSpPr>
-        <p:spPr>
-          <a:xfrm>
-            <a:off x="5370141" y="4169664"/>
-            <a:ext cx="685800" cy="384048"/>
-          </a:xfrm>
-          <a:prstGeom prst="rect">
-            <a:avLst/>
-          </a:prstGeom>
-          <a:noFill/>
-          <a:ln/>
-        </p:spPr>
-        <p:txBody>
-          <a:bodyPr wrap="square" lIns="0" tIns="0" rIns="0" bIns="0" rtlCol="0" anchor="ctr"/>
-          <a:lstStyle/>
-          <a:p>
-            <a:pPr algn="ctr" indent="0" marL="0">
-              <a:buNone/>
-            </a:pPr>
-            <a:r>
-              <a:rPr lang="en-US" sz="900" b="1" dirty="0">
-                <a:solidFill>
-                  <a:srgbClr val="9D174D"/>
-                </a:solidFill>
-                <a:latin typeface="Trebuchet MS" pitchFamily="34" charset="0"/>
-                <a:ea typeface="Trebuchet MS" pitchFamily="34" charset="-122"/>
-                <a:cs typeface="Trebuchet MS" pitchFamily="34" charset="-120"/>
-              </a:rPr>
-              <a:t>a</a:t>
-            </a:r>
-            <a:endParaRPr lang="en-US" sz="900" dirty="0"/>
-          </a:p>
-        </p:txBody>
-      </p:sp>
-      <p:sp>
-        <p:nvSpPr>
-          <p:cNvPr id="46" name="Shape 44"/>
-          <p:cNvSpPr/>
-          <p:nvPr/>
-        </p:nvSpPr>
-        <p:spPr>
-          <a:xfrm>
-            <a:off x="6408638" y="4169664"/>
-            <a:ext cx="685800" cy="384048"/>
-          </a:xfrm>
-          <a:prstGeom prst="rect">
-            <a:avLst>
-              <a:gd name="adj" fmla="val 9524"/>
-            </a:avLst>
-          </a:prstGeom>
-          <a:solidFill>
-            <a:srgbClr val="FFFFFF"/>
-          </a:solidFill>
-          <a:ln w="12700">
-            <a:solidFill>
-              <a:srgbClr val="DB2777"/>
-            </a:solidFill>
-            <a:prstDash val="solid"/>
-          </a:ln>
-        </p:spPr>
-      </p:sp>
-      <p:sp>
-        <p:nvSpPr>
-          <p:cNvPr id="47" name="Text 45"/>
-          <p:cNvSpPr/>
-          <p:nvPr/>
-        </p:nvSpPr>
-        <p:spPr>
-          <a:xfrm>
-            <a:off x="6408638" y="4169664"/>
-            <a:ext cx="685800" cy="384048"/>
-          </a:xfrm>
-          <a:prstGeom prst="rect">
-            <a:avLst/>
-          </a:prstGeom>
-          <a:noFill/>
-          <a:ln/>
-        </p:spPr>
-        <p:txBody>
-          <a:bodyPr wrap="square" lIns="0" tIns="0" rIns="0" bIns="0" rtlCol="0" anchor="ctr"/>
-          <a:lstStyle/>
-          <a:p>
-            <a:pPr algn="ctr" indent="0" marL="0">
-              <a:buNone/>
-            </a:pPr>
-            <a:r>
-              <a:rPr lang="en-US" sz="900" b="1" dirty="0">
-                <a:solidFill>
-                  <a:srgbClr val="9D174D"/>
-                </a:solidFill>
-                <a:latin typeface="Trebuchet MS" pitchFamily="34" charset="0"/>
-                <a:ea typeface="Trebuchet MS" pitchFamily="34" charset="-122"/>
-                <a:cs typeface="Trebuchet MS" pitchFamily="34" charset="-120"/>
-              </a:rPr>
-              <a:t>g</a:t>
-            </a:r>
-            <a:endParaRPr lang="en-US" sz="900" dirty="0"/>
-          </a:p>
-        </p:txBody>
-      </p:sp>
-      <p:sp>
-        <p:nvSpPr>
-          <p:cNvPr id="48" name="Shape 46"/>
-          <p:cNvSpPr/>
-          <p:nvPr/>
-        </p:nvSpPr>
-        <p:spPr>
-          <a:xfrm>
-            <a:off x="7447135" y="4169664"/>
-            <a:ext cx="685800" cy="384048"/>
-          </a:xfrm>
-          <a:prstGeom prst="rect">
-            <a:avLst>
-              <a:gd name="adj" fmla="val 9524"/>
-            </a:avLst>
-          </a:prstGeom>
-          <a:solidFill>
-            <a:srgbClr val="FFFFFF"/>
-          </a:solidFill>
-          <a:ln w="12700">
-            <a:solidFill>
-              <a:srgbClr val="DB2777"/>
-            </a:solidFill>
-            <a:prstDash val="solid"/>
-          </a:ln>
-        </p:spPr>
-      </p:sp>
-      <p:sp>
-        <p:nvSpPr>
-          <p:cNvPr id="49" name="Text 47"/>
-          <p:cNvSpPr/>
-          <p:nvPr/>
-        </p:nvSpPr>
-        <p:spPr>
-          <a:xfrm>
-            <a:off x="7447135" y="4169664"/>
-            <a:ext cx="685800" cy="384048"/>
-          </a:xfrm>
-          <a:prstGeom prst="rect">
-            <a:avLst/>
-          </a:prstGeom>
-          <a:noFill/>
-          <a:ln/>
-        </p:spPr>
-        <p:txBody>
-          <a:bodyPr wrap="square" lIns="0" tIns="0" rIns="0" bIns="0" rtlCol="0" anchor="ctr"/>
-          <a:lstStyle/>
-          <a:p>
-            <a:pPr algn="ctr" indent="0" marL="0">
-              <a:buNone/>
-            </a:pPr>
-            <a:r>
-              <a:rPr lang="en-US" sz="900" b="1" dirty="0">
-                <a:solidFill>
-                  <a:srgbClr val="9D174D"/>
-                </a:solidFill>
-                <a:latin typeface="Trebuchet MS" pitchFamily="34" charset="0"/>
-                <a:ea typeface="Trebuchet MS" pitchFamily="34" charset="-122"/>
-                <a:cs typeface="Trebuchet MS" pitchFamily="34" charset="-120"/>
-              </a:rPr>
-              <a:t>eous</a:t>
-            </a:r>
-            <a:endParaRPr lang="en-US" sz="900" dirty="0"/>
-          </a:p>
-        </p:txBody>
-      </p:sp>
-      <p:sp>
-        <p:nvSpPr>
-          <p:cNvPr id="50" name="Text 48"/>
-          <p:cNvSpPr/>
-          <p:nvPr/>
-        </p:nvSpPr>
-        <p:spPr>
-          <a:xfrm>
-            <a:off x="7447135" y="4572000"/>
-            <a:ext cx="685800" cy="219456"/>
-          </a:xfrm>
-          <a:prstGeom prst="rect">
-            <a:avLst/>
-          </a:prstGeom>
-          <a:noFill/>
-          <a:ln/>
-        </p:spPr>
-        <p:txBody>
-          <a:bodyPr wrap="square" lIns="0" tIns="0" rIns="0" bIns="0" rtlCol="0" anchor="t"/>
-          <a:lstStyle/>
-          <a:p>
-            <a:pPr algn="ctr" indent="0" marL="0">
-              <a:buNone/>
-            </a:pPr>
-            <a:r>
-              <a:rPr lang="en-US" sz="750" i="1" dirty="0">
-                <a:solidFill>
-                  <a:srgbClr val="94A3B8"/>
-                </a:solidFill>
-                <a:latin typeface="Calibri" pitchFamily="34" charset="0"/>
-                <a:ea typeface="Calibri" pitchFamily="34" charset="-122"/>
-                <a:cs typeface="Calibri" pitchFamily="34" charset="-120"/>
-              </a:rPr>
-              <a:t>/us/</a:t>
-            </a:r>
-            <a:endParaRPr lang="en-US" sz="750" dirty="0"/>
           </a:p>
         </p:txBody>
       </p:sp>
@@ -11663,7 +11441,7 @@
                 <a:ea typeface="Trebuchet MS" pitchFamily="34" charset="-122"/>
                 <a:cs typeface="Trebuchet MS" pitchFamily="34" charset="-120"/>
               </a:rPr>
-              <a:t>dangerous</a:t>
+              <a:t>enormous</a:t>
             </a:r>
             <a:endParaRPr lang="en-US" sz="2800" dirty="0"/>
           </a:p>
@@ -12490,7 +12268,7 @@
                 <a:ea typeface="Trebuchet MS" pitchFamily="34" charset="-122"/>
                 <a:cs typeface="Trebuchet MS" pitchFamily="34" charset="-120"/>
               </a:rPr>
-              <a:t>dangerous</a:t>
+              <a:t>enormous</a:t>
             </a:r>
             <a:endParaRPr lang="en-US" sz="2800" dirty="0"/>
           </a:p>
@@ -12570,7 +12348,7 @@
         </p:nvSpPr>
         <p:spPr>
           <a:xfrm>
-            <a:off x="2938272" y="2258568"/>
+            <a:off x="2221992" y="2258568"/>
             <a:ext cx="1828800" cy="292608"/>
           </a:xfrm>
           <a:prstGeom prst="rect">
@@ -12604,7 +12382,7 @@
         </p:nvSpPr>
         <p:spPr>
           <a:xfrm>
-            <a:off x="2938272" y="2258568"/>
+            <a:off x="2221992" y="2258568"/>
             <a:ext cx="1828800" cy="292608"/>
           </a:xfrm>
           <a:prstGeom prst="rect">
@@ -12629,7 +12407,7 @@
                 <a:ea typeface="Trebuchet MS" pitchFamily="34" charset="-122"/>
                 <a:cs typeface="Trebuchet MS" pitchFamily="34" charset="-120"/>
               </a:rPr>
-              <a:t>danger</a:t>
+              <a:t>e</a:t>
             </a:r>
             <a:endParaRPr lang="en-US" sz="1300" dirty="0"/>
           </a:p>
@@ -12643,7 +12421,7 @@
         </p:nvSpPr>
         <p:spPr>
           <a:xfrm>
-            <a:off x="2938272" y="2569464"/>
+            <a:off x="2221992" y="2569464"/>
             <a:ext cx="1828800" cy="201168"/>
           </a:xfrm>
           <a:prstGeom prst="rect">
@@ -12668,7 +12446,7 @@
                 <a:ea typeface="Calibri" pitchFamily="34" charset="-122"/>
                 <a:cs typeface="Calibri" pitchFamily="34" charset="-120"/>
               </a:rPr>
-              <a:t>something that can cause harm</a:t>
+              <a:t>out of, away from</a:t>
             </a:r>
             <a:endParaRPr lang="en-US" sz="850" dirty="0"/>
           </a:p>
@@ -12682,7 +12460,7 @@
         </p:nvSpPr>
         <p:spPr>
           <a:xfrm>
-            <a:off x="5803392" y="2258568"/>
+            <a:off x="4370832" y="2258568"/>
             <a:ext cx="1828800" cy="292608"/>
           </a:xfrm>
           <a:prstGeom prst="rect">
@@ -12691,11 +12469,11 @@
             </a:avLst>
           </a:prstGeom>
           <a:solidFill>
-            <a:srgbClr val="CCFBF1"/>
+            <a:srgbClr val="FCE7F3"/>
           </a:solidFill>
           <a:ln w="19050">
             <a:solidFill>
-              <a:srgbClr val="0D9488"/>
+              <a:srgbClr val="DB2777"/>
             </a:solidFill>
             <a:prstDash val="solid"/>
           </a:ln>
@@ -12716,7 +12494,7 @@
         </p:nvSpPr>
         <p:spPr>
           <a:xfrm>
-            <a:off x="5803392" y="2258568"/>
+            <a:off x="4370832" y="2258568"/>
             <a:ext cx="1828800" cy="292608"/>
           </a:xfrm>
           <a:prstGeom prst="rect">
@@ -12735,13 +12513,13 @@
             <a:r>
               <a:rPr lang="en-US" sz="1300" b="1" dirty="0">
                 <a:solidFill>
-                  <a:srgbClr val="0F766E"/>
+                  <a:srgbClr val="9D174D"/>
                 </a:solidFill>
                 <a:latin typeface="Trebuchet MS" pitchFamily="34" charset="0"/>
                 <a:ea typeface="Trebuchet MS" pitchFamily="34" charset="-122"/>
                 <a:cs typeface="Trebuchet MS" pitchFamily="34" charset="-120"/>
               </a:rPr>
-              <a:t>ous</a:t>
+              <a:t>norm</a:t>
             </a:r>
             <a:endParaRPr lang="en-US" sz="1300" dirty="0"/>
           </a:p>
@@ -12755,7 +12533,7 @@
         </p:nvSpPr>
         <p:spPr>
           <a:xfrm>
-            <a:off x="5803392" y="2569464"/>
+            <a:off x="4370832" y="2569464"/>
             <a:ext cx="1828800" cy="201168"/>
           </a:xfrm>
           <a:prstGeom prst="rect">
@@ -12780,7 +12558,7 @@
                 <a:ea typeface="Calibri" pitchFamily="34" charset="-122"/>
                 <a:cs typeface="Calibri" pitchFamily="34" charset="-120"/>
               </a:rPr>
-              <a:t>full of, having quality</a:t>
+              <a:t>rule, standard</a:t>
             </a:r>
             <a:endParaRPr lang="en-US" sz="850" dirty="0"/>
           </a:p>
@@ -12789,6 +12567,118 @@
       <p:sp>
         <p:nvSpPr>
           <p:cNvPr id="22" name="Shape 20"/>
+          <p:cNvSpPr/>
+          <p:nvPr/>
+        </p:nvSpPr>
+        <p:spPr>
+          <a:xfrm>
+            <a:off x="6519672" y="2258568"/>
+            <a:ext cx="1828800" cy="292608"/>
+          </a:xfrm>
+          <a:prstGeom prst="rect">
+            <a:avLst>
+              <a:gd name="adj" fmla="val 25000"/>
+            </a:avLst>
+          </a:prstGeom>
+          <a:solidFill>
+            <a:srgbClr val="CCFBF1"/>
+          </a:solidFill>
+          <a:ln w="19050">
+            <a:solidFill>
+              <a:srgbClr val="0D9488"/>
+            </a:solidFill>
+            <a:prstDash val="solid"/>
+          </a:ln>
+          <a:effectLst>
+            <a:outerShdw sx="100000" sy="100000" kx="0" ky="0" algn="bl" rotWithShape="0" blurRad="101600" dist="38100" dir="8100000">
+              <a:srgbClr val="000000">
+                <a:alpha val="12000"/>
+              </a:srgbClr>
+            </a:outerShdw>
+          </a:effectLst>
+        </p:spPr>
+      </p:sp>
+      <p:sp>
+        <p:nvSpPr>
+          <p:cNvPr id="23" name="Text 21"/>
+          <p:cNvSpPr/>
+          <p:nvPr/>
+        </p:nvSpPr>
+        <p:spPr>
+          <a:xfrm>
+            <a:off x="6519672" y="2258568"/>
+            <a:ext cx="1828800" cy="292608"/>
+          </a:xfrm>
+          <a:prstGeom prst="rect">
+            <a:avLst/>
+          </a:prstGeom>
+          <a:noFill/>
+          <a:ln/>
+        </p:spPr>
+        <p:txBody>
+          <a:bodyPr wrap="square" lIns="0" tIns="0" rIns="0" bIns="0" rtlCol="0" anchor="ctr"/>
+          <a:lstStyle/>
+          <a:p>
+            <a:pPr algn="ctr" indent="0" marL="0">
+              <a:buNone/>
+            </a:pPr>
+            <a:r>
+              <a:rPr lang="en-US" sz="1300" b="1" dirty="0">
+                <a:solidFill>
+                  <a:srgbClr val="0F766E"/>
+                </a:solidFill>
+                <a:latin typeface="Trebuchet MS" pitchFamily="34" charset="0"/>
+                <a:ea typeface="Trebuchet MS" pitchFamily="34" charset="-122"/>
+                <a:cs typeface="Trebuchet MS" pitchFamily="34" charset="-120"/>
+              </a:rPr>
+              <a:t>ous</a:t>
+            </a:r>
+            <a:endParaRPr lang="en-US" sz="1300" dirty="0"/>
+          </a:p>
+        </p:txBody>
+      </p:sp>
+      <p:sp>
+        <p:nvSpPr>
+          <p:cNvPr id="24" name="Text 22"/>
+          <p:cNvSpPr/>
+          <p:nvPr/>
+        </p:nvSpPr>
+        <p:spPr>
+          <a:xfrm>
+            <a:off x="6519672" y="2569464"/>
+            <a:ext cx="1828800" cy="201168"/>
+          </a:xfrm>
+          <a:prstGeom prst="rect">
+            <a:avLst/>
+          </a:prstGeom>
+          <a:noFill/>
+          <a:ln/>
+        </p:spPr>
+        <p:txBody>
+          <a:bodyPr wrap="square" lIns="0" tIns="0" rIns="0" bIns="0" rtlCol="0" anchor="t"/>
+          <a:lstStyle/>
+          <a:p>
+            <a:pPr algn="ctr" indent="0" marL="0">
+              <a:buNone/>
+            </a:pPr>
+            <a:r>
+              <a:rPr lang="en-US" sz="850" dirty="0">
+                <a:solidFill>
+                  <a:srgbClr val="475569"/>
+                </a:solidFill>
+                <a:latin typeface="Calibri" pitchFamily="34" charset="0"/>
+                <a:ea typeface="Calibri" pitchFamily="34" charset="-122"/>
+                <a:cs typeface="Calibri" pitchFamily="34" charset="-120"/>
+              </a:rPr>
+              <a:t>full of, having the quality of</a:t>
+            </a:r>
+            <a:endParaRPr lang="en-US" sz="850" dirty="0"/>
+          </a:p>
+        </p:txBody>
+      </p:sp>
+      <p:sp>
+        <p:nvSpPr>
+          <p:cNvPr id="25" name="Shape 23"/>
           <p:cNvSpPr/>
           <p:nvPr/>
         </p:nvSpPr>
@@ -12815,7 +12705,7 @@
       </p:sp>
       <p:sp>
         <p:nvSpPr>
-          <p:cNvPr id="23" name="Text 21"/>
+          <p:cNvPr id="26" name="Text 24"/>
           <p:cNvSpPr/>
           <p:nvPr/>
         </p:nvSpPr>
@@ -12854,7 +12744,7 @@
       </p:sp>
       <p:sp>
         <p:nvSpPr>
-          <p:cNvPr id="24" name="Shape 22"/>
+          <p:cNvPr id="27" name="Shape 25"/>
           <p:cNvSpPr/>
           <p:nvPr/>
         </p:nvSpPr>
@@ -12881,7 +12771,7 @@
       </p:sp>
       <p:sp>
         <p:nvSpPr>
-          <p:cNvPr id="25" name="Text 23"/>
+          <p:cNvPr id="28" name="Text 26"/>
           <p:cNvSpPr/>
           <p:nvPr/>
         </p:nvSpPr>
@@ -12920,7 +12810,7 @@
       </p:sp>
       <p:sp>
         <p:nvSpPr>
-          <p:cNvPr id="26" name="Shape 24"/>
+          <p:cNvPr id="29" name="Shape 27"/>
           <p:cNvSpPr/>
           <p:nvPr/>
         </p:nvSpPr>
@@ -12947,7 +12837,7 @@
       </p:sp>
       <p:sp>
         <p:nvSpPr>
-          <p:cNvPr id="27" name="Text 25"/>
+          <p:cNvPr id="30" name="Text 28"/>
           <p:cNvSpPr/>
           <p:nvPr/>
         </p:nvSpPr>
@@ -12986,7 +12876,7 @@
       </p:sp>
       <p:sp>
         <p:nvSpPr>
-          <p:cNvPr id="28" name="Shape 26"/>
+          <p:cNvPr id="31" name="Shape 29"/>
           <p:cNvSpPr/>
           <p:nvPr/>
         </p:nvSpPr>
@@ -13013,7 +12903,7 @@
       </p:sp>
       <p:sp>
         <p:nvSpPr>
-          <p:cNvPr id="29" name="Text 27"/>
+          <p:cNvPr id="32" name="Text 30"/>
           <p:cNvSpPr/>
           <p:nvPr/>
         </p:nvSpPr>
@@ -13475,7 +13365,7 @@
                 <a:ea typeface="Trebuchet MS" pitchFamily="34" charset="-122"/>
                 <a:cs typeface="Trebuchet MS" pitchFamily="34" charset="-120"/>
               </a:rPr>
-              <a:t>dangerous</a:t>
+              <a:t>enormous</a:t>
             </a:r>
             <a:endParaRPr lang="en-US" sz="2800" dirty="0"/>
           </a:p>
@@ -13555,7 +13445,7 @@
         </p:nvSpPr>
         <p:spPr>
           <a:xfrm>
-            <a:off x="2938272" y="2258568"/>
+            <a:off x="2221992" y="2258568"/>
             <a:ext cx="1828800" cy="292608"/>
           </a:xfrm>
           <a:prstGeom prst="rect">
@@ -13589,7 +13479,7 @@
         </p:nvSpPr>
         <p:spPr>
           <a:xfrm>
-            <a:off x="2938272" y="2258568"/>
+            <a:off x="2221992" y="2258568"/>
             <a:ext cx="1828800" cy="292608"/>
           </a:xfrm>
           <a:prstGeom prst="rect">
@@ -13614,7 +13504,7 @@
                 <a:ea typeface="Trebuchet MS" pitchFamily="34" charset="-122"/>
                 <a:cs typeface="Trebuchet MS" pitchFamily="34" charset="-120"/>
               </a:rPr>
-              <a:t>danger</a:t>
+              <a:t>e</a:t>
             </a:r>
             <a:endParaRPr lang="en-US" sz="1300" dirty="0"/>
           </a:p>
@@ -13628,7 +13518,7 @@
         </p:nvSpPr>
         <p:spPr>
           <a:xfrm>
-            <a:off x="2938272" y="2569464"/>
+            <a:off x="2221992" y="2569464"/>
             <a:ext cx="1828800" cy="201168"/>
           </a:xfrm>
           <a:prstGeom prst="rect">
@@ -13653,7 +13543,7 @@
                 <a:ea typeface="Calibri" pitchFamily="34" charset="-122"/>
                 <a:cs typeface="Calibri" pitchFamily="34" charset="-120"/>
               </a:rPr>
-              <a:t>something that can cause harm</a:t>
+              <a:t>out of, away from</a:t>
             </a:r>
             <a:endParaRPr lang="en-US" sz="850" dirty="0"/>
           </a:p>
@@ -13667,7 +13557,7 @@
         </p:nvSpPr>
         <p:spPr>
           <a:xfrm>
-            <a:off x="5803392" y="2258568"/>
+            <a:off x="4370832" y="2258568"/>
             <a:ext cx="1828800" cy="292608"/>
           </a:xfrm>
           <a:prstGeom prst="rect">
@@ -13676,11 +13566,11 @@
             </a:avLst>
           </a:prstGeom>
           <a:solidFill>
-            <a:srgbClr val="CCFBF1"/>
+            <a:srgbClr val="FCE7F3"/>
           </a:solidFill>
           <a:ln w="19050">
             <a:solidFill>
-              <a:srgbClr val="0D9488"/>
+              <a:srgbClr val="DB2777"/>
             </a:solidFill>
             <a:prstDash val="solid"/>
           </a:ln>
@@ -13701,7 +13591,7 @@
         </p:nvSpPr>
         <p:spPr>
           <a:xfrm>
-            <a:off x="5803392" y="2258568"/>
+            <a:off x="4370832" y="2258568"/>
             <a:ext cx="1828800" cy="292608"/>
           </a:xfrm>
           <a:prstGeom prst="rect">
@@ -13720,13 +13610,13 @@
             <a:r>
               <a:rPr lang="en-US" sz="1300" b="1" dirty="0">
                 <a:solidFill>
-                  <a:srgbClr val="0F766E"/>
+                  <a:srgbClr val="9D174D"/>
                 </a:solidFill>
                 <a:latin typeface="Trebuchet MS" pitchFamily="34" charset="0"/>
                 <a:ea typeface="Trebuchet MS" pitchFamily="34" charset="-122"/>
                 <a:cs typeface="Trebuchet MS" pitchFamily="34" charset="-120"/>
               </a:rPr>
-              <a:t>ous</a:t>
+              <a:t>norm</a:t>
             </a:r>
             <a:endParaRPr lang="en-US" sz="1300" dirty="0"/>
           </a:p>
@@ -13740,7 +13630,7 @@
         </p:nvSpPr>
         <p:spPr>
           <a:xfrm>
-            <a:off x="5803392" y="2569464"/>
+            <a:off x="4370832" y="2569464"/>
             <a:ext cx="1828800" cy="201168"/>
           </a:xfrm>
           <a:prstGeom prst="rect">
@@ -13765,7 +13655,7 @@
                 <a:ea typeface="Calibri" pitchFamily="34" charset="-122"/>
                 <a:cs typeface="Calibri" pitchFamily="34" charset="-120"/>
               </a:rPr>
-              <a:t>full of, having quality</a:t>
+              <a:t>rule, standard</a:t>
             </a:r>
             <a:endParaRPr lang="en-US" sz="850" dirty="0"/>
           </a:p>
@@ -13774,6 +13664,118 @@
       <p:sp>
         <p:nvSpPr>
           <p:cNvPr id="22" name="Shape 20"/>
+          <p:cNvSpPr/>
+          <p:nvPr/>
+        </p:nvSpPr>
+        <p:spPr>
+          <a:xfrm>
+            <a:off x="6519672" y="2258568"/>
+            <a:ext cx="1828800" cy="292608"/>
+          </a:xfrm>
+          <a:prstGeom prst="rect">
+            <a:avLst>
+              <a:gd name="adj" fmla="val 25000"/>
+            </a:avLst>
+          </a:prstGeom>
+          <a:solidFill>
+            <a:srgbClr val="CCFBF1"/>
+          </a:solidFill>
+          <a:ln w="19050">
+            <a:solidFill>
+              <a:srgbClr val="0D9488"/>
+            </a:solidFill>
+            <a:prstDash val="solid"/>
+          </a:ln>
+          <a:effectLst>
+            <a:outerShdw sx="100000" sy="100000" kx="0" ky="0" algn="bl" rotWithShape="0" blurRad="101600" dist="38100" dir="8100000">
+              <a:srgbClr val="000000">
+                <a:alpha val="12000"/>
+              </a:srgbClr>
+            </a:outerShdw>
+          </a:effectLst>
+        </p:spPr>
+      </p:sp>
+      <p:sp>
+        <p:nvSpPr>
+          <p:cNvPr id="23" name="Text 21"/>
+          <p:cNvSpPr/>
+          <p:nvPr/>
+        </p:nvSpPr>
+        <p:spPr>
+          <a:xfrm>
+            <a:off x="6519672" y="2258568"/>
+            <a:ext cx="1828800" cy="292608"/>
+          </a:xfrm>
+          <a:prstGeom prst="rect">
+            <a:avLst/>
+          </a:prstGeom>
+          <a:noFill/>
+          <a:ln/>
+        </p:spPr>
+        <p:txBody>
+          <a:bodyPr wrap="square" lIns="0" tIns="0" rIns="0" bIns="0" rtlCol="0" anchor="ctr"/>
+          <a:lstStyle/>
+          <a:p>
+            <a:pPr algn="ctr" indent="0" marL="0">
+              <a:buNone/>
+            </a:pPr>
+            <a:r>
+              <a:rPr lang="en-US" sz="1300" b="1" dirty="0">
+                <a:solidFill>
+                  <a:srgbClr val="0F766E"/>
+                </a:solidFill>
+                <a:latin typeface="Trebuchet MS" pitchFamily="34" charset="0"/>
+                <a:ea typeface="Trebuchet MS" pitchFamily="34" charset="-122"/>
+                <a:cs typeface="Trebuchet MS" pitchFamily="34" charset="-120"/>
+              </a:rPr>
+              <a:t>ous</a:t>
+            </a:r>
+            <a:endParaRPr lang="en-US" sz="1300" dirty="0"/>
+          </a:p>
+        </p:txBody>
+      </p:sp>
+      <p:sp>
+        <p:nvSpPr>
+          <p:cNvPr id="24" name="Text 22"/>
+          <p:cNvSpPr/>
+          <p:nvPr/>
+        </p:nvSpPr>
+        <p:spPr>
+          <a:xfrm>
+            <a:off x="6519672" y="2569464"/>
+            <a:ext cx="1828800" cy="201168"/>
+          </a:xfrm>
+          <a:prstGeom prst="rect">
+            <a:avLst/>
+          </a:prstGeom>
+          <a:noFill/>
+          <a:ln/>
+        </p:spPr>
+        <p:txBody>
+          <a:bodyPr wrap="square" lIns="0" tIns="0" rIns="0" bIns="0" rtlCol="0" anchor="t"/>
+          <a:lstStyle/>
+          <a:p>
+            <a:pPr algn="ctr" indent="0" marL="0">
+              <a:buNone/>
+            </a:pPr>
+            <a:r>
+              <a:rPr lang="en-US" sz="850" dirty="0">
+                <a:solidFill>
+                  <a:srgbClr val="475569"/>
+                </a:solidFill>
+                <a:latin typeface="Calibri" pitchFamily="34" charset="0"/>
+                <a:ea typeface="Calibri" pitchFamily="34" charset="-122"/>
+                <a:cs typeface="Calibri" pitchFamily="34" charset="-120"/>
+              </a:rPr>
+              <a:t>full of, having the quality of</a:t>
+            </a:r>
+            <a:endParaRPr lang="en-US" sz="850" dirty="0"/>
+          </a:p>
+        </p:txBody>
+      </p:sp>
+      <p:sp>
+        <p:nvSpPr>
+          <p:cNvPr id="25" name="Shape 23"/>
           <p:cNvSpPr/>
           <p:nvPr/>
         </p:nvSpPr>
@@ -13800,7 +13802,7 @@
       </p:sp>
       <p:sp>
         <p:nvSpPr>
-          <p:cNvPr id="23" name="Text 21"/>
+          <p:cNvPr id="26" name="Text 24"/>
           <p:cNvSpPr/>
           <p:nvPr/>
         </p:nvSpPr>
@@ -13839,7 +13841,7 @@
       </p:sp>
       <p:sp>
         <p:nvSpPr>
-          <p:cNvPr id="24" name="Shape 22"/>
+          <p:cNvPr id="27" name="Shape 25"/>
           <p:cNvSpPr/>
           <p:nvPr/>
         </p:nvSpPr>
@@ -13866,7 +13868,7 @@
       </p:sp>
       <p:sp>
         <p:nvSpPr>
-          <p:cNvPr id="25" name="Shape 23"/>
+          <p:cNvPr id="28" name="Shape 26"/>
           <p:cNvSpPr/>
           <p:nvPr/>
         </p:nvSpPr>
@@ -13893,7 +13895,7 @@
       </p:sp>
       <p:sp>
         <p:nvSpPr>
-          <p:cNvPr id="26" name="Text 24"/>
+          <p:cNvPr id="29" name="Text 27"/>
           <p:cNvSpPr/>
           <p:nvPr/>
         </p:nvSpPr>
@@ -13924,7 +13926,7 @@
                 <a:ea typeface="Trebuchet MS" pitchFamily="34" charset="-122"/>
                 <a:cs typeface="Trebuchet MS" pitchFamily="34" charset="-120"/>
               </a:rPr>
-              <a:t>dan</a:t>
+              <a:t>e</a:t>
             </a:r>
             <a:endParaRPr lang="en-US" sz="1400" dirty="0"/>
           </a:p>
@@ -13932,7 +13934,7 @@
       </p:sp>
       <p:sp>
         <p:nvSpPr>
-          <p:cNvPr id="27" name="Text 25"/>
+          <p:cNvPr id="30" name="Text 28"/>
           <p:cNvSpPr/>
           <p:nvPr/>
         </p:nvSpPr>
@@ -13971,7 +13973,7 @@
       </p:sp>
       <p:sp>
         <p:nvSpPr>
-          <p:cNvPr id="28" name="Shape 26"/>
+          <p:cNvPr id="31" name="Shape 29"/>
           <p:cNvSpPr/>
           <p:nvPr/>
         </p:nvSpPr>
@@ -13998,7 +14000,7 @@
       </p:sp>
       <p:sp>
         <p:nvSpPr>
-          <p:cNvPr id="29" name="Text 27"/>
+          <p:cNvPr id="32" name="Text 30"/>
           <p:cNvSpPr/>
           <p:nvPr/>
         </p:nvSpPr>
@@ -14029,7 +14031,7 @@
                 <a:ea typeface="Trebuchet MS" pitchFamily="34" charset="-122"/>
                 <a:cs typeface="Trebuchet MS" pitchFamily="34" charset="-120"/>
               </a:rPr>
-              <a:t>ger</a:t>
+              <a:t>nor</a:t>
             </a:r>
             <a:endParaRPr lang="en-US" sz="1400" dirty="0"/>
           </a:p>
@@ -14037,7 +14039,7 @@
       </p:sp>
       <p:sp>
         <p:nvSpPr>
-          <p:cNvPr id="30" name="Text 28"/>
+          <p:cNvPr id="33" name="Text 31"/>
           <p:cNvSpPr/>
           <p:nvPr/>
         </p:nvSpPr>
@@ -14076,7 +14078,7 @@
       </p:sp>
       <p:sp>
         <p:nvSpPr>
-          <p:cNvPr id="31" name="Shape 29"/>
+          <p:cNvPr id="34" name="Shape 32"/>
           <p:cNvSpPr/>
           <p:nvPr/>
         </p:nvSpPr>
@@ -14103,7 +14105,7 @@
       </p:sp>
       <p:sp>
         <p:nvSpPr>
-          <p:cNvPr id="32" name="Text 30"/>
+          <p:cNvPr id="35" name="Text 33"/>
           <p:cNvSpPr/>
           <p:nvPr/>
         </p:nvSpPr>
@@ -14134,7 +14136,7 @@
                 <a:ea typeface="Trebuchet MS" pitchFamily="34" charset="-122"/>
                 <a:cs typeface="Trebuchet MS" pitchFamily="34" charset="-120"/>
               </a:rPr>
-              <a:t>ous</a:t>
+              <a:t>mous</a:t>
             </a:r>
             <a:endParaRPr lang="en-US" sz="1400" dirty="0"/>
           </a:p>
@@ -14142,7 +14144,7 @@
       </p:sp>
       <p:sp>
         <p:nvSpPr>
-          <p:cNvPr id="33" name="Shape 31"/>
+          <p:cNvPr id="36" name="Shape 34"/>
           <p:cNvSpPr/>
           <p:nvPr/>
         </p:nvSpPr>
@@ -14169,7 +14171,7 @@
       </p:sp>
       <p:sp>
         <p:nvSpPr>
-          <p:cNvPr id="34" name="Text 32"/>
+          <p:cNvPr id="37" name="Text 35"/>
           <p:cNvSpPr/>
           <p:nvPr/>
         </p:nvSpPr>
@@ -14208,7 +14210,7 @@
       </p:sp>
       <p:sp>
         <p:nvSpPr>
-          <p:cNvPr id="35" name="Shape 33"/>
+          <p:cNvPr id="38" name="Shape 36"/>
           <p:cNvSpPr/>
           <p:nvPr/>
         </p:nvSpPr>
@@ -14235,7 +14237,7 @@
       </p:sp>
       <p:sp>
         <p:nvSpPr>
-          <p:cNvPr id="36" name="Text 34"/>
+          <p:cNvPr id="39" name="Text 37"/>
           <p:cNvSpPr/>
           <p:nvPr/>
         </p:nvSpPr>
@@ -14962,7 +14964,7 @@
                 <a:ea typeface="Trebuchet MS" pitchFamily="34" charset="-122"/>
                 <a:cs typeface="Trebuchet MS" pitchFamily="34" charset="-120"/>
               </a:rPr>
-              <a:t>dangerous</a:t>
+              <a:t>enormous</a:t>
             </a:r>
             <a:endParaRPr lang="en-US" sz="2800" dirty="0"/>
           </a:p>
@@ -15042,7 +15044,7 @@
         </p:nvSpPr>
         <p:spPr>
           <a:xfrm>
-            <a:off x="2938272" y="2258568"/>
+            <a:off x="2221992" y="2258568"/>
             <a:ext cx="1828800" cy="292608"/>
           </a:xfrm>
           <a:prstGeom prst="rect">
@@ -15076,7 +15078,7 @@
         </p:nvSpPr>
         <p:spPr>
           <a:xfrm>
-            <a:off x="2938272" y="2258568"/>
+            <a:off x="2221992" y="2258568"/>
             <a:ext cx="1828800" cy="292608"/>
           </a:xfrm>
           <a:prstGeom prst="rect">
@@ -15101,7 +15103,7 @@
                 <a:ea typeface="Trebuchet MS" pitchFamily="34" charset="-122"/>
                 <a:cs typeface="Trebuchet MS" pitchFamily="34" charset="-120"/>
               </a:rPr>
-              <a:t>danger</a:t>
+              <a:t>e</a:t>
             </a:r>
             <a:endParaRPr lang="en-US" sz="1300" dirty="0"/>
           </a:p>
@@ -15115,7 +15117,7 @@
         </p:nvSpPr>
         <p:spPr>
           <a:xfrm>
-            <a:off x="2938272" y="2569464"/>
+            <a:off x="2221992" y="2569464"/>
             <a:ext cx="1828800" cy="201168"/>
           </a:xfrm>
           <a:prstGeom prst="rect">
@@ -15140,7 +15142,7 @@
                 <a:ea typeface="Calibri" pitchFamily="34" charset="-122"/>
                 <a:cs typeface="Calibri" pitchFamily="34" charset="-120"/>
               </a:rPr>
-              <a:t>something that can cause harm</a:t>
+              <a:t>out of, away from</a:t>
             </a:r>
             <a:endParaRPr lang="en-US" sz="850" dirty="0"/>
           </a:p>
@@ -15154,7 +15156,7 @@
         </p:nvSpPr>
         <p:spPr>
           <a:xfrm>
-            <a:off x="5803392" y="2258568"/>
+            <a:off x="4370832" y="2258568"/>
             <a:ext cx="1828800" cy="292608"/>
           </a:xfrm>
           <a:prstGeom prst="rect">
@@ -15163,11 +15165,11 @@
             </a:avLst>
           </a:prstGeom>
           <a:solidFill>
-            <a:srgbClr val="CCFBF1"/>
+            <a:srgbClr val="FCE7F3"/>
           </a:solidFill>
           <a:ln w="19050">
             <a:solidFill>
-              <a:srgbClr val="0D9488"/>
+              <a:srgbClr val="DB2777"/>
             </a:solidFill>
             <a:prstDash val="solid"/>
           </a:ln>
@@ -15188,7 +15190,7 @@
         </p:nvSpPr>
         <p:spPr>
           <a:xfrm>
-            <a:off x="5803392" y="2258568"/>
+            <a:off x="4370832" y="2258568"/>
             <a:ext cx="1828800" cy="292608"/>
           </a:xfrm>
           <a:prstGeom prst="rect">
@@ -15207,13 +15209,13 @@
             <a:r>
               <a:rPr lang="en-US" sz="1300" b="1" dirty="0">
                 <a:solidFill>
-                  <a:srgbClr val="0F766E"/>
+                  <a:srgbClr val="9D174D"/>
                 </a:solidFill>
                 <a:latin typeface="Trebuchet MS" pitchFamily="34" charset="0"/>
                 <a:ea typeface="Trebuchet MS" pitchFamily="34" charset="-122"/>
                 <a:cs typeface="Trebuchet MS" pitchFamily="34" charset="-120"/>
               </a:rPr>
-              <a:t>ous</a:t>
+              <a:t>norm</a:t>
             </a:r>
             <a:endParaRPr lang="en-US" sz="1300" dirty="0"/>
           </a:p>
@@ -15227,7 +15229,7 @@
         </p:nvSpPr>
         <p:spPr>
           <a:xfrm>
-            <a:off x="5803392" y="2569464"/>
+            <a:off x="4370832" y="2569464"/>
             <a:ext cx="1828800" cy="201168"/>
           </a:xfrm>
           <a:prstGeom prst="rect">
@@ -15252,7 +15254,7 @@
                 <a:ea typeface="Calibri" pitchFamily="34" charset="-122"/>
                 <a:cs typeface="Calibri" pitchFamily="34" charset="-120"/>
               </a:rPr>
-              <a:t>full of, having quality</a:t>
+              <a:t>rule, standard</a:t>
             </a:r>
             <a:endParaRPr lang="en-US" sz="850" dirty="0"/>
           </a:p>
@@ -15261,6 +15263,118 @@
       <p:sp>
         <p:nvSpPr>
           <p:cNvPr id="22" name="Shape 20"/>
+          <p:cNvSpPr/>
+          <p:nvPr/>
+        </p:nvSpPr>
+        <p:spPr>
+          <a:xfrm>
+            <a:off x="6519672" y="2258568"/>
+            <a:ext cx="1828800" cy="292608"/>
+          </a:xfrm>
+          <a:prstGeom prst="rect">
+            <a:avLst>
+              <a:gd name="adj" fmla="val 25000"/>
+            </a:avLst>
+          </a:prstGeom>
+          <a:solidFill>
+            <a:srgbClr val="CCFBF1"/>
+          </a:solidFill>
+          <a:ln w="19050">
+            <a:solidFill>
+              <a:srgbClr val="0D9488"/>
+            </a:solidFill>
+            <a:prstDash val="solid"/>
+          </a:ln>
+          <a:effectLst>
+            <a:outerShdw sx="100000" sy="100000" kx="0" ky="0" algn="bl" rotWithShape="0" blurRad="101600" dist="38100" dir="8100000">
+              <a:srgbClr val="000000">
+                <a:alpha val="12000"/>
+              </a:srgbClr>
+            </a:outerShdw>
+          </a:effectLst>
+        </p:spPr>
+      </p:sp>
+      <p:sp>
+        <p:nvSpPr>
+          <p:cNvPr id="23" name="Text 21"/>
+          <p:cNvSpPr/>
+          <p:nvPr/>
+        </p:nvSpPr>
+        <p:spPr>
+          <a:xfrm>
+            <a:off x="6519672" y="2258568"/>
+            <a:ext cx="1828800" cy="292608"/>
+          </a:xfrm>
+          <a:prstGeom prst="rect">
+            <a:avLst/>
+          </a:prstGeom>
+          <a:noFill/>
+          <a:ln/>
+        </p:spPr>
+        <p:txBody>
+          <a:bodyPr wrap="square" lIns="0" tIns="0" rIns="0" bIns="0" rtlCol="0" anchor="ctr"/>
+          <a:lstStyle/>
+          <a:p>
+            <a:pPr algn="ctr" indent="0" marL="0">
+              <a:buNone/>
+            </a:pPr>
+            <a:r>
+              <a:rPr lang="en-US" sz="1300" b="1" dirty="0">
+                <a:solidFill>
+                  <a:srgbClr val="0F766E"/>
+                </a:solidFill>
+                <a:latin typeface="Trebuchet MS" pitchFamily="34" charset="0"/>
+                <a:ea typeface="Trebuchet MS" pitchFamily="34" charset="-122"/>
+                <a:cs typeface="Trebuchet MS" pitchFamily="34" charset="-120"/>
+              </a:rPr>
+              <a:t>ous</a:t>
+            </a:r>
+            <a:endParaRPr lang="en-US" sz="1300" dirty="0"/>
+          </a:p>
+        </p:txBody>
+      </p:sp>
+      <p:sp>
+        <p:nvSpPr>
+          <p:cNvPr id="24" name="Text 22"/>
+          <p:cNvSpPr/>
+          <p:nvPr/>
+        </p:nvSpPr>
+        <p:spPr>
+          <a:xfrm>
+            <a:off x="6519672" y="2569464"/>
+            <a:ext cx="1828800" cy="201168"/>
+          </a:xfrm>
+          <a:prstGeom prst="rect">
+            <a:avLst/>
+          </a:prstGeom>
+          <a:noFill/>
+          <a:ln/>
+        </p:spPr>
+        <p:txBody>
+          <a:bodyPr wrap="square" lIns="0" tIns="0" rIns="0" bIns="0" rtlCol="0" anchor="t"/>
+          <a:lstStyle/>
+          <a:p>
+            <a:pPr algn="ctr" indent="0" marL="0">
+              <a:buNone/>
+            </a:pPr>
+            <a:r>
+              <a:rPr lang="en-US" sz="850" dirty="0">
+                <a:solidFill>
+                  <a:srgbClr val="475569"/>
+                </a:solidFill>
+                <a:latin typeface="Calibri" pitchFamily="34" charset="0"/>
+                <a:ea typeface="Calibri" pitchFamily="34" charset="-122"/>
+                <a:cs typeface="Calibri" pitchFamily="34" charset="-120"/>
+              </a:rPr>
+              <a:t>full of, having the quality of</a:t>
+            </a:r>
+            <a:endParaRPr lang="en-US" sz="850" dirty="0"/>
+          </a:p>
+        </p:txBody>
+      </p:sp>
+      <p:sp>
+        <p:nvSpPr>
+          <p:cNvPr id="25" name="Shape 23"/>
           <p:cNvSpPr/>
           <p:nvPr/>
         </p:nvSpPr>
@@ -15287,7 +15401,7 @@
       </p:sp>
       <p:sp>
         <p:nvSpPr>
-          <p:cNvPr id="23" name="Text 21"/>
+          <p:cNvPr id="26" name="Text 24"/>
           <p:cNvSpPr/>
           <p:nvPr/>
         </p:nvSpPr>
@@ -15326,7 +15440,7 @@
       </p:sp>
       <p:sp>
         <p:nvSpPr>
-          <p:cNvPr id="24" name="Shape 22"/>
+          <p:cNvPr id="27" name="Shape 25"/>
           <p:cNvSpPr/>
           <p:nvPr/>
         </p:nvSpPr>
@@ -15353,7 +15467,7 @@
       </p:sp>
       <p:sp>
         <p:nvSpPr>
-          <p:cNvPr id="25" name="Shape 23"/>
+          <p:cNvPr id="28" name="Shape 26"/>
           <p:cNvSpPr/>
           <p:nvPr/>
         </p:nvSpPr>
@@ -15380,7 +15494,7 @@
       </p:sp>
       <p:sp>
         <p:nvSpPr>
-          <p:cNvPr id="26" name="Text 24"/>
+          <p:cNvPr id="29" name="Text 27"/>
           <p:cNvSpPr/>
           <p:nvPr/>
         </p:nvSpPr>
@@ -15411,7 +15525,7 @@
                 <a:ea typeface="Trebuchet MS" pitchFamily="34" charset="-122"/>
                 <a:cs typeface="Trebuchet MS" pitchFamily="34" charset="-120"/>
               </a:rPr>
-              <a:t>dan</a:t>
+              <a:t>e</a:t>
             </a:r>
             <a:endParaRPr lang="en-US" sz="1400" dirty="0"/>
           </a:p>
@@ -15419,7 +15533,7 @@
       </p:sp>
       <p:sp>
         <p:nvSpPr>
-          <p:cNvPr id="27" name="Text 25"/>
+          <p:cNvPr id="30" name="Text 28"/>
           <p:cNvSpPr/>
           <p:nvPr/>
         </p:nvSpPr>
@@ -15458,7 +15572,7 @@
       </p:sp>
       <p:sp>
         <p:nvSpPr>
-          <p:cNvPr id="28" name="Shape 26"/>
+          <p:cNvPr id="31" name="Shape 29"/>
           <p:cNvSpPr/>
           <p:nvPr/>
         </p:nvSpPr>
@@ -15485,7 +15599,7 @@
       </p:sp>
       <p:sp>
         <p:nvSpPr>
-          <p:cNvPr id="29" name="Text 27"/>
+          <p:cNvPr id="32" name="Text 30"/>
           <p:cNvSpPr/>
           <p:nvPr/>
         </p:nvSpPr>
@@ -15516,7 +15630,7 @@
                 <a:ea typeface="Trebuchet MS" pitchFamily="34" charset="-122"/>
                 <a:cs typeface="Trebuchet MS" pitchFamily="34" charset="-120"/>
               </a:rPr>
-              <a:t>ger</a:t>
+              <a:t>nor</a:t>
             </a:r>
             <a:endParaRPr lang="en-US" sz="1400" dirty="0"/>
           </a:p>
@@ -15524,7 +15638,7 @@
       </p:sp>
       <p:sp>
         <p:nvSpPr>
-          <p:cNvPr id="30" name="Text 28"/>
+          <p:cNvPr id="33" name="Text 31"/>
           <p:cNvSpPr/>
           <p:nvPr/>
         </p:nvSpPr>
@@ -15563,7 +15677,7 @@
       </p:sp>
       <p:sp>
         <p:nvSpPr>
-          <p:cNvPr id="31" name="Shape 29"/>
+          <p:cNvPr id="34" name="Shape 32"/>
           <p:cNvSpPr/>
           <p:nvPr/>
         </p:nvSpPr>
@@ -15590,7 +15704,7 @@
       </p:sp>
       <p:sp>
         <p:nvSpPr>
-          <p:cNvPr id="32" name="Text 30"/>
+          <p:cNvPr id="35" name="Text 33"/>
           <p:cNvSpPr/>
           <p:nvPr/>
         </p:nvSpPr>
@@ -15621,7 +15735,7 @@
                 <a:ea typeface="Trebuchet MS" pitchFamily="34" charset="-122"/>
                 <a:cs typeface="Trebuchet MS" pitchFamily="34" charset="-120"/>
               </a:rPr>
-              <a:t>ous</a:t>
+              <a:t>mous</a:t>
             </a:r>
             <a:endParaRPr lang="en-US" sz="1400" dirty="0"/>
           </a:p>
@@ -15629,7 +15743,7 @@
       </p:sp>
       <p:sp>
         <p:nvSpPr>
-          <p:cNvPr id="33" name="Shape 31"/>
+          <p:cNvPr id="36" name="Shape 34"/>
           <p:cNvSpPr/>
           <p:nvPr/>
         </p:nvSpPr>
@@ -15656,7 +15770,7 @@
       </p:sp>
       <p:sp>
         <p:nvSpPr>
-          <p:cNvPr id="34" name="Text 32"/>
+          <p:cNvPr id="37" name="Text 35"/>
           <p:cNvSpPr/>
           <p:nvPr/>
         </p:nvSpPr>
@@ -15695,18 +15809,18 @@
       </p:sp>
       <p:sp>
         <p:nvSpPr>
-          <p:cNvPr id="35" name="Shape 33"/>
+          <p:cNvPr id="38" name="Shape 36"/>
           <p:cNvSpPr/>
           <p:nvPr/>
         </p:nvSpPr>
         <p:spPr>
           <a:xfrm>
             <a:off x="1874520" y="4096512"/>
-            <a:ext cx="6903720" cy="658368"/>
+            <a:ext cx="6903720" cy="804672"/>
           </a:xfrm>
           <a:prstGeom prst="rect">
             <a:avLst>
-              <a:gd name="adj" fmla="val 8333"/>
+              <a:gd name="adj" fmla="val 6818"/>
             </a:avLst>
           </a:prstGeom>
           <a:solidFill>
@@ -15722,18 +15836,18 @@
       </p:sp>
       <p:sp>
         <p:nvSpPr>
-          <p:cNvPr id="36" name="Shape 34"/>
-          <p:cNvSpPr/>
-          <p:nvPr/>
-        </p:nvSpPr>
-        <p:spPr>
-          <a:xfrm>
-            <a:off x="2124837" y="4169664"/>
-            <a:ext cx="685800" cy="475488"/>
+          <p:cNvPr id="39" name="Shape 37"/>
+          <p:cNvSpPr/>
+          <p:nvPr/>
+        </p:nvSpPr>
+        <p:spPr>
+          <a:xfrm>
+            <a:off x="2254649" y="4169664"/>
+            <a:ext cx="685800" cy="384048"/>
           </a:xfrm>
           <a:prstGeom prst="rect">
             <a:avLst>
-              <a:gd name="adj" fmla="val 7692"/>
+              <a:gd name="adj" fmla="val 9524"/>
             </a:avLst>
           </a:prstGeom>
           <a:solidFill>
@@ -15749,14 +15863,14 @@
       </p:sp>
       <p:sp>
         <p:nvSpPr>
-          <p:cNvPr id="37" name="Text 35"/>
-          <p:cNvSpPr/>
-          <p:nvPr/>
-        </p:nvSpPr>
-        <p:spPr>
-          <a:xfrm>
-            <a:off x="2124837" y="4169664"/>
-            <a:ext cx="685800" cy="475488"/>
+          <p:cNvPr id="40" name="Text 38"/>
+          <p:cNvSpPr/>
+          <p:nvPr/>
+        </p:nvSpPr>
+        <p:spPr>
+          <a:xfrm>
+            <a:off x="2254649" y="4169664"/>
+            <a:ext cx="685800" cy="384048"/>
           </a:xfrm>
           <a:prstGeom prst="rect">
             <a:avLst/>
@@ -15780,7 +15894,7 @@
                 <a:ea typeface="Trebuchet MS" pitchFamily="34" charset="-122"/>
                 <a:cs typeface="Trebuchet MS" pitchFamily="34" charset="-120"/>
               </a:rPr>
-              <a:t>d</a:t>
+              <a:t>e</a:t>
             </a:r>
             <a:endParaRPr lang="en-US" sz="900" dirty="0"/>
           </a:p>
@@ -15788,18 +15902,18 @@
       </p:sp>
       <p:sp>
         <p:nvSpPr>
-          <p:cNvPr id="38" name="Shape 36"/>
-          <p:cNvSpPr/>
-          <p:nvPr/>
-        </p:nvSpPr>
-        <p:spPr>
-          <a:xfrm>
-            <a:off x="3033522" y="4169664"/>
-            <a:ext cx="685800" cy="475488"/>
+          <p:cNvPr id="41" name="Shape 39"/>
+          <p:cNvSpPr/>
+          <p:nvPr/>
+        </p:nvSpPr>
+        <p:spPr>
+          <a:xfrm>
+            <a:off x="3293146" y="4169664"/>
+            <a:ext cx="685800" cy="384048"/>
           </a:xfrm>
           <a:prstGeom prst="rect">
             <a:avLst>
-              <a:gd name="adj" fmla="val 7692"/>
+              <a:gd name="adj" fmla="val 9524"/>
             </a:avLst>
           </a:prstGeom>
           <a:solidFill>
@@ -15815,14 +15929,14 @@
       </p:sp>
       <p:sp>
         <p:nvSpPr>
-          <p:cNvPr id="39" name="Text 37"/>
-          <p:cNvSpPr/>
-          <p:nvPr/>
-        </p:nvSpPr>
-        <p:spPr>
-          <a:xfrm>
-            <a:off x="3033522" y="4169664"/>
-            <a:ext cx="685800" cy="475488"/>
+          <p:cNvPr id="42" name="Text 40"/>
+          <p:cNvSpPr/>
+          <p:nvPr/>
+        </p:nvSpPr>
+        <p:spPr>
+          <a:xfrm>
+            <a:off x="3293146" y="4169664"/>
+            <a:ext cx="685800" cy="384048"/>
           </a:xfrm>
           <a:prstGeom prst="rect">
             <a:avLst/>
@@ -15846,7 +15960,7 @@
                 <a:ea typeface="Trebuchet MS" pitchFamily="34" charset="-122"/>
                 <a:cs typeface="Trebuchet MS" pitchFamily="34" charset="-120"/>
               </a:rPr>
-              <a:t>a</a:t>
+              <a:t>n</a:t>
             </a:r>
             <a:endParaRPr lang="en-US" sz="900" dirty="0"/>
           </a:p>
@@ -15854,18 +15968,18 @@
       </p:sp>
       <p:sp>
         <p:nvSpPr>
-          <p:cNvPr id="40" name="Shape 38"/>
-          <p:cNvSpPr/>
-          <p:nvPr/>
-        </p:nvSpPr>
-        <p:spPr>
-          <a:xfrm>
-            <a:off x="3942207" y="4169664"/>
-            <a:ext cx="685800" cy="475488"/>
+          <p:cNvPr id="43" name="Shape 41"/>
+          <p:cNvSpPr/>
+          <p:nvPr/>
+        </p:nvSpPr>
+        <p:spPr>
+          <a:xfrm>
+            <a:off x="4331643" y="4169664"/>
+            <a:ext cx="685800" cy="384048"/>
           </a:xfrm>
           <a:prstGeom prst="rect">
             <a:avLst>
-              <a:gd name="adj" fmla="val 7692"/>
+              <a:gd name="adj" fmla="val 9524"/>
             </a:avLst>
           </a:prstGeom>
           <a:solidFill>
@@ -15881,14 +15995,14 @@
       </p:sp>
       <p:sp>
         <p:nvSpPr>
-          <p:cNvPr id="41" name="Text 39"/>
-          <p:cNvSpPr/>
-          <p:nvPr/>
-        </p:nvSpPr>
-        <p:spPr>
-          <a:xfrm>
-            <a:off x="3942207" y="4169664"/>
-            <a:ext cx="685800" cy="475488"/>
+          <p:cNvPr id="44" name="Text 42"/>
+          <p:cNvSpPr/>
+          <p:nvPr/>
+        </p:nvSpPr>
+        <p:spPr>
+          <a:xfrm>
+            <a:off x="4331643" y="4169664"/>
+            <a:ext cx="685800" cy="384048"/>
           </a:xfrm>
           <a:prstGeom prst="rect">
             <a:avLst/>
@@ -15912,7 +16026,7 @@
                 <a:ea typeface="Trebuchet MS" pitchFamily="34" charset="-122"/>
                 <a:cs typeface="Trebuchet MS" pitchFamily="34" charset="-120"/>
               </a:rPr>
-              <a:t>n</a:t>
+              <a:t>or</a:t>
             </a:r>
             <a:endParaRPr lang="en-US" sz="900" dirty="0"/>
           </a:p>
@@ -15920,18 +16034,18 @@
       </p:sp>
       <p:sp>
         <p:nvSpPr>
-          <p:cNvPr id="42" name="Shape 40"/>
-          <p:cNvSpPr/>
-          <p:nvPr/>
-        </p:nvSpPr>
-        <p:spPr>
-          <a:xfrm>
-            <a:off x="4850892" y="4169664"/>
-            <a:ext cx="685800" cy="475488"/>
+          <p:cNvPr id="45" name="Shape 43"/>
+          <p:cNvSpPr/>
+          <p:nvPr/>
+        </p:nvSpPr>
+        <p:spPr>
+          <a:xfrm>
+            <a:off x="5370141" y="4169664"/>
+            <a:ext cx="685800" cy="384048"/>
           </a:xfrm>
           <a:prstGeom prst="rect">
             <a:avLst>
-              <a:gd name="adj" fmla="val 7692"/>
+              <a:gd name="adj" fmla="val 9524"/>
             </a:avLst>
           </a:prstGeom>
           <a:solidFill>
@@ -15947,14 +16061,14 @@
       </p:sp>
       <p:sp>
         <p:nvSpPr>
-          <p:cNvPr id="43" name="Text 41"/>
-          <p:cNvSpPr/>
-          <p:nvPr/>
-        </p:nvSpPr>
-        <p:spPr>
-          <a:xfrm>
-            <a:off x="4850892" y="4169664"/>
-            <a:ext cx="685800" cy="475488"/>
+          <p:cNvPr id="46" name="Text 44"/>
+          <p:cNvSpPr/>
+          <p:nvPr/>
+        </p:nvSpPr>
+        <p:spPr>
+          <a:xfrm>
+            <a:off x="5370141" y="4169664"/>
+            <a:ext cx="685800" cy="384048"/>
           </a:xfrm>
           <a:prstGeom prst="rect">
             <a:avLst/>
@@ -15978,7 +16092,7 @@
                 <a:ea typeface="Trebuchet MS" pitchFamily="34" charset="-122"/>
                 <a:cs typeface="Trebuchet MS" pitchFamily="34" charset="-120"/>
               </a:rPr>
-              <a:t>g</a:t>
+              <a:t>m</a:t>
             </a:r>
             <a:endParaRPr lang="en-US" sz="900" dirty="0"/>
           </a:p>
@@ -15986,18 +16100,18 @@
       </p:sp>
       <p:sp>
         <p:nvSpPr>
-          <p:cNvPr id="44" name="Shape 42"/>
-          <p:cNvSpPr/>
-          <p:nvPr/>
-        </p:nvSpPr>
-        <p:spPr>
-          <a:xfrm>
-            <a:off x="5759577" y="4169664"/>
-            <a:ext cx="685800" cy="475488"/>
+          <p:cNvPr id="47" name="Shape 45"/>
+          <p:cNvSpPr/>
+          <p:nvPr/>
+        </p:nvSpPr>
+        <p:spPr>
+          <a:xfrm>
+            <a:off x="6408638" y="4169664"/>
+            <a:ext cx="685800" cy="384048"/>
           </a:xfrm>
           <a:prstGeom prst="rect">
             <a:avLst>
-              <a:gd name="adj" fmla="val 7692"/>
+              <a:gd name="adj" fmla="val 9524"/>
             </a:avLst>
           </a:prstGeom>
           <a:solidFill>
@@ -16013,14 +16127,14 @@
       </p:sp>
       <p:sp>
         <p:nvSpPr>
-          <p:cNvPr id="45" name="Text 43"/>
-          <p:cNvSpPr/>
-          <p:nvPr/>
-        </p:nvSpPr>
-        <p:spPr>
-          <a:xfrm>
-            <a:off x="5759577" y="4169664"/>
-            <a:ext cx="685800" cy="475488"/>
+          <p:cNvPr id="48" name="Text 46"/>
+          <p:cNvSpPr/>
+          <p:nvPr/>
+        </p:nvSpPr>
+        <p:spPr>
+          <a:xfrm>
+            <a:off x="6408638" y="4169664"/>
+            <a:ext cx="685800" cy="384048"/>
           </a:xfrm>
           <a:prstGeom prst="rect">
             <a:avLst/>
@@ -16044,7 +16158,7 @@
                 <a:ea typeface="Trebuchet MS" pitchFamily="34" charset="-122"/>
                 <a:cs typeface="Trebuchet MS" pitchFamily="34" charset="-120"/>
               </a:rPr>
-              <a:t>er</a:t>
+              <a:t>ou</a:t>
             </a:r>
             <a:endParaRPr lang="en-US" sz="900" dirty="0"/>
           </a:p>
@@ -16052,18 +16166,57 @@
       </p:sp>
       <p:sp>
         <p:nvSpPr>
-          <p:cNvPr id="46" name="Shape 44"/>
-          <p:cNvSpPr/>
-          <p:nvPr/>
-        </p:nvSpPr>
-        <p:spPr>
-          <a:xfrm>
-            <a:off x="6668262" y="4169664"/>
-            <a:ext cx="685800" cy="475488"/>
+          <p:cNvPr id="49" name="Text 47"/>
+          <p:cNvSpPr/>
+          <p:nvPr/>
+        </p:nvSpPr>
+        <p:spPr>
+          <a:xfrm>
+            <a:off x="6408638" y="4572000"/>
+            <a:ext cx="685800" cy="219456"/>
+          </a:xfrm>
+          <a:prstGeom prst="rect">
+            <a:avLst/>
+          </a:prstGeom>
+          <a:noFill/>
+          <a:ln/>
+        </p:spPr>
+        <p:txBody>
+          <a:bodyPr wrap="square" lIns="0" tIns="0" rIns="0" bIns="0" rtlCol="0" anchor="t"/>
+          <a:lstStyle/>
+          <a:p>
+            <a:pPr algn="ctr" indent="0" marL="0">
+              <a:buNone/>
+            </a:pPr>
+            <a:r>
+              <a:rPr lang="en-US" sz="750" i="1" dirty="0">
+                <a:solidFill>
+                  <a:srgbClr val="94A3B8"/>
+                </a:solidFill>
+                <a:latin typeface="Calibri" pitchFamily="34" charset="0"/>
+                <a:ea typeface="Calibri" pitchFamily="34" charset="-122"/>
+                <a:cs typeface="Calibri" pitchFamily="34" charset="-120"/>
+              </a:rPr>
+              <a:t>/u/</a:t>
+            </a:r>
+            <a:endParaRPr lang="en-US" sz="750" dirty="0"/>
+          </a:p>
+        </p:txBody>
+      </p:sp>
+      <p:sp>
+        <p:nvSpPr>
+          <p:cNvPr id="50" name="Shape 48"/>
+          <p:cNvSpPr/>
+          <p:nvPr/>
+        </p:nvSpPr>
+        <p:spPr>
+          <a:xfrm>
+            <a:off x="7447135" y="4169664"/>
+            <a:ext cx="685800" cy="384048"/>
           </a:xfrm>
           <a:prstGeom prst="rect">
             <a:avLst>
-              <a:gd name="adj" fmla="val 7692"/>
+              <a:gd name="adj" fmla="val 9524"/>
             </a:avLst>
           </a:prstGeom>
           <a:solidFill>
@@ -16079,80 +16232,14 @@
       </p:sp>
       <p:sp>
         <p:nvSpPr>
-          <p:cNvPr id="47" name="Text 45"/>
-          <p:cNvSpPr/>
-          <p:nvPr/>
-        </p:nvSpPr>
-        <p:spPr>
-          <a:xfrm>
-            <a:off x="6668262" y="4169664"/>
-            <a:ext cx="685800" cy="475488"/>
-          </a:xfrm>
-          <a:prstGeom prst="rect">
-            <a:avLst/>
-          </a:prstGeom>
-          <a:noFill/>
-          <a:ln/>
-        </p:spPr>
-        <p:txBody>
-          <a:bodyPr wrap="square" lIns="0" tIns="0" rIns="0" bIns="0" rtlCol="0" anchor="ctr"/>
-          <a:lstStyle/>
-          <a:p>
-            <a:pPr algn="ctr" indent="0" marL="0">
-              <a:buNone/>
-            </a:pPr>
-            <a:r>
-              <a:rPr lang="en-US" sz="900" b="1" dirty="0">
-                <a:solidFill>
-                  <a:srgbClr val="9D174D"/>
-                </a:solidFill>
-                <a:latin typeface="Trebuchet MS" pitchFamily="34" charset="0"/>
-                <a:ea typeface="Trebuchet MS" pitchFamily="34" charset="-122"/>
-                <a:cs typeface="Trebuchet MS" pitchFamily="34" charset="-120"/>
-              </a:rPr>
-              <a:t>ou</a:t>
-            </a:r>
-            <a:endParaRPr lang="en-US" sz="900" dirty="0"/>
-          </a:p>
-        </p:txBody>
-      </p:sp>
-      <p:sp>
-        <p:nvSpPr>
-          <p:cNvPr id="48" name="Shape 46"/>
-          <p:cNvSpPr/>
-          <p:nvPr/>
-        </p:nvSpPr>
-        <p:spPr>
-          <a:xfrm>
-            <a:off x="7576947" y="4169664"/>
-            <a:ext cx="685800" cy="475488"/>
-          </a:xfrm>
-          <a:prstGeom prst="rect">
-            <a:avLst>
-              <a:gd name="adj" fmla="val 7692"/>
-            </a:avLst>
-          </a:prstGeom>
-          <a:solidFill>
-            <a:srgbClr val="FFFFFF"/>
-          </a:solidFill>
-          <a:ln w="12700">
-            <a:solidFill>
-              <a:srgbClr val="DB2777"/>
-            </a:solidFill>
-            <a:prstDash val="solid"/>
-          </a:ln>
-        </p:spPr>
-      </p:sp>
-      <p:sp>
-        <p:nvSpPr>
-          <p:cNvPr id="49" name="Text 47"/>
-          <p:cNvSpPr/>
-          <p:nvPr/>
-        </p:nvSpPr>
-        <p:spPr>
-          <a:xfrm>
-            <a:off x="7576947" y="4169664"/>
-            <a:ext cx="685800" cy="475488"/>
+          <p:cNvPr id="51" name="Text 49"/>
+          <p:cNvSpPr/>
+          <p:nvPr/>
+        </p:nvSpPr>
+        <p:spPr>
+          <a:xfrm>
+            <a:off x="7447135" y="4169664"/>
+            <a:ext cx="685800" cy="384048"/>
           </a:xfrm>
           <a:prstGeom prst="rect">
             <a:avLst/>
@@ -17519,7 +17606,7 @@
                 <a:ea typeface="Calibri" pitchFamily="34" charset="-122"/>
                 <a:cs typeface="Calibri" pitchFamily="34" charset="-120"/>
               </a:rPr>
-              <a:t>famous</a:t>
+              <a:t>courageous</a:t>
             </a:r>
             <a:pPr algn="l" indent="0" marL="0">
               <a:buNone/>
@@ -17533,7 +17620,7 @@
                 <a:ea typeface="Calibri" pitchFamily="34" charset="-122"/>
                 <a:cs typeface="Calibri" pitchFamily="34" charset="-120"/>
               </a:rPr>
-              <a:t> explorer made a </a:t>
+              <a:t> explorer was </a:t>
             </a:r>
             <a:pPr algn="l" indent="0" marL="0">
               <a:buNone/>
@@ -17550,7 +17637,7 @@
                 <a:ea typeface="Calibri" pitchFamily="34" charset="-122"/>
                 <a:cs typeface="Calibri" pitchFamily="34" charset="-120"/>
               </a:rPr>
-              <a:t>wondrous</a:t>
+              <a:t>famous</a:t>
             </a:r>
             <a:pPr algn="l" indent="0" marL="0">
               <a:buNone/>
@@ -17564,7 +17651,7 @@
                 <a:ea typeface="Calibri" pitchFamily="34" charset="-122"/>
                 <a:cs typeface="Calibri" pitchFamily="34" charset="-120"/>
               </a:rPr>
-              <a:t> discovery, but warned us that the jungle was </a:t>
+              <a:t> for finding </a:t>
             </a:r>
             <a:pPr algn="l" indent="0" marL="0">
               <a:buNone/>
@@ -17581,7 +17668,7 @@
                 <a:ea typeface="Calibri" pitchFamily="34" charset="-122"/>
                 <a:cs typeface="Calibri" pitchFamily="34" charset="-120"/>
               </a:rPr>
-              <a:t>poisonous</a:t>
+              <a:t>glorious</a:t>
             </a:r>
             <a:pPr algn="l" indent="0" marL="0">
               <a:buNone/>
@@ -17595,7 +17682,7 @@
                 <a:ea typeface="Calibri" pitchFamily="34" charset="-122"/>
                 <a:cs typeface="Calibri" pitchFamily="34" charset="-120"/>
               </a:rPr>
-              <a:t> in places.</a:t>
+              <a:t> hidden valleys.</a:t>
             </a:r>
             <a:endParaRPr lang="en-US" sz="1800" dirty="0"/>
           </a:p>
@@ -17750,7 +17837,7 @@
                 <a:ea typeface="Trebuchet MS" pitchFamily="34" charset="-122"/>
                 <a:cs typeface="Trebuchet MS" pitchFamily="34" charset="-120"/>
               </a:rPr>
-              <a:t>famous</a:t>
+              <a:t>courageous</a:t>
             </a:r>
             <a:endParaRPr lang="en-US" sz="1400" dirty="0"/>
           </a:p>
@@ -17878,7 +17965,7 @@
                 <a:ea typeface="Trebuchet MS" pitchFamily="34" charset="-122"/>
                 <a:cs typeface="Trebuchet MS" pitchFamily="34" charset="-120"/>
               </a:rPr>
-              <a:t>wondrous</a:t>
+              <a:t>famous</a:t>
             </a:r>
             <a:endParaRPr lang="en-US" sz="1400" dirty="0"/>
           </a:p>
@@ -18006,7 +18093,7 @@
                 <a:ea typeface="Trebuchet MS" pitchFamily="34" charset="-122"/>
                 <a:cs typeface="Trebuchet MS" pitchFamily="34" charset="-120"/>
               </a:rPr>
-              <a:t>poisonous</a:t>
+              <a:t>glorious</a:t>
             </a:r>
             <a:endParaRPr lang="en-US" sz="1400" dirty="0"/>
           </a:p>
@@ -18476,7 +18563,7 @@
                 <a:ea typeface="Trebuchet MS" pitchFamily="34" charset="-122"/>
                 <a:cs typeface="Trebuchet MS" pitchFamily="34" charset="-120"/>
               </a:rPr>
-              <a:t>famous</a:t>
+              <a:t>courageous</a:t>
             </a:r>
             <a:endParaRPr lang="en-US" sz="2800" dirty="0"/>
           </a:p>
@@ -19303,7 +19390,7 @@
                 <a:ea typeface="Trebuchet MS" pitchFamily="34" charset="-122"/>
                 <a:cs typeface="Trebuchet MS" pitchFamily="34" charset="-120"/>
               </a:rPr>
-              <a:t>famous</a:t>
+              <a:t>courageous</a:t>
             </a:r>
             <a:endParaRPr lang="en-US" sz="2800" dirty="0"/>
           </a:p>
@@ -19442,7 +19529,7 @@
                 <a:ea typeface="Trebuchet MS" pitchFamily="34" charset="-122"/>
                 <a:cs typeface="Trebuchet MS" pitchFamily="34" charset="-120"/>
               </a:rPr>
-              <a:t>fame</a:t>
+              <a:t>courage</a:t>
             </a:r>
             <a:endParaRPr lang="en-US" sz="1300" dirty="0"/>
           </a:p>
@@ -19481,7 +19568,7 @@
                 <a:ea typeface="Calibri" pitchFamily="34" charset="-122"/>
                 <a:cs typeface="Calibri" pitchFamily="34" charset="-120"/>
               </a:rPr>
-              <a:t>being well known</a:t>
+              <a:t>bravery</a:t>
             </a:r>
             <a:endParaRPr lang="en-US" sz="850" dirty="0"/>
           </a:p>
@@ -19632,7 +19719,7 @@
                 <a:ea typeface="Calibri" pitchFamily="34" charset="-122"/>
                 <a:cs typeface="Calibri" pitchFamily="34" charset="-120"/>
               </a:rPr>
-              <a:t>full of, having quality</a:t>
+              <a:t>full of, having the quality of</a:t>
             </a:r>
             <a:endParaRPr lang="en-US" sz="850" dirty="0"/>
           </a:p>
@@ -20327,7 +20414,7 @@
                 <a:ea typeface="Trebuchet MS" pitchFamily="34" charset="-122"/>
                 <a:cs typeface="Trebuchet MS" pitchFamily="34" charset="-120"/>
               </a:rPr>
-              <a:t>famous</a:t>
+              <a:t>courageous</a:t>
             </a:r>
             <a:endParaRPr lang="en-US" sz="2800" dirty="0"/>
           </a:p>
@@ -20466,7 +20553,7 @@
                 <a:ea typeface="Trebuchet MS" pitchFamily="34" charset="-122"/>
                 <a:cs typeface="Trebuchet MS" pitchFamily="34" charset="-120"/>
               </a:rPr>
-              <a:t>fame</a:t>
+              <a:t>courage</a:t>
             </a:r>
             <a:endParaRPr lang="en-US" sz="1300" dirty="0"/>
           </a:p>
@@ -20505,7 +20592,7 @@
                 <a:ea typeface="Calibri" pitchFamily="34" charset="-122"/>
                 <a:cs typeface="Calibri" pitchFamily="34" charset="-120"/>
               </a:rPr>
-              <a:t>being well known</a:t>
+              <a:t>bravery</a:t>
             </a:r>
             <a:endParaRPr lang="en-US" sz="850" dirty="0"/>
           </a:p>
@@ -20656,7 +20743,7 @@
                 <a:ea typeface="Calibri" pitchFamily="34" charset="-122"/>
                 <a:cs typeface="Calibri" pitchFamily="34" charset="-120"/>
               </a:rPr>
-              <a:t>full of, having quality</a:t>
+              <a:t>full of, having the quality of</a:t>
             </a:r>
             <a:endParaRPr lang="en-US" sz="850" dirty="0"/>
           </a:p>
@@ -20763,7 +20850,7 @@
         </p:nvSpPr>
         <p:spPr>
           <a:xfrm>
-            <a:off x="2999232" y="3364992"/>
+            <a:off x="2313432" y="3364992"/>
             <a:ext cx="1645920" cy="475488"/>
           </a:xfrm>
           <a:prstGeom prst="rect">
@@ -20790,7 +20877,7 @@
         </p:nvSpPr>
         <p:spPr>
           <a:xfrm>
-            <a:off x="2999232" y="3364992"/>
+            <a:off x="2313432" y="3364992"/>
             <a:ext cx="1645920" cy="475488"/>
           </a:xfrm>
           <a:prstGeom prst="rect">
@@ -20815,7 +20902,7 @@
                 <a:ea typeface="Trebuchet MS" pitchFamily="34" charset="-122"/>
                 <a:cs typeface="Trebuchet MS" pitchFamily="34" charset="-120"/>
               </a:rPr>
-              <a:t>fa</a:t>
+              <a:t>cour</a:t>
             </a:r>
             <a:endParaRPr lang="en-US" sz="1400" dirty="0"/>
           </a:p>
@@ -20829,8 +20916,8 @@
         </p:nvSpPr>
         <p:spPr>
           <a:xfrm>
-            <a:off x="4645152" y="3364992"/>
-            <a:ext cx="1097280" cy="475488"/>
+            <a:off x="3959352" y="3364992"/>
+            <a:ext cx="411480" cy="475488"/>
           </a:xfrm>
           <a:prstGeom prst="rect">
             <a:avLst/>
@@ -20868,7 +20955,7 @@
         </p:nvSpPr>
         <p:spPr>
           <a:xfrm>
-            <a:off x="5742432" y="3364992"/>
+            <a:off x="4370832" y="3364992"/>
             <a:ext cx="1645920" cy="475488"/>
           </a:xfrm>
           <a:prstGeom prst="rect">
@@ -20895,7 +20982,7 @@
         </p:nvSpPr>
         <p:spPr>
           <a:xfrm>
-            <a:off x="5742432" y="3364992"/>
+            <a:off x="4370832" y="3364992"/>
             <a:ext cx="1645920" cy="475488"/>
           </a:xfrm>
           <a:prstGeom prst="rect">
@@ -20920,7 +21007,7 @@
                 <a:ea typeface="Trebuchet MS" pitchFamily="34" charset="-122"/>
                 <a:cs typeface="Trebuchet MS" pitchFamily="34" charset="-120"/>
               </a:rPr>
-              <a:t>mous</a:t>
+              <a:t>a</a:t>
             </a:r>
             <a:endParaRPr lang="en-US" sz="1400" dirty="0"/>
           </a:p>
@@ -20928,7 +21015,112 @@
       </p:sp>
       <p:sp>
         <p:nvSpPr>
-          <p:cNvPr id="31" name="Shape 29"/>
+          <p:cNvPr id="31" name="Text 29"/>
+          <p:cNvSpPr/>
+          <p:nvPr/>
+        </p:nvSpPr>
+        <p:spPr>
+          <a:xfrm>
+            <a:off x="6016752" y="3364992"/>
+            <a:ext cx="411480" cy="475488"/>
+          </a:xfrm>
+          <a:prstGeom prst="rect">
+            <a:avLst/>
+          </a:prstGeom>
+          <a:noFill/>
+          <a:ln/>
+        </p:spPr>
+        <p:txBody>
+          <a:bodyPr wrap="square" lIns="0" tIns="0" rIns="0" bIns="0" rtlCol="0" anchor="ctr"/>
+          <a:lstStyle/>
+          <a:p>
+            <a:pPr algn="ctr" indent="0" marL="0">
+              <a:buNone/>
+            </a:pPr>
+            <a:r>
+              <a:rPr lang="en-US" sz="1600" b="1" dirty="0">
+                <a:solidFill>
+                  <a:srgbClr val="0D9488"/>
+                </a:solidFill>
+                <a:latin typeface="Trebuchet MS" pitchFamily="34" charset="0"/>
+                <a:ea typeface="Trebuchet MS" pitchFamily="34" charset="-122"/>
+                <a:cs typeface="Trebuchet MS" pitchFamily="34" charset="-120"/>
+              </a:rPr>
+              <a:t>·</a:t>
+            </a:r>
+            <a:endParaRPr lang="en-US" sz="1600" dirty="0"/>
+          </a:p>
+        </p:txBody>
+      </p:sp>
+      <p:sp>
+        <p:nvSpPr>
+          <p:cNvPr id="32" name="Shape 30"/>
+          <p:cNvSpPr/>
+          <p:nvPr/>
+        </p:nvSpPr>
+        <p:spPr>
+          <a:xfrm>
+            <a:off x="6428232" y="3364992"/>
+            <a:ext cx="1645920" cy="475488"/>
+          </a:xfrm>
+          <a:prstGeom prst="rect">
+            <a:avLst>
+              <a:gd name="adj" fmla="val 9615"/>
+            </a:avLst>
+          </a:prstGeom>
+          <a:solidFill>
+            <a:srgbClr val="FFFFFF"/>
+          </a:solidFill>
+          <a:ln w="12700">
+            <a:solidFill>
+              <a:srgbClr val="0D9488"/>
+            </a:solidFill>
+            <a:prstDash val="solid"/>
+          </a:ln>
+        </p:spPr>
+      </p:sp>
+      <p:sp>
+        <p:nvSpPr>
+          <p:cNvPr id="33" name="Text 31"/>
+          <p:cNvSpPr/>
+          <p:nvPr/>
+        </p:nvSpPr>
+        <p:spPr>
+          <a:xfrm>
+            <a:off x="6428232" y="3364992"/>
+            <a:ext cx="1645920" cy="475488"/>
+          </a:xfrm>
+          <a:prstGeom prst="rect">
+            <a:avLst/>
+          </a:prstGeom>
+          <a:noFill/>
+          <a:ln/>
+        </p:spPr>
+        <p:txBody>
+          <a:bodyPr wrap="square" lIns="0" tIns="0" rIns="0" bIns="0" rtlCol="0" anchor="ctr"/>
+          <a:lstStyle/>
+          <a:p>
+            <a:pPr algn="ctr" indent="0" marL="0">
+              <a:buNone/>
+            </a:pPr>
+            <a:r>
+              <a:rPr lang="en-US" sz="1400" b="1" dirty="0">
+                <a:solidFill>
+                  <a:srgbClr val="0D9488"/>
+                </a:solidFill>
+                <a:latin typeface="Trebuchet MS" pitchFamily="34" charset="0"/>
+                <a:ea typeface="Trebuchet MS" pitchFamily="34" charset="-122"/>
+                <a:cs typeface="Trebuchet MS" pitchFamily="34" charset="-120"/>
+              </a:rPr>
+              <a:t>geous</a:t>
+            </a:r>
+            <a:endParaRPr lang="en-US" sz="1400" dirty="0"/>
+          </a:p>
+        </p:txBody>
+      </p:sp>
+      <p:sp>
+        <p:nvSpPr>
+          <p:cNvPr id="34" name="Shape 32"/>
           <p:cNvSpPr/>
           <p:nvPr/>
         </p:nvSpPr>
@@ -20955,7 +21147,7 @@
       </p:sp>
       <p:sp>
         <p:nvSpPr>
-          <p:cNvPr id="32" name="Text 30"/>
+          <p:cNvPr id="35" name="Text 33"/>
           <p:cNvSpPr/>
           <p:nvPr/>
         </p:nvSpPr>
@@ -20994,7 +21186,7 @@
       </p:sp>
       <p:sp>
         <p:nvSpPr>
-          <p:cNvPr id="33" name="Shape 31"/>
+          <p:cNvPr id="36" name="Shape 34"/>
           <p:cNvSpPr/>
           <p:nvPr/>
         </p:nvSpPr>
@@ -21021,7 +21213,7 @@
       </p:sp>
       <p:sp>
         <p:nvSpPr>
-          <p:cNvPr id="34" name="Text 32"/>
+          <p:cNvPr id="37" name="Text 35"/>
           <p:cNvSpPr/>
           <p:nvPr/>
         </p:nvSpPr>
@@ -21483,7 +21675,7 @@
                 <a:ea typeface="Trebuchet MS" pitchFamily="34" charset="-122"/>
                 <a:cs typeface="Trebuchet MS" pitchFamily="34" charset="-120"/>
               </a:rPr>
-              <a:t>famous</a:t>
+              <a:t>courageous</a:t>
             </a:r>
             <a:endParaRPr lang="en-US" sz="2800" dirty="0"/>
           </a:p>
@@ -21622,7 +21814,7 @@
                 <a:ea typeface="Trebuchet MS" pitchFamily="34" charset="-122"/>
                 <a:cs typeface="Trebuchet MS" pitchFamily="34" charset="-120"/>
               </a:rPr>
-              <a:t>fame</a:t>
+              <a:t>courage</a:t>
             </a:r>
             <a:endParaRPr lang="en-US" sz="1300" dirty="0"/>
           </a:p>
@@ -21661,7 +21853,7 @@
                 <a:ea typeface="Calibri" pitchFamily="34" charset="-122"/>
                 <a:cs typeface="Calibri" pitchFamily="34" charset="-120"/>
               </a:rPr>
-              <a:t>being well known</a:t>
+              <a:t>bravery</a:t>
             </a:r>
             <a:endParaRPr lang="en-US" sz="850" dirty="0"/>
           </a:p>
@@ -21812,7 +22004,7 @@
                 <a:ea typeface="Calibri" pitchFamily="34" charset="-122"/>
                 <a:cs typeface="Calibri" pitchFamily="34" charset="-120"/>
               </a:rPr>
-              <a:t>full of, having quality</a:t>
+              <a:t>full of, having the quality of</a:t>
             </a:r>
             <a:endParaRPr lang="en-US" sz="850" dirty="0"/>
           </a:p>
@@ -21919,7 +22111,7 @@
         </p:nvSpPr>
         <p:spPr>
           <a:xfrm>
-            <a:off x="2999232" y="3364992"/>
+            <a:off x="2313432" y="3364992"/>
             <a:ext cx="1645920" cy="475488"/>
           </a:xfrm>
           <a:prstGeom prst="rect">
@@ -21946,7 +22138,7 @@
         </p:nvSpPr>
         <p:spPr>
           <a:xfrm>
-            <a:off x="2999232" y="3364992"/>
+            <a:off x="2313432" y="3364992"/>
             <a:ext cx="1645920" cy="475488"/>
           </a:xfrm>
           <a:prstGeom prst="rect">
@@ -21971,7 +22163,7 @@
                 <a:ea typeface="Trebuchet MS" pitchFamily="34" charset="-122"/>
                 <a:cs typeface="Trebuchet MS" pitchFamily="34" charset="-120"/>
               </a:rPr>
-              <a:t>fa</a:t>
+              <a:t>cour</a:t>
             </a:r>
             <a:endParaRPr lang="en-US" sz="1400" dirty="0"/>
           </a:p>
@@ -21985,8 +22177,8 @@
         </p:nvSpPr>
         <p:spPr>
           <a:xfrm>
-            <a:off x="4645152" y="3364992"/>
-            <a:ext cx="1097280" cy="475488"/>
+            <a:off x="3959352" y="3364992"/>
+            <a:ext cx="411480" cy="475488"/>
           </a:xfrm>
           <a:prstGeom prst="rect">
             <a:avLst/>
@@ -22024,7 +22216,7 @@
         </p:nvSpPr>
         <p:spPr>
           <a:xfrm>
-            <a:off x="5742432" y="3364992"/>
+            <a:off x="4370832" y="3364992"/>
             <a:ext cx="1645920" cy="475488"/>
           </a:xfrm>
           <a:prstGeom prst="rect">
@@ -22051,7 +22243,7 @@
         </p:nvSpPr>
         <p:spPr>
           <a:xfrm>
-            <a:off x="5742432" y="3364992"/>
+            <a:off x="4370832" y="3364992"/>
             <a:ext cx="1645920" cy="475488"/>
           </a:xfrm>
           <a:prstGeom prst="rect">
@@ -22076,7 +22268,7 @@
                 <a:ea typeface="Trebuchet MS" pitchFamily="34" charset="-122"/>
                 <a:cs typeface="Trebuchet MS" pitchFamily="34" charset="-120"/>
               </a:rPr>
-              <a:t>mous</a:t>
+              <a:t>a</a:t>
             </a:r>
             <a:endParaRPr lang="en-US" sz="1400" dirty="0"/>
           </a:p>
@@ -22084,7 +22276,112 @@
       </p:sp>
       <p:sp>
         <p:nvSpPr>
-          <p:cNvPr id="31" name="Shape 29"/>
+          <p:cNvPr id="31" name="Text 29"/>
+          <p:cNvSpPr/>
+          <p:nvPr/>
+        </p:nvSpPr>
+        <p:spPr>
+          <a:xfrm>
+            <a:off x="6016752" y="3364992"/>
+            <a:ext cx="411480" cy="475488"/>
+          </a:xfrm>
+          <a:prstGeom prst="rect">
+            <a:avLst/>
+          </a:prstGeom>
+          <a:noFill/>
+          <a:ln/>
+        </p:spPr>
+        <p:txBody>
+          <a:bodyPr wrap="square" lIns="0" tIns="0" rIns="0" bIns="0" rtlCol="0" anchor="ctr"/>
+          <a:lstStyle/>
+          <a:p>
+            <a:pPr algn="ctr" indent="0" marL="0">
+              <a:buNone/>
+            </a:pPr>
+            <a:r>
+              <a:rPr lang="en-US" sz="1600" b="1" dirty="0">
+                <a:solidFill>
+                  <a:srgbClr val="0D9488"/>
+                </a:solidFill>
+                <a:latin typeface="Trebuchet MS" pitchFamily="34" charset="0"/>
+                <a:ea typeface="Trebuchet MS" pitchFamily="34" charset="-122"/>
+                <a:cs typeface="Trebuchet MS" pitchFamily="34" charset="-120"/>
+              </a:rPr>
+              <a:t>·</a:t>
+            </a:r>
+            <a:endParaRPr lang="en-US" sz="1600" dirty="0"/>
+          </a:p>
+        </p:txBody>
+      </p:sp>
+      <p:sp>
+        <p:nvSpPr>
+          <p:cNvPr id="32" name="Shape 30"/>
+          <p:cNvSpPr/>
+          <p:nvPr/>
+        </p:nvSpPr>
+        <p:spPr>
+          <a:xfrm>
+            <a:off x="6428232" y="3364992"/>
+            <a:ext cx="1645920" cy="475488"/>
+          </a:xfrm>
+          <a:prstGeom prst="rect">
+            <a:avLst>
+              <a:gd name="adj" fmla="val 9615"/>
+            </a:avLst>
+          </a:prstGeom>
+          <a:solidFill>
+            <a:srgbClr val="FFFFFF"/>
+          </a:solidFill>
+          <a:ln w="12700">
+            <a:solidFill>
+              <a:srgbClr val="0D9488"/>
+            </a:solidFill>
+            <a:prstDash val="solid"/>
+          </a:ln>
+        </p:spPr>
+      </p:sp>
+      <p:sp>
+        <p:nvSpPr>
+          <p:cNvPr id="33" name="Text 31"/>
+          <p:cNvSpPr/>
+          <p:nvPr/>
+        </p:nvSpPr>
+        <p:spPr>
+          <a:xfrm>
+            <a:off x="6428232" y="3364992"/>
+            <a:ext cx="1645920" cy="475488"/>
+          </a:xfrm>
+          <a:prstGeom prst="rect">
+            <a:avLst/>
+          </a:prstGeom>
+          <a:noFill/>
+          <a:ln/>
+        </p:spPr>
+        <p:txBody>
+          <a:bodyPr wrap="square" lIns="0" tIns="0" rIns="0" bIns="0" rtlCol="0" anchor="ctr"/>
+          <a:lstStyle/>
+          <a:p>
+            <a:pPr algn="ctr" indent="0" marL="0">
+              <a:buNone/>
+            </a:pPr>
+            <a:r>
+              <a:rPr lang="en-US" sz="1400" b="1" dirty="0">
+                <a:solidFill>
+                  <a:srgbClr val="0D9488"/>
+                </a:solidFill>
+                <a:latin typeface="Trebuchet MS" pitchFamily="34" charset="0"/>
+                <a:ea typeface="Trebuchet MS" pitchFamily="34" charset="-122"/>
+                <a:cs typeface="Trebuchet MS" pitchFamily="34" charset="-120"/>
+              </a:rPr>
+              <a:t>geous</a:t>
+            </a:r>
+            <a:endParaRPr lang="en-US" sz="1400" dirty="0"/>
+          </a:p>
+        </p:txBody>
+      </p:sp>
+      <p:sp>
+        <p:nvSpPr>
+          <p:cNvPr id="34" name="Shape 32"/>
           <p:cNvSpPr/>
           <p:nvPr/>
         </p:nvSpPr>
@@ -22111,7 +22408,7 @@
       </p:sp>
       <p:sp>
         <p:nvSpPr>
-          <p:cNvPr id="32" name="Text 30"/>
+          <p:cNvPr id="35" name="Text 33"/>
           <p:cNvSpPr/>
           <p:nvPr/>
         </p:nvSpPr>
@@ -22150,18 +22447,18 @@
       </p:sp>
       <p:sp>
         <p:nvSpPr>
-          <p:cNvPr id="33" name="Shape 31"/>
+          <p:cNvPr id="36" name="Shape 34"/>
           <p:cNvSpPr/>
           <p:nvPr/>
         </p:nvSpPr>
         <p:spPr>
           <a:xfrm>
             <a:off x="1874520" y="4096512"/>
-            <a:ext cx="6903720" cy="658368"/>
+            <a:ext cx="6903720" cy="804672"/>
           </a:xfrm>
           <a:prstGeom prst="rect">
             <a:avLst>
-              <a:gd name="adj" fmla="val 8333"/>
+              <a:gd name="adj" fmla="val 6818"/>
             </a:avLst>
           </a:prstGeom>
           <a:solidFill>
@@ -22177,18 +22474,18 @@
       </p:sp>
       <p:sp>
         <p:nvSpPr>
-          <p:cNvPr id="34" name="Shape 32"/>
+          <p:cNvPr id="37" name="Shape 35"/>
           <p:cNvSpPr/>
           <p:nvPr/>
         </p:nvSpPr>
         <p:spPr>
           <a:xfrm>
             <a:off x="2427732" y="4169664"/>
-            <a:ext cx="685800" cy="475488"/>
+            <a:ext cx="685800" cy="384048"/>
           </a:xfrm>
           <a:prstGeom prst="rect">
             <a:avLst>
-              <a:gd name="adj" fmla="val 7692"/>
+              <a:gd name="adj" fmla="val 9524"/>
             </a:avLst>
           </a:prstGeom>
           <a:solidFill>
@@ -22204,14 +22501,14 @@
       </p:sp>
       <p:sp>
         <p:nvSpPr>
-          <p:cNvPr id="35" name="Text 33"/>
+          <p:cNvPr id="38" name="Text 36"/>
           <p:cNvSpPr/>
           <p:nvPr/>
         </p:nvSpPr>
         <p:spPr>
           <a:xfrm>
             <a:off x="2427732" y="4169664"/>
-            <a:ext cx="685800" cy="475488"/>
+            <a:ext cx="685800" cy="384048"/>
           </a:xfrm>
           <a:prstGeom prst="rect">
             <a:avLst/>
@@ -22235,7 +22532,7 @@
                 <a:ea typeface="Trebuchet MS" pitchFamily="34" charset="-122"/>
                 <a:cs typeface="Trebuchet MS" pitchFamily="34" charset="-120"/>
               </a:rPr>
-              <a:t>f</a:t>
+              <a:t>c</a:t>
             </a:r>
             <a:endParaRPr lang="en-US" sz="900" dirty="0"/>
           </a:p>
@@ -22243,18 +22540,57 @@
       </p:sp>
       <p:sp>
         <p:nvSpPr>
-          <p:cNvPr id="36" name="Shape 34"/>
+          <p:cNvPr id="39" name="Text 37"/>
+          <p:cNvSpPr/>
+          <p:nvPr/>
+        </p:nvSpPr>
+        <p:spPr>
+          <a:xfrm>
+            <a:off x="2427732" y="4572000"/>
+            <a:ext cx="685800" cy="219456"/>
+          </a:xfrm>
+          <a:prstGeom prst="rect">
+            <a:avLst/>
+          </a:prstGeom>
+          <a:noFill/>
+          <a:ln/>
+        </p:spPr>
+        <p:txBody>
+          <a:bodyPr wrap="square" lIns="0" tIns="0" rIns="0" bIns="0" rtlCol="0" anchor="t"/>
+          <a:lstStyle/>
+          <a:p>
+            <a:pPr algn="ctr" indent="0" marL="0">
+              <a:buNone/>
+            </a:pPr>
+            <a:r>
+              <a:rPr lang="en-US" sz="750" i="1" dirty="0">
+                <a:solidFill>
+                  <a:srgbClr val="94A3B8"/>
+                </a:solidFill>
+                <a:latin typeface="Calibri" pitchFamily="34" charset="0"/>
+                <a:ea typeface="Calibri" pitchFamily="34" charset="-122"/>
+                <a:cs typeface="Calibri" pitchFamily="34" charset="-120"/>
+              </a:rPr>
+              <a:t>/k/</a:t>
+            </a:r>
+            <a:endParaRPr lang="en-US" sz="750" dirty="0"/>
+          </a:p>
+        </p:txBody>
+      </p:sp>
+      <p:sp>
+        <p:nvSpPr>
+          <p:cNvPr id="40" name="Shape 38"/>
           <p:cNvSpPr/>
           <p:nvPr/>
         </p:nvSpPr>
         <p:spPr>
           <a:xfrm>
             <a:off x="3639312" y="4169664"/>
-            <a:ext cx="685800" cy="475488"/>
+            <a:ext cx="685800" cy="384048"/>
           </a:xfrm>
           <a:prstGeom prst="rect">
             <a:avLst>
-              <a:gd name="adj" fmla="val 7692"/>
+              <a:gd name="adj" fmla="val 9524"/>
             </a:avLst>
           </a:prstGeom>
           <a:solidFill>
@@ -22270,14 +22606,14 @@
       </p:sp>
       <p:sp>
         <p:nvSpPr>
-          <p:cNvPr id="37" name="Text 35"/>
+          <p:cNvPr id="41" name="Text 39"/>
           <p:cNvSpPr/>
           <p:nvPr/>
         </p:nvSpPr>
         <p:spPr>
           <a:xfrm>
             <a:off x="3639312" y="4169664"/>
-            <a:ext cx="685800" cy="475488"/>
+            <a:ext cx="685800" cy="384048"/>
           </a:xfrm>
           <a:prstGeom prst="rect">
             <a:avLst/>
@@ -22301,7 +22637,7 @@
                 <a:ea typeface="Trebuchet MS" pitchFamily="34" charset="-122"/>
                 <a:cs typeface="Trebuchet MS" pitchFamily="34" charset="-120"/>
               </a:rPr>
-              <a:t>a</a:t>
+              <a:t>our</a:t>
             </a:r>
             <a:endParaRPr lang="en-US" sz="900" dirty="0"/>
           </a:p>
@@ -22309,18 +22645,18 @@
       </p:sp>
       <p:sp>
         <p:nvSpPr>
-          <p:cNvPr id="38" name="Shape 36"/>
+          <p:cNvPr id="42" name="Shape 40"/>
           <p:cNvSpPr/>
           <p:nvPr/>
         </p:nvSpPr>
         <p:spPr>
           <a:xfrm>
             <a:off x="4850892" y="4169664"/>
-            <a:ext cx="685800" cy="475488"/>
+            <a:ext cx="685800" cy="384048"/>
           </a:xfrm>
           <a:prstGeom prst="rect">
             <a:avLst>
-              <a:gd name="adj" fmla="val 7692"/>
+              <a:gd name="adj" fmla="val 9524"/>
             </a:avLst>
           </a:prstGeom>
           <a:solidFill>
@@ -22336,14 +22672,14 @@
       </p:sp>
       <p:sp>
         <p:nvSpPr>
-          <p:cNvPr id="39" name="Text 37"/>
+          <p:cNvPr id="43" name="Text 41"/>
           <p:cNvSpPr/>
           <p:nvPr/>
         </p:nvSpPr>
         <p:spPr>
           <a:xfrm>
             <a:off x="4850892" y="4169664"/>
-            <a:ext cx="685800" cy="475488"/>
+            <a:ext cx="685800" cy="384048"/>
           </a:xfrm>
           <a:prstGeom prst="rect">
             <a:avLst/>
@@ -22367,7 +22703,7 @@
                 <a:ea typeface="Trebuchet MS" pitchFamily="34" charset="-122"/>
                 <a:cs typeface="Trebuchet MS" pitchFamily="34" charset="-120"/>
               </a:rPr>
-              <a:t>m</a:t>
+              <a:t>a</a:t>
             </a:r>
             <a:endParaRPr lang="en-US" sz="900" dirty="0"/>
           </a:p>
@@ -22375,18 +22711,18 @@
       </p:sp>
       <p:sp>
         <p:nvSpPr>
-          <p:cNvPr id="40" name="Shape 38"/>
+          <p:cNvPr id="44" name="Shape 42"/>
           <p:cNvSpPr/>
           <p:nvPr/>
         </p:nvSpPr>
         <p:spPr>
           <a:xfrm>
             <a:off x="6062472" y="4169664"/>
-            <a:ext cx="685800" cy="475488"/>
+            <a:ext cx="685800" cy="384048"/>
           </a:xfrm>
           <a:prstGeom prst="rect">
             <a:avLst>
-              <a:gd name="adj" fmla="val 7692"/>
+              <a:gd name="adj" fmla="val 9524"/>
             </a:avLst>
           </a:prstGeom>
           <a:solidFill>
@@ -22402,14 +22738,14 @@
       </p:sp>
       <p:sp>
         <p:nvSpPr>
-          <p:cNvPr id="41" name="Text 39"/>
+          <p:cNvPr id="45" name="Text 43"/>
           <p:cNvSpPr/>
           <p:nvPr/>
         </p:nvSpPr>
         <p:spPr>
           <a:xfrm>
             <a:off x="6062472" y="4169664"/>
-            <a:ext cx="685800" cy="475488"/>
+            <a:ext cx="685800" cy="384048"/>
           </a:xfrm>
           <a:prstGeom prst="rect">
             <a:avLst/>
@@ -22433,7 +22769,7 @@
                 <a:ea typeface="Trebuchet MS" pitchFamily="34" charset="-122"/>
                 <a:cs typeface="Trebuchet MS" pitchFamily="34" charset="-120"/>
               </a:rPr>
-              <a:t>ou</a:t>
+              <a:t>g</a:t>
             </a:r>
             <a:endParaRPr lang="en-US" sz="900" dirty="0"/>
           </a:p>
@@ -22441,18 +22777,18 @@
       </p:sp>
       <p:sp>
         <p:nvSpPr>
-          <p:cNvPr id="42" name="Shape 40"/>
+          <p:cNvPr id="46" name="Shape 44"/>
           <p:cNvSpPr/>
           <p:nvPr/>
         </p:nvSpPr>
         <p:spPr>
           <a:xfrm>
             <a:off x="7274052" y="4169664"/>
-            <a:ext cx="685800" cy="475488"/>
+            <a:ext cx="685800" cy="384048"/>
           </a:xfrm>
           <a:prstGeom prst="rect">
             <a:avLst>
-              <a:gd name="adj" fmla="val 7692"/>
+              <a:gd name="adj" fmla="val 9524"/>
             </a:avLst>
           </a:prstGeom>
           <a:solidFill>
@@ -22468,14 +22804,14 @@
       </p:sp>
       <p:sp>
         <p:nvSpPr>
-          <p:cNvPr id="43" name="Text 41"/>
+          <p:cNvPr id="47" name="Text 45"/>
           <p:cNvSpPr/>
           <p:nvPr/>
         </p:nvSpPr>
         <p:spPr>
           <a:xfrm>
             <a:off x="7274052" y="4169664"/>
-            <a:ext cx="685800" cy="475488"/>
+            <a:ext cx="685800" cy="384048"/>
           </a:xfrm>
           <a:prstGeom prst="rect">
             <a:avLst/>
@@ -22499,9 +22835,48 @@
                 <a:ea typeface="Trebuchet MS" pitchFamily="34" charset="-122"/>
                 <a:cs typeface="Trebuchet MS" pitchFamily="34" charset="-120"/>
               </a:rPr>
-              <a:t>s</a:t>
+              <a:t>eous</a:t>
             </a:r>
             <a:endParaRPr lang="en-US" sz="900" dirty="0"/>
+          </a:p>
+        </p:txBody>
+      </p:sp>
+      <p:sp>
+        <p:nvSpPr>
+          <p:cNvPr id="48" name="Text 46"/>
+          <p:cNvSpPr/>
+          <p:nvPr/>
+        </p:nvSpPr>
+        <p:spPr>
+          <a:xfrm>
+            <a:off x="7274052" y="4572000"/>
+            <a:ext cx="685800" cy="219456"/>
+          </a:xfrm>
+          <a:prstGeom prst="rect">
+            <a:avLst/>
+          </a:prstGeom>
+          <a:noFill/>
+          <a:ln/>
+        </p:spPr>
+        <p:txBody>
+          <a:bodyPr wrap="square" lIns="0" tIns="0" rIns="0" bIns="0" rtlCol="0" anchor="t"/>
+          <a:lstStyle/>
+          <a:p>
+            <a:pPr algn="ctr" indent="0" marL="0">
+              <a:buNone/>
+            </a:pPr>
+            <a:r>
+              <a:rPr lang="en-US" sz="750" i="1" dirty="0">
+                <a:solidFill>
+                  <a:srgbClr val="94A3B8"/>
+                </a:solidFill>
+                <a:latin typeface="Calibri" pitchFamily="34" charset="0"/>
+                <a:ea typeface="Calibri" pitchFamily="34" charset="-122"/>
+                <a:cs typeface="Calibri" pitchFamily="34" charset="-120"/>
+              </a:rPr>
+              <a:t>/us/</a:t>
+            </a:r>
+            <a:endParaRPr lang="en-US" sz="750" dirty="0"/>
           </a:p>
         </p:txBody>
       </p:sp>
@@ -22930,7 +23305,7 @@
                 <a:ea typeface="Trebuchet MS" pitchFamily="34" charset="-122"/>
                 <a:cs typeface="Trebuchet MS" pitchFamily="34" charset="-120"/>
               </a:rPr>
-              <a:t>wondrous</a:t>
+              <a:t>famous</a:t>
             </a:r>
             <a:endParaRPr lang="en-US" sz="2800" dirty="0"/>
           </a:p>
@@ -23757,7 +24132,7 @@
                 <a:ea typeface="Trebuchet MS" pitchFamily="34" charset="-122"/>
                 <a:cs typeface="Trebuchet MS" pitchFamily="34" charset="-120"/>
               </a:rPr>
-              <a:t>wondrous</a:t>
+              <a:t>famous</a:t>
             </a:r>
             <a:endParaRPr lang="en-US" sz="2800" dirty="0"/>
           </a:p>
@@ -23896,7 +24271,7 @@
                 <a:ea typeface="Trebuchet MS" pitchFamily="34" charset="-122"/>
                 <a:cs typeface="Trebuchet MS" pitchFamily="34" charset="-120"/>
               </a:rPr>
-              <a:t>wonder</a:t>
+              <a:t>fame</a:t>
             </a:r>
             <a:endParaRPr lang="en-US" sz="1300" dirty="0"/>
           </a:p>
@@ -23935,7 +24310,7 @@
                 <a:ea typeface="Calibri" pitchFamily="34" charset="-122"/>
                 <a:cs typeface="Calibri" pitchFamily="34" charset="-120"/>
               </a:rPr>
-              <a:t>a feeling of amazement</a:t>
+              <a:t>being well known</a:t>
             </a:r>
             <a:endParaRPr lang="en-US" sz="850" dirty="0"/>
           </a:p>
@@ -23974,7 +24349,7 @@
                 <a:ea typeface="Calibri" pitchFamily="34" charset="-122"/>
                 <a:cs typeface="Calibri" pitchFamily="34" charset="-120"/>
               </a:rPr>
-              <a:t>'er' reduced before suffix</a:t>
+              <a:t>'e' dropped before vowel suffix</a:t>
             </a:r>
             <a:endParaRPr lang="en-US" sz="700" dirty="0"/>
           </a:p>
@@ -24086,7 +24461,7 @@
                 <a:ea typeface="Calibri" pitchFamily="34" charset="-122"/>
                 <a:cs typeface="Calibri" pitchFamily="34" charset="-120"/>
               </a:rPr>
-              <a:t>full of, having quality</a:t>
+              <a:t>full of, having the quality of</a:t>
             </a:r>
             <a:endParaRPr lang="en-US" sz="850" dirty="0"/>
           </a:p>
@@ -25500,7 +25875,7 @@
                 <a:ea typeface="Trebuchet MS" pitchFamily="34" charset="-122"/>
                 <a:cs typeface="Trebuchet MS" pitchFamily="34" charset="-120"/>
               </a:rPr>
-              <a:t>wondrous</a:t>
+              <a:t>famous</a:t>
             </a:r>
             <a:endParaRPr lang="en-US" sz="2800" dirty="0"/>
           </a:p>
@@ -25639,7 +26014,7 @@
                 <a:ea typeface="Trebuchet MS" pitchFamily="34" charset="-122"/>
                 <a:cs typeface="Trebuchet MS" pitchFamily="34" charset="-120"/>
               </a:rPr>
-              <a:t>wonder</a:t>
+              <a:t>fame</a:t>
             </a:r>
             <a:endParaRPr lang="en-US" sz="1300" dirty="0"/>
           </a:p>
@@ -25678,7 +26053,7 @@
                 <a:ea typeface="Calibri" pitchFamily="34" charset="-122"/>
                 <a:cs typeface="Calibri" pitchFamily="34" charset="-120"/>
               </a:rPr>
-              <a:t>a feeling of amazement</a:t>
+              <a:t>being well known</a:t>
             </a:r>
             <a:endParaRPr lang="en-US" sz="850" dirty="0"/>
           </a:p>
@@ -25717,7 +26092,7 @@
                 <a:ea typeface="Calibri" pitchFamily="34" charset="-122"/>
                 <a:cs typeface="Calibri" pitchFamily="34" charset="-120"/>
               </a:rPr>
-              <a:t>'er' reduced before suffix</a:t>
+              <a:t>'e' dropped before vowel suffix</a:t>
             </a:r>
             <a:endParaRPr lang="en-US" sz="700" dirty="0"/>
           </a:p>
@@ -25829,7 +26204,7 @@
                 <a:ea typeface="Calibri" pitchFamily="34" charset="-122"/>
                 <a:cs typeface="Calibri" pitchFamily="34" charset="-120"/>
               </a:rPr>
-              <a:t>full of, having quality</a:t>
+              <a:t>full of, having the quality of</a:t>
             </a:r>
             <a:endParaRPr lang="en-US" sz="850" dirty="0"/>
           </a:p>
@@ -25988,7 +26363,7 @@
                 <a:ea typeface="Trebuchet MS" pitchFamily="34" charset="-122"/>
                 <a:cs typeface="Trebuchet MS" pitchFamily="34" charset="-120"/>
               </a:rPr>
-              <a:t>won</a:t>
+              <a:t>fa</a:t>
             </a:r>
             <a:endParaRPr lang="en-US" sz="1400" dirty="0"/>
           </a:p>
@@ -26093,7 +26468,7 @@
                 <a:ea typeface="Trebuchet MS" pitchFamily="34" charset="-122"/>
                 <a:cs typeface="Trebuchet MS" pitchFamily="34" charset="-120"/>
               </a:rPr>
-              <a:t>drous</a:t>
+              <a:t>mous</a:t>
             </a:r>
             <a:endParaRPr lang="en-US" sz="1400" dirty="0"/>
           </a:p>
@@ -26656,7 +27031,7 @@
                 <a:ea typeface="Trebuchet MS" pitchFamily="34" charset="-122"/>
                 <a:cs typeface="Trebuchet MS" pitchFamily="34" charset="-120"/>
               </a:rPr>
-              <a:t>wondrous</a:t>
+              <a:t>famous</a:t>
             </a:r>
             <a:endParaRPr lang="en-US" sz="2800" dirty="0"/>
           </a:p>
@@ -26795,7 +27170,7 @@
                 <a:ea typeface="Trebuchet MS" pitchFamily="34" charset="-122"/>
                 <a:cs typeface="Trebuchet MS" pitchFamily="34" charset="-120"/>
               </a:rPr>
-              <a:t>wonder</a:t>
+              <a:t>fame</a:t>
             </a:r>
             <a:endParaRPr lang="en-US" sz="1300" dirty="0"/>
           </a:p>
@@ -26834,7 +27209,7 @@
                 <a:ea typeface="Calibri" pitchFamily="34" charset="-122"/>
                 <a:cs typeface="Calibri" pitchFamily="34" charset="-120"/>
               </a:rPr>
-              <a:t>a feeling of amazement</a:t>
+              <a:t>being well known</a:t>
             </a:r>
             <a:endParaRPr lang="en-US" sz="850" dirty="0"/>
           </a:p>
@@ -26873,7 +27248,7 @@
                 <a:ea typeface="Calibri" pitchFamily="34" charset="-122"/>
                 <a:cs typeface="Calibri" pitchFamily="34" charset="-120"/>
               </a:rPr>
-              <a:t>'er' reduced before suffix</a:t>
+              <a:t>'e' dropped before vowel suffix</a:t>
             </a:r>
             <a:endParaRPr lang="en-US" sz="700" dirty="0"/>
           </a:p>
@@ -26985,7 +27360,7 @@
                 <a:ea typeface="Calibri" pitchFamily="34" charset="-122"/>
                 <a:cs typeface="Calibri" pitchFamily="34" charset="-120"/>
               </a:rPr>
-              <a:t>full of, having quality</a:t>
+              <a:t>full of, having the quality of</a:t>
             </a:r>
             <a:endParaRPr lang="en-US" sz="850" dirty="0"/>
           </a:p>
@@ -27144,7 +27519,7 @@
                 <a:ea typeface="Trebuchet MS" pitchFamily="34" charset="-122"/>
                 <a:cs typeface="Trebuchet MS" pitchFamily="34" charset="-120"/>
               </a:rPr>
-              <a:t>won</a:t>
+              <a:t>fa</a:t>
             </a:r>
             <a:endParaRPr lang="en-US" sz="1400" dirty="0"/>
           </a:p>
@@ -27249,7 +27624,7 @@
                 <a:ea typeface="Trebuchet MS" pitchFamily="34" charset="-122"/>
                 <a:cs typeface="Trebuchet MS" pitchFamily="34" charset="-120"/>
               </a:rPr>
-              <a:t>drous</a:t>
+              <a:t>mous</a:t>
             </a:r>
             <a:endParaRPr lang="en-US" sz="1400" dirty="0"/>
           </a:p>
@@ -27330,11 +27705,11 @@
         <p:spPr>
           <a:xfrm>
             <a:off x="1874520" y="4096512"/>
-            <a:ext cx="6903720" cy="658368"/>
+            <a:ext cx="6903720" cy="804672"/>
           </a:xfrm>
           <a:prstGeom prst="rect">
             <a:avLst>
-              <a:gd name="adj" fmla="val 8333"/>
+              <a:gd name="adj" fmla="val 6818"/>
             </a:avLst>
           </a:prstGeom>
           <a:solidFill>
@@ -27356,12 +27731,12 @@
         </p:nvSpPr>
         <p:spPr>
           <a:xfrm>
-            <a:off x="2254649" y="4169664"/>
-            <a:ext cx="685800" cy="475488"/>
+            <a:off x="2427732" y="4169664"/>
+            <a:ext cx="685800" cy="384048"/>
           </a:xfrm>
           <a:prstGeom prst="rect">
             <a:avLst>
-              <a:gd name="adj" fmla="val 7692"/>
+              <a:gd name="adj" fmla="val 9524"/>
             </a:avLst>
           </a:prstGeom>
           <a:solidFill>
@@ -27383,8 +27758,8 @@
         </p:nvSpPr>
         <p:spPr>
           <a:xfrm>
-            <a:off x="2254649" y="4169664"/>
-            <a:ext cx="685800" cy="475488"/>
+            <a:off x="2427732" y="4169664"/>
+            <a:ext cx="685800" cy="384048"/>
           </a:xfrm>
           <a:prstGeom prst="rect">
             <a:avLst/>
@@ -27408,7 +27783,7 @@
                 <a:ea typeface="Trebuchet MS" pitchFamily="34" charset="-122"/>
                 <a:cs typeface="Trebuchet MS" pitchFamily="34" charset="-120"/>
               </a:rPr>
-              <a:t>w</a:t>
+              <a:t>f</a:t>
             </a:r>
             <a:endParaRPr lang="en-US" sz="900" dirty="0"/>
           </a:p>
@@ -27422,12 +27797,12 @@
         </p:nvSpPr>
         <p:spPr>
           <a:xfrm>
-            <a:off x="3293146" y="4169664"/>
-            <a:ext cx="685800" cy="475488"/>
+            <a:off x="3639312" y="4169664"/>
+            <a:ext cx="685800" cy="384048"/>
           </a:xfrm>
           <a:prstGeom prst="rect">
             <a:avLst>
-              <a:gd name="adj" fmla="val 7692"/>
+              <a:gd name="adj" fmla="val 9524"/>
             </a:avLst>
           </a:prstGeom>
           <a:solidFill>
@@ -27449,8 +27824,8 @@
         </p:nvSpPr>
         <p:spPr>
           <a:xfrm>
-            <a:off x="3293146" y="4169664"/>
-            <a:ext cx="685800" cy="475488"/>
+            <a:off x="3639312" y="4169664"/>
+            <a:ext cx="685800" cy="384048"/>
           </a:xfrm>
           <a:prstGeom prst="rect">
             <a:avLst/>
@@ -27474,7 +27849,7 @@
                 <a:ea typeface="Trebuchet MS" pitchFamily="34" charset="-122"/>
                 <a:cs typeface="Trebuchet MS" pitchFamily="34" charset="-120"/>
               </a:rPr>
-              <a:t>o</a:t>
+              <a:t>a</a:t>
             </a:r>
             <a:endParaRPr lang="en-US" sz="900" dirty="0"/>
           </a:p>
@@ -27488,12 +27863,12 @@
         </p:nvSpPr>
         <p:spPr>
           <a:xfrm>
-            <a:off x="4331643" y="4169664"/>
-            <a:ext cx="685800" cy="475488"/>
+            <a:off x="4850892" y="4169664"/>
+            <a:ext cx="685800" cy="384048"/>
           </a:xfrm>
           <a:prstGeom prst="rect">
             <a:avLst>
-              <a:gd name="adj" fmla="val 7692"/>
+              <a:gd name="adj" fmla="val 9524"/>
             </a:avLst>
           </a:prstGeom>
           <a:solidFill>
@@ -27515,8 +27890,8 @@
         </p:nvSpPr>
         <p:spPr>
           <a:xfrm>
-            <a:off x="4331643" y="4169664"/>
-            <a:ext cx="685800" cy="475488"/>
+            <a:off x="4850892" y="4169664"/>
+            <a:ext cx="685800" cy="384048"/>
           </a:xfrm>
           <a:prstGeom prst="rect">
             <a:avLst/>
@@ -27540,7 +27915,7 @@
                 <a:ea typeface="Trebuchet MS" pitchFamily="34" charset="-122"/>
                 <a:cs typeface="Trebuchet MS" pitchFamily="34" charset="-120"/>
               </a:rPr>
-              <a:t>n</a:t>
+              <a:t>m</a:t>
             </a:r>
             <a:endParaRPr lang="en-US" sz="900" dirty="0"/>
           </a:p>
@@ -27554,12 +27929,12 @@
         </p:nvSpPr>
         <p:spPr>
           <a:xfrm>
-            <a:off x="5370141" y="4169664"/>
-            <a:ext cx="685800" cy="475488"/>
+            <a:off x="6062472" y="4169664"/>
+            <a:ext cx="685800" cy="384048"/>
           </a:xfrm>
           <a:prstGeom prst="rect">
             <a:avLst>
-              <a:gd name="adj" fmla="val 7692"/>
+              <a:gd name="adj" fmla="val 9524"/>
             </a:avLst>
           </a:prstGeom>
           <a:solidFill>
@@ -27581,8 +27956,8 @@
         </p:nvSpPr>
         <p:spPr>
           <a:xfrm>
-            <a:off x="5370141" y="4169664"/>
-            <a:ext cx="685800" cy="475488"/>
+            <a:off x="6062472" y="4169664"/>
+            <a:ext cx="685800" cy="384048"/>
           </a:xfrm>
           <a:prstGeom prst="rect">
             <a:avLst/>
@@ -27606,7 +27981,7 @@
                 <a:ea typeface="Trebuchet MS" pitchFamily="34" charset="-122"/>
                 <a:cs typeface="Trebuchet MS" pitchFamily="34" charset="-120"/>
               </a:rPr>
-              <a:t>dr</a:t>
+              <a:t>ou</a:t>
             </a:r>
             <a:endParaRPr lang="en-US" sz="900" dirty="0"/>
           </a:p>
@@ -27614,18 +27989,57 @@
       </p:sp>
       <p:sp>
         <p:nvSpPr>
-          <p:cNvPr id="42" name="Shape 40"/>
-          <p:cNvSpPr/>
-          <p:nvPr/>
-        </p:nvSpPr>
-        <p:spPr>
-          <a:xfrm>
-            <a:off x="6408638" y="4169664"/>
-            <a:ext cx="685800" cy="475488"/>
+          <p:cNvPr id="42" name="Text 40"/>
+          <p:cNvSpPr/>
+          <p:nvPr/>
+        </p:nvSpPr>
+        <p:spPr>
+          <a:xfrm>
+            <a:off x="6062472" y="4572000"/>
+            <a:ext cx="685800" cy="219456"/>
+          </a:xfrm>
+          <a:prstGeom prst="rect">
+            <a:avLst/>
+          </a:prstGeom>
+          <a:noFill/>
+          <a:ln/>
+        </p:spPr>
+        <p:txBody>
+          <a:bodyPr wrap="square" lIns="0" tIns="0" rIns="0" bIns="0" rtlCol="0" anchor="t"/>
+          <a:lstStyle/>
+          <a:p>
+            <a:pPr algn="ctr" indent="0" marL="0">
+              <a:buNone/>
+            </a:pPr>
+            <a:r>
+              <a:rPr lang="en-US" sz="750" i="1" dirty="0">
+                <a:solidFill>
+                  <a:srgbClr val="94A3B8"/>
+                </a:solidFill>
+                <a:latin typeface="Calibri" pitchFamily="34" charset="0"/>
+                <a:ea typeface="Calibri" pitchFamily="34" charset="-122"/>
+                <a:cs typeface="Calibri" pitchFamily="34" charset="-120"/>
+              </a:rPr>
+              <a:t>/u/</a:t>
+            </a:r>
+            <a:endParaRPr lang="en-US" sz="750" dirty="0"/>
+          </a:p>
+        </p:txBody>
+      </p:sp>
+      <p:sp>
+        <p:nvSpPr>
+          <p:cNvPr id="43" name="Shape 41"/>
+          <p:cNvSpPr/>
+          <p:nvPr/>
+        </p:nvSpPr>
+        <p:spPr>
+          <a:xfrm>
+            <a:off x="7274052" y="4169664"/>
+            <a:ext cx="685800" cy="384048"/>
           </a:xfrm>
           <a:prstGeom prst="rect">
             <a:avLst>
-              <a:gd name="adj" fmla="val 7692"/>
+              <a:gd name="adj" fmla="val 9524"/>
             </a:avLst>
           </a:prstGeom>
           <a:solidFill>
@@ -27641,80 +28055,14 @@
       </p:sp>
       <p:sp>
         <p:nvSpPr>
-          <p:cNvPr id="43" name="Text 41"/>
-          <p:cNvSpPr/>
-          <p:nvPr/>
-        </p:nvSpPr>
-        <p:spPr>
-          <a:xfrm>
-            <a:off x="6408638" y="4169664"/>
-            <a:ext cx="685800" cy="475488"/>
-          </a:xfrm>
-          <a:prstGeom prst="rect">
-            <a:avLst/>
-          </a:prstGeom>
-          <a:noFill/>
-          <a:ln/>
-        </p:spPr>
-        <p:txBody>
-          <a:bodyPr wrap="square" lIns="0" tIns="0" rIns="0" bIns="0" rtlCol="0" anchor="ctr"/>
-          <a:lstStyle/>
-          <a:p>
-            <a:pPr algn="ctr" indent="0" marL="0">
-              <a:buNone/>
-            </a:pPr>
-            <a:r>
-              <a:rPr lang="en-US" sz="900" b="1" dirty="0">
-                <a:solidFill>
-                  <a:srgbClr val="9D174D"/>
-                </a:solidFill>
-                <a:latin typeface="Trebuchet MS" pitchFamily="34" charset="0"/>
-                <a:ea typeface="Trebuchet MS" pitchFamily="34" charset="-122"/>
-                <a:cs typeface="Trebuchet MS" pitchFamily="34" charset="-120"/>
-              </a:rPr>
-              <a:t>ou</a:t>
-            </a:r>
-            <a:endParaRPr lang="en-US" sz="900" dirty="0"/>
-          </a:p>
-        </p:txBody>
-      </p:sp>
-      <p:sp>
-        <p:nvSpPr>
-          <p:cNvPr id="44" name="Shape 42"/>
-          <p:cNvSpPr/>
-          <p:nvPr/>
-        </p:nvSpPr>
-        <p:spPr>
-          <a:xfrm>
-            <a:off x="7447135" y="4169664"/>
-            <a:ext cx="685800" cy="475488"/>
-          </a:xfrm>
-          <a:prstGeom prst="rect">
-            <a:avLst>
-              <a:gd name="adj" fmla="val 7692"/>
-            </a:avLst>
-          </a:prstGeom>
-          <a:solidFill>
-            <a:srgbClr val="FFFFFF"/>
-          </a:solidFill>
-          <a:ln w="12700">
-            <a:solidFill>
-              <a:srgbClr val="DB2777"/>
-            </a:solidFill>
-            <a:prstDash val="solid"/>
-          </a:ln>
-        </p:spPr>
-      </p:sp>
-      <p:sp>
-        <p:nvSpPr>
-          <p:cNvPr id="45" name="Text 43"/>
-          <p:cNvSpPr/>
-          <p:nvPr/>
-        </p:nvSpPr>
-        <p:spPr>
-          <a:xfrm>
-            <a:off x="7447135" y="4169664"/>
-            <a:ext cx="685800" cy="475488"/>
+          <p:cNvPr id="44" name="Text 42"/>
+          <p:cNvSpPr/>
+          <p:nvPr/>
+        </p:nvSpPr>
+        <p:spPr>
+          <a:xfrm>
+            <a:off x="7274052" y="4169664"/>
+            <a:ext cx="685800" cy="384048"/>
           </a:xfrm>
           <a:prstGeom prst="rect">
             <a:avLst/>
@@ -28169,7 +28517,7 @@
                 <a:ea typeface="Trebuchet MS" pitchFamily="34" charset="-122"/>
                 <a:cs typeface="Trebuchet MS" pitchFamily="34" charset="-120"/>
               </a:rPr>
-              <a:t>poisonous</a:t>
+              <a:t>glorious</a:t>
             </a:r>
             <a:endParaRPr lang="en-US" sz="2800" dirty="0"/>
           </a:p>
@@ -28996,7 +29344,7 @@
                 <a:ea typeface="Trebuchet MS" pitchFamily="34" charset="-122"/>
                 <a:cs typeface="Trebuchet MS" pitchFamily="34" charset="-120"/>
               </a:rPr>
-              <a:t>poisonous</a:t>
+              <a:t>glorious</a:t>
             </a:r>
             <a:endParaRPr lang="en-US" sz="2800" dirty="0"/>
           </a:p>
@@ -29135,7 +29483,7 @@
                 <a:ea typeface="Trebuchet MS" pitchFamily="34" charset="-122"/>
                 <a:cs typeface="Trebuchet MS" pitchFamily="34" charset="-120"/>
               </a:rPr>
-              <a:t>poison</a:t>
+              <a:t>glory</a:t>
             </a:r>
             <a:endParaRPr lang="en-US" sz="1300" dirty="0"/>
           </a:p>
@@ -29174,7 +29522,7 @@
                 <a:ea typeface="Calibri" pitchFamily="34" charset="-122"/>
                 <a:cs typeface="Calibri" pitchFamily="34" charset="-120"/>
               </a:rPr>
-              <a:t>a substance that causes harm</a:t>
+              <a:t>great beauty or magnificence</a:t>
             </a:r>
             <a:endParaRPr lang="en-US" sz="850" dirty="0"/>
           </a:p>
@@ -29182,7 +29530,46 @@
       </p:sp>
       <p:sp>
         <p:nvSpPr>
-          <p:cNvPr id="19" name="Shape 17"/>
+          <p:cNvPr id="19" name="Text 17"/>
+          <p:cNvSpPr/>
+          <p:nvPr/>
+        </p:nvSpPr>
+        <p:spPr>
+          <a:xfrm>
+            <a:off x="2938272" y="2752344"/>
+            <a:ext cx="1828800" cy="182880"/>
+          </a:xfrm>
+          <a:prstGeom prst="rect">
+            <a:avLst/>
+          </a:prstGeom>
+          <a:noFill/>
+          <a:ln/>
+        </p:spPr>
+        <p:txBody>
+          <a:bodyPr wrap="square" lIns="0" tIns="0" rIns="0" bIns="0" rtlCol="0" anchor="t"/>
+          <a:lstStyle/>
+          <a:p>
+            <a:pPr algn="ctr" indent="0" marL="0">
+              <a:buNone/>
+            </a:pPr>
+            <a:r>
+              <a:rPr lang="en-US" sz="700" i="1" dirty="0">
+                <a:solidFill>
+                  <a:srgbClr val="94A3B8"/>
+                </a:solidFill>
+                <a:latin typeface="Calibri" pitchFamily="34" charset="0"/>
+                <a:ea typeface="Calibri" pitchFamily="34" charset="-122"/>
+                <a:cs typeface="Calibri" pitchFamily="34" charset="-120"/>
+              </a:rPr>
+              <a:t>'y' changes to 'i' before suffix</a:t>
+            </a:r>
+            <a:endParaRPr lang="en-US" sz="700" dirty="0"/>
+          </a:p>
+        </p:txBody>
+      </p:sp>
+      <p:sp>
+        <p:nvSpPr>
+          <p:cNvPr id="20" name="Shape 18"/>
           <p:cNvSpPr/>
           <p:nvPr/>
         </p:nvSpPr>
@@ -29216,7 +29603,7 @@
       </p:sp>
       <p:sp>
         <p:nvSpPr>
-          <p:cNvPr id="20" name="Text 18"/>
+          <p:cNvPr id="21" name="Text 19"/>
           <p:cNvSpPr/>
           <p:nvPr/>
         </p:nvSpPr>
@@ -29255,7 +29642,7 @@
       </p:sp>
       <p:sp>
         <p:nvSpPr>
-          <p:cNvPr id="21" name="Text 19"/>
+          <p:cNvPr id="22" name="Text 20"/>
           <p:cNvSpPr/>
           <p:nvPr/>
         </p:nvSpPr>
@@ -29286,7 +29673,7 @@
                 <a:ea typeface="Calibri" pitchFamily="34" charset="-122"/>
                 <a:cs typeface="Calibri" pitchFamily="34" charset="-120"/>
               </a:rPr>
-              <a:t>full of, having quality</a:t>
+              <a:t>full of, having the quality of</a:t>
             </a:r>
             <a:endParaRPr lang="en-US" sz="850" dirty="0"/>
           </a:p>
@@ -29294,7 +29681,7 @@
       </p:sp>
       <p:sp>
         <p:nvSpPr>
-          <p:cNvPr id="22" name="Shape 20"/>
+          <p:cNvPr id="23" name="Shape 21"/>
           <p:cNvSpPr/>
           <p:nvPr/>
         </p:nvSpPr>
@@ -29321,7 +29708,7 @@
       </p:sp>
       <p:sp>
         <p:nvSpPr>
-          <p:cNvPr id="23" name="Text 21"/>
+          <p:cNvPr id="24" name="Text 22"/>
           <p:cNvSpPr/>
           <p:nvPr/>
         </p:nvSpPr>
@@ -29360,7 +29747,7 @@
       </p:sp>
       <p:sp>
         <p:nvSpPr>
-          <p:cNvPr id="24" name="Shape 22"/>
+          <p:cNvPr id="25" name="Shape 23"/>
           <p:cNvSpPr/>
           <p:nvPr/>
         </p:nvSpPr>
@@ -29387,7 +29774,7 @@
       </p:sp>
       <p:sp>
         <p:nvSpPr>
-          <p:cNvPr id="25" name="Text 23"/>
+          <p:cNvPr id="26" name="Text 24"/>
           <p:cNvSpPr/>
           <p:nvPr/>
         </p:nvSpPr>
@@ -29426,7 +29813,7 @@
       </p:sp>
       <p:sp>
         <p:nvSpPr>
-          <p:cNvPr id="26" name="Shape 24"/>
+          <p:cNvPr id="27" name="Shape 25"/>
           <p:cNvSpPr/>
           <p:nvPr/>
         </p:nvSpPr>
@@ -29453,7 +29840,7 @@
       </p:sp>
       <p:sp>
         <p:nvSpPr>
-          <p:cNvPr id="27" name="Text 25"/>
+          <p:cNvPr id="28" name="Text 26"/>
           <p:cNvSpPr/>
           <p:nvPr/>
         </p:nvSpPr>
@@ -29492,7 +29879,7 @@
       </p:sp>
       <p:sp>
         <p:nvSpPr>
-          <p:cNvPr id="28" name="Shape 26"/>
+          <p:cNvPr id="29" name="Shape 27"/>
           <p:cNvSpPr/>
           <p:nvPr/>
         </p:nvSpPr>
@@ -29519,7 +29906,7 @@
       </p:sp>
       <p:sp>
         <p:nvSpPr>
-          <p:cNvPr id="29" name="Text 27"/>
+          <p:cNvPr id="30" name="Text 28"/>
           <p:cNvSpPr/>
           <p:nvPr/>
         </p:nvSpPr>
@@ -29981,7 +30368,7 @@
                 <a:ea typeface="Trebuchet MS" pitchFamily="34" charset="-122"/>
                 <a:cs typeface="Trebuchet MS" pitchFamily="34" charset="-120"/>
               </a:rPr>
-              <a:t>poisonous</a:t>
+              <a:t>glorious</a:t>
             </a:r>
             <a:endParaRPr lang="en-US" sz="2800" dirty="0"/>
           </a:p>
@@ -30120,7 +30507,7 @@
                 <a:ea typeface="Trebuchet MS" pitchFamily="34" charset="-122"/>
                 <a:cs typeface="Trebuchet MS" pitchFamily="34" charset="-120"/>
               </a:rPr>
-              <a:t>poison</a:t>
+              <a:t>glory</a:t>
             </a:r>
             <a:endParaRPr lang="en-US" sz="1300" dirty="0"/>
           </a:p>
@@ -30159,7 +30546,7 @@
                 <a:ea typeface="Calibri" pitchFamily="34" charset="-122"/>
                 <a:cs typeface="Calibri" pitchFamily="34" charset="-120"/>
               </a:rPr>
-              <a:t>a substance that causes harm</a:t>
+              <a:t>great beauty or magnificence</a:t>
             </a:r>
             <a:endParaRPr lang="en-US" sz="850" dirty="0"/>
           </a:p>
@@ -30167,7 +30554,46 @@
       </p:sp>
       <p:sp>
         <p:nvSpPr>
-          <p:cNvPr id="19" name="Shape 17"/>
+          <p:cNvPr id="19" name="Text 17"/>
+          <p:cNvSpPr/>
+          <p:nvPr/>
+        </p:nvSpPr>
+        <p:spPr>
+          <a:xfrm>
+            <a:off x="2938272" y="2752344"/>
+            <a:ext cx="1828800" cy="182880"/>
+          </a:xfrm>
+          <a:prstGeom prst="rect">
+            <a:avLst/>
+          </a:prstGeom>
+          <a:noFill/>
+          <a:ln/>
+        </p:spPr>
+        <p:txBody>
+          <a:bodyPr wrap="square" lIns="0" tIns="0" rIns="0" bIns="0" rtlCol="0" anchor="t"/>
+          <a:lstStyle/>
+          <a:p>
+            <a:pPr algn="ctr" indent="0" marL="0">
+              <a:buNone/>
+            </a:pPr>
+            <a:r>
+              <a:rPr lang="en-US" sz="700" i="1" dirty="0">
+                <a:solidFill>
+                  <a:srgbClr val="94A3B8"/>
+                </a:solidFill>
+                <a:latin typeface="Calibri" pitchFamily="34" charset="0"/>
+                <a:ea typeface="Calibri" pitchFamily="34" charset="-122"/>
+                <a:cs typeface="Calibri" pitchFamily="34" charset="-120"/>
+              </a:rPr>
+              <a:t>'y' changes to 'i' before suffix</a:t>
+            </a:r>
+            <a:endParaRPr lang="en-US" sz="700" dirty="0"/>
+          </a:p>
+        </p:txBody>
+      </p:sp>
+      <p:sp>
+        <p:nvSpPr>
+          <p:cNvPr id="20" name="Shape 18"/>
           <p:cNvSpPr/>
           <p:nvPr/>
         </p:nvSpPr>
@@ -30201,7 +30627,7 @@
       </p:sp>
       <p:sp>
         <p:nvSpPr>
-          <p:cNvPr id="20" name="Text 18"/>
+          <p:cNvPr id="21" name="Text 19"/>
           <p:cNvSpPr/>
           <p:nvPr/>
         </p:nvSpPr>
@@ -30240,7 +30666,7 @@
       </p:sp>
       <p:sp>
         <p:nvSpPr>
-          <p:cNvPr id="21" name="Text 19"/>
+          <p:cNvPr id="22" name="Text 20"/>
           <p:cNvSpPr/>
           <p:nvPr/>
         </p:nvSpPr>
@@ -30271,7 +30697,7 @@
                 <a:ea typeface="Calibri" pitchFamily="34" charset="-122"/>
                 <a:cs typeface="Calibri" pitchFamily="34" charset="-120"/>
               </a:rPr>
-              <a:t>full of, having quality</a:t>
+              <a:t>full of, having the quality of</a:t>
             </a:r>
             <a:endParaRPr lang="en-US" sz="850" dirty="0"/>
           </a:p>
@@ -30279,7 +30705,7 @@
       </p:sp>
       <p:sp>
         <p:nvSpPr>
-          <p:cNvPr id="22" name="Shape 20"/>
+          <p:cNvPr id="23" name="Shape 21"/>
           <p:cNvSpPr/>
           <p:nvPr/>
         </p:nvSpPr>
@@ -30306,7 +30732,7 @@
       </p:sp>
       <p:sp>
         <p:nvSpPr>
-          <p:cNvPr id="23" name="Text 21"/>
+          <p:cNvPr id="24" name="Text 22"/>
           <p:cNvSpPr/>
           <p:nvPr/>
         </p:nvSpPr>
@@ -30345,7 +30771,7 @@
       </p:sp>
       <p:sp>
         <p:nvSpPr>
-          <p:cNvPr id="24" name="Shape 22"/>
+          <p:cNvPr id="25" name="Shape 23"/>
           <p:cNvSpPr/>
           <p:nvPr/>
         </p:nvSpPr>
@@ -30372,7 +30798,7 @@
       </p:sp>
       <p:sp>
         <p:nvSpPr>
-          <p:cNvPr id="25" name="Shape 23"/>
+          <p:cNvPr id="26" name="Shape 24"/>
           <p:cNvSpPr/>
           <p:nvPr/>
         </p:nvSpPr>
@@ -30399,7 +30825,7 @@
       </p:sp>
       <p:sp>
         <p:nvSpPr>
-          <p:cNvPr id="26" name="Text 24"/>
+          <p:cNvPr id="27" name="Text 25"/>
           <p:cNvSpPr/>
           <p:nvPr/>
         </p:nvSpPr>
@@ -30430,7 +30856,7 @@
                 <a:ea typeface="Trebuchet MS" pitchFamily="34" charset="-122"/>
                 <a:cs typeface="Trebuchet MS" pitchFamily="34" charset="-120"/>
               </a:rPr>
-              <a:t>poi</a:t>
+              <a:t>glo</a:t>
             </a:r>
             <a:endParaRPr lang="en-US" sz="1400" dirty="0"/>
           </a:p>
@@ -30438,7 +30864,7 @@
       </p:sp>
       <p:sp>
         <p:nvSpPr>
-          <p:cNvPr id="27" name="Text 25"/>
+          <p:cNvPr id="28" name="Text 26"/>
           <p:cNvSpPr/>
           <p:nvPr/>
         </p:nvSpPr>
@@ -30477,7 +30903,7 @@
       </p:sp>
       <p:sp>
         <p:nvSpPr>
-          <p:cNvPr id="28" name="Shape 26"/>
+          <p:cNvPr id="29" name="Shape 27"/>
           <p:cNvSpPr/>
           <p:nvPr/>
         </p:nvSpPr>
@@ -30504,7 +30930,7 @@
       </p:sp>
       <p:sp>
         <p:nvSpPr>
-          <p:cNvPr id="29" name="Text 27"/>
+          <p:cNvPr id="30" name="Text 28"/>
           <p:cNvSpPr/>
           <p:nvPr/>
         </p:nvSpPr>
@@ -30535,7 +30961,7 @@
                 <a:ea typeface="Trebuchet MS" pitchFamily="34" charset="-122"/>
                 <a:cs typeface="Trebuchet MS" pitchFamily="34" charset="-120"/>
               </a:rPr>
-              <a:t>son</a:t>
+              <a:t>ri</a:t>
             </a:r>
             <a:endParaRPr lang="en-US" sz="1400" dirty="0"/>
           </a:p>
@@ -30543,7 +30969,7 @@
       </p:sp>
       <p:sp>
         <p:nvSpPr>
-          <p:cNvPr id="30" name="Text 28"/>
+          <p:cNvPr id="31" name="Text 29"/>
           <p:cNvSpPr/>
           <p:nvPr/>
         </p:nvSpPr>
@@ -30582,7 +31008,7 @@
       </p:sp>
       <p:sp>
         <p:nvSpPr>
-          <p:cNvPr id="31" name="Shape 29"/>
+          <p:cNvPr id="32" name="Shape 30"/>
           <p:cNvSpPr/>
           <p:nvPr/>
         </p:nvSpPr>
@@ -30609,7 +31035,7 @@
       </p:sp>
       <p:sp>
         <p:nvSpPr>
-          <p:cNvPr id="32" name="Text 30"/>
+          <p:cNvPr id="33" name="Text 31"/>
           <p:cNvSpPr/>
           <p:nvPr/>
         </p:nvSpPr>
@@ -30648,7 +31074,7 @@
       </p:sp>
       <p:sp>
         <p:nvSpPr>
-          <p:cNvPr id="33" name="Shape 31"/>
+          <p:cNvPr id="34" name="Shape 32"/>
           <p:cNvSpPr/>
           <p:nvPr/>
         </p:nvSpPr>
@@ -30675,7 +31101,7 @@
       </p:sp>
       <p:sp>
         <p:nvSpPr>
-          <p:cNvPr id="34" name="Text 32"/>
+          <p:cNvPr id="35" name="Text 33"/>
           <p:cNvSpPr/>
           <p:nvPr/>
         </p:nvSpPr>
@@ -30714,7 +31140,7 @@
       </p:sp>
       <p:sp>
         <p:nvSpPr>
-          <p:cNvPr id="35" name="Shape 33"/>
+          <p:cNvPr id="36" name="Shape 34"/>
           <p:cNvSpPr/>
           <p:nvPr/>
         </p:nvSpPr>
@@ -30741,7 +31167,7 @@
       </p:sp>
       <p:sp>
         <p:nvSpPr>
-          <p:cNvPr id="36" name="Text 34"/>
+          <p:cNvPr id="37" name="Text 35"/>
           <p:cNvSpPr/>
           <p:nvPr/>
         </p:nvSpPr>
@@ -31203,7 +31629,7 @@
                 <a:ea typeface="Trebuchet MS" pitchFamily="34" charset="-122"/>
                 <a:cs typeface="Trebuchet MS" pitchFamily="34" charset="-120"/>
               </a:rPr>
-              <a:t>poisonous</a:t>
+              <a:t>glorious</a:t>
             </a:r>
             <a:endParaRPr lang="en-US" sz="2800" dirty="0"/>
           </a:p>
@@ -31342,7 +31768,7 @@
                 <a:ea typeface="Trebuchet MS" pitchFamily="34" charset="-122"/>
                 <a:cs typeface="Trebuchet MS" pitchFamily="34" charset="-120"/>
               </a:rPr>
-              <a:t>poison</a:t>
+              <a:t>glory</a:t>
             </a:r>
             <a:endParaRPr lang="en-US" sz="1300" dirty="0"/>
           </a:p>
@@ -31381,7 +31807,7 @@
                 <a:ea typeface="Calibri" pitchFamily="34" charset="-122"/>
                 <a:cs typeface="Calibri" pitchFamily="34" charset="-120"/>
               </a:rPr>
-              <a:t>a substance that causes harm</a:t>
+              <a:t>great beauty or magnificence</a:t>
             </a:r>
             <a:endParaRPr lang="en-US" sz="850" dirty="0"/>
           </a:p>
@@ -31389,7 +31815,46 @@
       </p:sp>
       <p:sp>
         <p:nvSpPr>
-          <p:cNvPr id="19" name="Shape 17"/>
+          <p:cNvPr id="19" name="Text 17"/>
+          <p:cNvSpPr/>
+          <p:nvPr/>
+        </p:nvSpPr>
+        <p:spPr>
+          <a:xfrm>
+            <a:off x="2938272" y="2752344"/>
+            <a:ext cx="1828800" cy="182880"/>
+          </a:xfrm>
+          <a:prstGeom prst="rect">
+            <a:avLst/>
+          </a:prstGeom>
+          <a:noFill/>
+          <a:ln/>
+        </p:spPr>
+        <p:txBody>
+          <a:bodyPr wrap="square" lIns="0" tIns="0" rIns="0" bIns="0" rtlCol="0" anchor="t"/>
+          <a:lstStyle/>
+          <a:p>
+            <a:pPr algn="ctr" indent="0" marL="0">
+              <a:buNone/>
+            </a:pPr>
+            <a:r>
+              <a:rPr lang="en-US" sz="700" i="1" dirty="0">
+                <a:solidFill>
+                  <a:srgbClr val="94A3B8"/>
+                </a:solidFill>
+                <a:latin typeface="Calibri" pitchFamily="34" charset="0"/>
+                <a:ea typeface="Calibri" pitchFamily="34" charset="-122"/>
+                <a:cs typeface="Calibri" pitchFamily="34" charset="-120"/>
+              </a:rPr>
+              <a:t>'y' changes to 'i' before suffix</a:t>
+            </a:r>
+            <a:endParaRPr lang="en-US" sz="700" dirty="0"/>
+          </a:p>
+        </p:txBody>
+      </p:sp>
+      <p:sp>
+        <p:nvSpPr>
+          <p:cNvPr id="20" name="Shape 18"/>
           <p:cNvSpPr/>
           <p:nvPr/>
         </p:nvSpPr>
@@ -31423,7 +31888,7 @@
       </p:sp>
       <p:sp>
         <p:nvSpPr>
-          <p:cNvPr id="20" name="Text 18"/>
+          <p:cNvPr id="21" name="Text 19"/>
           <p:cNvSpPr/>
           <p:nvPr/>
         </p:nvSpPr>
@@ -31462,7 +31927,7 @@
       </p:sp>
       <p:sp>
         <p:nvSpPr>
-          <p:cNvPr id="21" name="Text 19"/>
+          <p:cNvPr id="22" name="Text 20"/>
           <p:cNvSpPr/>
           <p:nvPr/>
         </p:nvSpPr>
@@ -31493,7 +31958,7 @@
                 <a:ea typeface="Calibri" pitchFamily="34" charset="-122"/>
                 <a:cs typeface="Calibri" pitchFamily="34" charset="-120"/>
               </a:rPr>
-              <a:t>full of, having quality</a:t>
+              <a:t>full of, having the quality of</a:t>
             </a:r>
             <a:endParaRPr lang="en-US" sz="850" dirty="0"/>
           </a:p>
@@ -31501,7 +31966,7 @@
       </p:sp>
       <p:sp>
         <p:nvSpPr>
-          <p:cNvPr id="22" name="Shape 20"/>
+          <p:cNvPr id="23" name="Shape 21"/>
           <p:cNvSpPr/>
           <p:nvPr/>
         </p:nvSpPr>
@@ -31528,7 +31993,7 @@
       </p:sp>
       <p:sp>
         <p:nvSpPr>
-          <p:cNvPr id="23" name="Text 21"/>
+          <p:cNvPr id="24" name="Text 22"/>
           <p:cNvSpPr/>
           <p:nvPr/>
         </p:nvSpPr>
@@ -31567,7 +32032,7 @@
       </p:sp>
       <p:sp>
         <p:nvSpPr>
-          <p:cNvPr id="24" name="Shape 22"/>
+          <p:cNvPr id="25" name="Shape 23"/>
           <p:cNvSpPr/>
           <p:nvPr/>
         </p:nvSpPr>
@@ -31594,7 +32059,7 @@
       </p:sp>
       <p:sp>
         <p:nvSpPr>
-          <p:cNvPr id="25" name="Shape 23"/>
+          <p:cNvPr id="26" name="Shape 24"/>
           <p:cNvSpPr/>
           <p:nvPr/>
         </p:nvSpPr>
@@ -31621,7 +32086,7 @@
       </p:sp>
       <p:sp>
         <p:nvSpPr>
-          <p:cNvPr id="26" name="Text 24"/>
+          <p:cNvPr id="27" name="Text 25"/>
           <p:cNvSpPr/>
           <p:nvPr/>
         </p:nvSpPr>
@@ -31652,7 +32117,7 @@
                 <a:ea typeface="Trebuchet MS" pitchFamily="34" charset="-122"/>
                 <a:cs typeface="Trebuchet MS" pitchFamily="34" charset="-120"/>
               </a:rPr>
-              <a:t>poi</a:t>
+              <a:t>glo</a:t>
             </a:r>
             <a:endParaRPr lang="en-US" sz="1400" dirty="0"/>
           </a:p>
@@ -31660,7 +32125,7 @@
       </p:sp>
       <p:sp>
         <p:nvSpPr>
-          <p:cNvPr id="27" name="Text 25"/>
+          <p:cNvPr id="28" name="Text 26"/>
           <p:cNvSpPr/>
           <p:nvPr/>
         </p:nvSpPr>
@@ -31699,7 +32164,7 @@
       </p:sp>
       <p:sp>
         <p:nvSpPr>
-          <p:cNvPr id="28" name="Shape 26"/>
+          <p:cNvPr id="29" name="Shape 27"/>
           <p:cNvSpPr/>
           <p:nvPr/>
         </p:nvSpPr>
@@ -31726,7 +32191,7 @@
       </p:sp>
       <p:sp>
         <p:nvSpPr>
-          <p:cNvPr id="29" name="Text 27"/>
+          <p:cNvPr id="30" name="Text 28"/>
           <p:cNvSpPr/>
           <p:nvPr/>
         </p:nvSpPr>
@@ -31757,7 +32222,7 @@
                 <a:ea typeface="Trebuchet MS" pitchFamily="34" charset="-122"/>
                 <a:cs typeface="Trebuchet MS" pitchFamily="34" charset="-120"/>
               </a:rPr>
-              <a:t>son</a:t>
+              <a:t>ri</a:t>
             </a:r>
             <a:endParaRPr lang="en-US" sz="1400" dirty="0"/>
           </a:p>
@@ -31765,7 +32230,7 @@
       </p:sp>
       <p:sp>
         <p:nvSpPr>
-          <p:cNvPr id="30" name="Text 28"/>
+          <p:cNvPr id="31" name="Text 29"/>
           <p:cNvSpPr/>
           <p:nvPr/>
         </p:nvSpPr>
@@ -31804,7 +32269,7 @@
       </p:sp>
       <p:sp>
         <p:nvSpPr>
-          <p:cNvPr id="31" name="Shape 29"/>
+          <p:cNvPr id="32" name="Shape 30"/>
           <p:cNvSpPr/>
           <p:nvPr/>
         </p:nvSpPr>
@@ -31831,7 +32296,7 @@
       </p:sp>
       <p:sp>
         <p:nvSpPr>
-          <p:cNvPr id="32" name="Text 30"/>
+          <p:cNvPr id="33" name="Text 31"/>
           <p:cNvSpPr/>
           <p:nvPr/>
         </p:nvSpPr>
@@ -31870,7 +32335,7 @@
       </p:sp>
       <p:sp>
         <p:nvSpPr>
-          <p:cNvPr id="33" name="Shape 31"/>
+          <p:cNvPr id="34" name="Shape 32"/>
           <p:cNvSpPr/>
           <p:nvPr/>
         </p:nvSpPr>
@@ -31897,7 +32362,7 @@
       </p:sp>
       <p:sp>
         <p:nvSpPr>
-          <p:cNvPr id="34" name="Text 32"/>
+          <p:cNvPr id="35" name="Text 33"/>
           <p:cNvSpPr/>
           <p:nvPr/>
         </p:nvSpPr>
@@ -31936,18 +32401,18 @@
       </p:sp>
       <p:sp>
         <p:nvSpPr>
-          <p:cNvPr id="35" name="Shape 33"/>
+          <p:cNvPr id="36" name="Shape 34"/>
           <p:cNvSpPr/>
           <p:nvPr/>
         </p:nvSpPr>
         <p:spPr>
           <a:xfrm>
             <a:off x="1874520" y="4096512"/>
-            <a:ext cx="6903720" cy="658368"/>
+            <a:ext cx="6903720" cy="804672"/>
           </a:xfrm>
           <a:prstGeom prst="rect">
             <a:avLst>
-              <a:gd name="adj" fmla="val 8333"/>
+              <a:gd name="adj" fmla="val 6818"/>
             </a:avLst>
           </a:prstGeom>
           <a:solidFill>
@@ -31963,18 +32428,18 @@
       </p:sp>
       <p:sp>
         <p:nvSpPr>
-          <p:cNvPr id="36" name="Shape 34"/>
+          <p:cNvPr id="37" name="Shape 35"/>
           <p:cNvSpPr/>
           <p:nvPr/>
         </p:nvSpPr>
         <p:spPr>
           <a:xfrm>
             <a:off x="2124837" y="4169664"/>
-            <a:ext cx="685800" cy="475488"/>
+            <a:ext cx="685800" cy="384048"/>
           </a:xfrm>
           <a:prstGeom prst="rect">
             <a:avLst>
-              <a:gd name="adj" fmla="val 7692"/>
+              <a:gd name="adj" fmla="val 9524"/>
             </a:avLst>
           </a:prstGeom>
           <a:solidFill>
@@ -31990,14 +32455,14 @@
       </p:sp>
       <p:sp>
         <p:nvSpPr>
-          <p:cNvPr id="37" name="Text 35"/>
+          <p:cNvPr id="38" name="Text 36"/>
           <p:cNvSpPr/>
           <p:nvPr/>
         </p:nvSpPr>
         <p:spPr>
           <a:xfrm>
             <a:off x="2124837" y="4169664"/>
-            <a:ext cx="685800" cy="475488"/>
+            <a:ext cx="685800" cy="384048"/>
           </a:xfrm>
           <a:prstGeom prst="rect">
             <a:avLst/>
@@ -32021,7 +32486,7 @@
                 <a:ea typeface="Trebuchet MS" pitchFamily="34" charset="-122"/>
                 <a:cs typeface="Trebuchet MS" pitchFamily="34" charset="-120"/>
               </a:rPr>
-              <a:t>p</a:t>
+              <a:t>g</a:t>
             </a:r>
             <a:endParaRPr lang="en-US" sz="900" dirty="0"/>
           </a:p>
@@ -32029,18 +32494,18 @@
       </p:sp>
       <p:sp>
         <p:nvSpPr>
-          <p:cNvPr id="38" name="Shape 36"/>
+          <p:cNvPr id="39" name="Shape 37"/>
           <p:cNvSpPr/>
           <p:nvPr/>
         </p:nvSpPr>
         <p:spPr>
           <a:xfrm>
             <a:off x="3033522" y="4169664"/>
-            <a:ext cx="685800" cy="475488"/>
+            <a:ext cx="685800" cy="384048"/>
           </a:xfrm>
           <a:prstGeom prst="rect">
             <a:avLst>
-              <a:gd name="adj" fmla="val 7692"/>
+              <a:gd name="adj" fmla="val 9524"/>
             </a:avLst>
           </a:prstGeom>
           <a:solidFill>
@@ -32056,14 +32521,14 @@
       </p:sp>
       <p:sp>
         <p:nvSpPr>
-          <p:cNvPr id="39" name="Text 37"/>
+          <p:cNvPr id="40" name="Text 38"/>
           <p:cNvSpPr/>
           <p:nvPr/>
         </p:nvSpPr>
         <p:spPr>
           <a:xfrm>
             <a:off x="3033522" y="4169664"/>
-            <a:ext cx="685800" cy="475488"/>
+            <a:ext cx="685800" cy="384048"/>
           </a:xfrm>
           <a:prstGeom prst="rect">
             <a:avLst/>
@@ -32087,7 +32552,7 @@
                 <a:ea typeface="Trebuchet MS" pitchFamily="34" charset="-122"/>
                 <a:cs typeface="Trebuchet MS" pitchFamily="34" charset="-120"/>
               </a:rPr>
-              <a:t>oi</a:t>
+              <a:t>l</a:t>
             </a:r>
             <a:endParaRPr lang="en-US" sz="900" dirty="0"/>
           </a:p>
@@ -32095,18 +32560,18 @@
       </p:sp>
       <p:sp>
         <p:nvSpPr>
-          <p:cNvPr id="40" name="Shape 38"/>
+          <p:cNvPr id="41" name="Shape 39"/>
           <p:cNvSpPr/>
           <p:nvPr/>
         </p:nvSpPr>
         <p:spPr>
           <a:xfrm>
             <a:off x="3942207" y="4169664"/>
-            <a:ext cx="685800" cy="475488"/>
+            <a:ext cx="685800" cy="384048"/>
           </a:xfrm>
           <a:prstGeom prst="rect">
             <a:avLst>
-              <a:gd name="adj" fmla="val 7692"/>
+              <a:gd name="adj" fmla="val 9524"/>
             </a:avLst>
           </a:prstGeom>
           <a:solidFill>
@@ -32122,14 +32587,14 @@
       </p:sp>
       <p:sp>
         <p:nvSpPr>
-          <p:cNvPr id="41" name="Text 39"/>
+          <p:cNvPr id="42" name="Text 40"/>
           <p:cNvSpPr/>
           <p:nvPr/>
         </p:nvSpPr>
         <p:spPr>
           <a:xfrm>
             <a:off x="3942207" y="4169664"/>
-            <a:ext cx="685800" cy="475488"/>
+            <a:ext cx="685800" cy="384048"/>
           </a:xfrm>
           <a:prstGeom prst="rect">
             <a:avLst/>
@@ -32153,7 +32618,7 @@
                 <a:ea typeface="Trebuchet MS" pitchFamily="34" charset="-122"/>
                 <a:cs typeface="Trebuchet MS" pitchFamily="34" charset="-120"/>
               </a:rPr>
-              <a:t>s</a:t>
+              <a:t>o</a:t>
             </a:r>
             <a:endParaRPr lang="en-US" sz="900" dirty="0"/>
           </a:p>
@@ -32161,18 +32626,18 @@
       </p:sp>
       <p:sp>
         <p:nvSpPr>
-          <p:cNvPr id="42" name="Shape 40"/>
+          <p:cNvPr id="43" name="Shape 41"/>
           <p:cNvSpPr/>
           <p:nvPr/>
         </p:nvSpPr>
         <p:spPr>
           <a:xfrm>
             <a:off x="4850892" y="4169664"/>
-            <a:ext cx="685800" cy="475488"/>
+            <a:ext cx="685800" cy="384048"/>
           </a:xfrm>
           <a:prstGeom prst="rect">
             <a:avLst>
-              <a:gd name="adj" fmla="val 7692"/>
+              <a:gd name="adj" fmla="val 9524"/>
             </a:avLst>
           </a:prstGeom>
           <a:solidFill>
@@ -32188,14 +32653,14 @@
       </p:sp>
       <p:sp>
         <p:nvSpPr>
-          <p:cNvPr id="43" name="Text 41"/>
+          <p:cNvPr id="44" name="Text 42"/>
           <p:cNvSpPr/>
           <p:nvPr/>
         </p:nvSpPr>
         <p:spPr>
           <a:xfrm>
             <a:off x="4850892" y="4169664"/>
-            <a:ext cx="685800" cy="475488"/>
+            <a:ext cx="685800" cy="384048"/>
           </a:xfrm>
           <a:prstGeom prst="rect">
             <a:avLst/>
@@ -32219,7 +32684,7 @@
                 <a:ea typeface="Trebuchet MS" pitchFamily="34" charset="-122"/>
                 <a:cs typeface="Trebuchet MS" pitchFamily="34" charset="-120"/>
               </a:rPr>
-              <a:t>o</a:t>
+              <a:t>r</a:t>
             </a:r>
             <a:endParaRPr lang="en-US" sz="900" dirty="0"/>
           </a:p>
@@ -32227,18 +32692,18 @@
       </p:sp>
       <p:sp>
         <p:nvSpPr>
-          <p:cNvPr id="44" name="Shape 42"/>
+          <p:cNvPr id="45" name="Shape 43"/>
           <p:cNvSpPr/>
           <p:nvPr/>
         </p:nvSpPr>
         <p:spPr>
           <a:xfrm>
             <a:off x="5759577" y="4169664"/>
-            <a:ext cx="685800" cy="475488"/>
+            <a:ext cx="685800" cy="384048"/>
           </a:xfrm>
           <a:prstGeom prst="rect">
             <a:avLst>
-              <a:gd name="adj" fmla="val 7692"/>
+              <a:gd name="adj" fmla="val 9524"/>
             </a:avLst>
           </a:prstGeom>
           <a:solidFill>
@@ -32254,14 +32719,14 @@
       </p:sp>
       <p:sp>
         <p:nvSpPr>
-          <p:cNvPr id="45" name="Text 43"/>
+          <p:cNvPr id="46" name="Text 44"/>
           <p:cNvSpPr/>
           <p:nvPr/>
         </p:nvSpPr>
         <p:spPr>
           <a:xfrm>
             <a:off x="5759577" y="4169664"/>
-            <a:ext cx="685800" cy="475488"/>
+            <a:ext cx="685800" cy="384048"/>
           </a:xfrm>
           <a:prstGeom prst="rect">
             <a:avLst/>
@@ -32285,7 +32750,7 @@
                 <a:ea typeface="Trebuchet MS" pitchFamily="34" charset="-122"/>
                 <a:cs typeface="Trebuchet MS" pitchFamily="34" charset="-120"/>
               </a:rPr>
-              <a:t>n</a:t>
+              <a:t>i</a:t>
             </a:r>
             <a:endParaRPr lang="en-US" sz="900" dirty="0"/>
           </a:p>
@@ -32293,18 +32758,18 @@
       </p:sp>
       <p:sp>
         <p:nvSpPr>
-          <p:cNvPr id="46" name="Shape 44"/>
+          <p:cNvPr id="47" name="Shape 45"/>
           <p:cNvSpPr/>
           <p:nvPr/>
         </p:nvSpPr>
         <p:spPr>
           <a:xfrm>
             <a:off x="6668262" y="4169664"/>
-            <a:ext cx="685800" cy="475488"/>
+            <a:ext cx="685800" cy="384048"/>
           </a:xfrm>
           <a:prstGeom prst="rect">
             <a:avLst>
-              <a:gd name="adj" fmla="val 7692"/>
+              <a:gd name="adj" fmla="val 9524"/>
             </a:avLst>
           </a:prstGeom>
           <a:solidFill>
@@ -32320,14 +32785,14 @@
       </p:sp>
       <p:sp>
         <p:nvSpPr>
-          <p:cNvPr id="47" name="Text 45"/>
+          <p:cNvPr id="48" name="Text 46"/>
           <p:cNvSpPr/>
           <p:nvPr/>
         </p:nvSpPr>
         <p:spPr>
           <a:xfrm>
             <a:off x="6668262" y="4169664"/>
-            <a:ext cx="685800" cy="475488"/>
+            <a:ext cx="685800" cy="384048"/>
           </a:xfrm>
           <a:prstGeom prst="rect">
             <a:avLst/>
@@ -32359,18 +32824,57 @@
       </p:sp>
       <p:sp>
         <p:nvSpPr>
-          <p:cNvPr id="48" name="Shape 46"/>
+          <p:cNvPr id="49" name="Text 47"/>
+          <p:cNvSpPr/>
+          <p:nvPr/>
+        </p:nvSpPr>
+        <p:spPr>
+          <a:xfrm>
+            <a:off x="6668262" y="4572000"/>
+            <a:ext cx="685800" cy="219456"/>
+          </a:xfrm>
+          <a:prstGeom prst="rect">
+            <a:avLst/>
+          </a:prstGeom>
+          <a:noFill/>
+          <a:ln/>
+        </p:spPr>
+        <p:txBody>
+          <a:bodyPr wrap="square" lIns="0" tIns="0" rIns="0" bIns="0" rtlCol="0" anchor="t"/>
+          <a:lstStyle/>
+          <a:p>
+            <a:pPr algn="ctr" indent="0" marL="0">
+              <a:buNone/>
+            </a:pPr>
+            <a:r>
+              <a:rPr lang="en-US" sz="750" i="1" dirty="0">
+                <a:solidFill>
+                  <a:srgbClr val="94A3B8"/>
+                </a:solidFill>
+                <a:latin typeface="Calibri" pitchFamily="34" charset="0"/>
+                <a:ea typeface="Calibri" pitchFamily="34" charset="-122"/>
+                <a:cs typeface="Calibri" pitchFamily="34" charset="-120"/>
+              </a:rPr>
+              <a:t>/u/</a:t>
+            </a:r>
+            <a:endParaRPr lang="en-US" sz="750" dirty="0"/>
+          </a:p>
+        </p:txBody>
+      </p:sp>
+      <p:sp>
+        <p:nvSpPr>
+          <p:cNvPr id="50" name="Shape 48"/>
           <p:cNvSpPr/>
           <p:nvPr/>
         </p:nvSpPr>
         <p:spPr>
           <a:xfrm>
             <a:off x="7576947" y="4169664"/>
-            <a:ext cx="685800" cy="475488"/>
+            <a:ext cx="685800" cy="384048"/>
           </a:xfrm>
           <a:prstGeom prst="rect">
             <a:avLst>
-              <a:gd name="adj" fmla="val 7692"/>
+              <a:gd name="adj" fmla="val 9524"/>
             </a:avLst>
           </a:prstGeom>
           <a:solidFill>
@@ -32386,14 +32890,14 @@
       </p:sp>
       <p:sp>
         <p:nvSpPr>
-          <p:cNvPr id="49" name="Text 47"/>
+          <p:cNvPr id="51" name="Text 49"/>
           <p:cNvSpPr/>
           <p:nvPr/>
         </p:nvSpPr>
         <p:spPr>
           <a:xfrm>
             <a:off x="7576947" y="4169664"/>
-            <a:ext cx="685800" cy="475488"/>
+            <a:ext cx="685800" cy="384048"/>
           </a:xfrm>
           <a:prstGeom prst="rect">
             <a:avLst/>
@@ -34179,7 +34683,7 @@
                 <a:ea typeface="Trebuchet MS" pitchFamily="34" charset="-122"/>
                 <a:cs typeface="Trebuchet MS" pitchFamily="34" charset="-120"/>
               </a:rPr>
-              <a:t>un-</a:t>
+              <a:t>dan-</a:t>
             </a:r>
             <a:endParaRPr lang="en-US" sz="1300" dirty="0"/>
           </a:p>
@@ -34371,7 +34875,7 @@
                 <a:ea typeface="Trebuchet MS" pitchFamily="34" charset="-122"/>
                 <a:cs typeface="Trebuchet MS" pitchFamily="34" charset="-120"/>
               </a:rPr>
-              <a:t>in-</a:t>
+              <a:t>haz-</a:t>
             </a:r>
             <a:endParaRPr lang="en-US" sz="1300" dirty="0"/>
           </a:p>
@@ -34524,7 +35028,7 @@
                 <a:ea typeface="Trebuchet MS" pitchFamily="34" charset="-122"/>
                 <a:cs typeface="Trebuchet MS" pitchFamily="34" charset="-120"/>
               </a:rPr>
-              <a:t>dis-</a:t>
+              <a:t>fam-</a:t>
             </a:r>
             <a:endParaRPr lang="en-US" sz="1300" dirty="0"/>
           </a:p>
@@ -34588,7 +35092,7 @@
                 <a:ea typeface="Trebuchet MS" pitchFamily="34" charset="-122"/>
                 <a:cs typeface="Trebuchet MS" pitchFamily="34" charset="-120"/>
               </a:rPr>
-              <a:t>joy</a:t>
+              <a:t>glory</a:t>
             </a:r>
             <a:endParaRPr lang="en-US" sz="1300" dirty="0"/>
           </a:p>
@@ -34677,7 +35181,7 @@
                 <a:ea typeface="Trebuchet MS" pitchFamily="34" charset="-122"/>
                 <a:cs typeface="Trebuchet MS" pitchFamily="34" charset="-120"/>
               </a:rPr>
-              <a:t>over-</a:t>
+              <a:t>glo-</a:t>
             </a:r>
             <a:endParaRPr lang="en-US" sz="1300" dirty="0"/>
           </a:p>
@@ -34741,7 +35245,7 @@
                 <a:ea typeface="Trebuchet MS" pitchFamily="34" charset="-122"/>
                 <a:cs typeface="Trebuchet MS" pitchFamily="34" charset="-120"/>
               </a:rPr>
-              <a:t>poison</a:t>
+              <a:t>humour</a:t>
             </a:r>
             <a:endParaRPr lang="en-US" sz="1300" dirty="0"/>
           </a:p>
@@ -34830,7 +35334,7 @@
                 <a:ea typeface="Trebuchet MS" pitchFamily="34" charset="-122"/>
                 <a:cs typeface="Trebuchet MS" pitchFamily="34" charset="-120"/>
               </a:rPr>
-              <a:t>out-</a:t>
+              <a:t>env-</a:t>
             </a:r>
             <a:endParaRPr lang="en-US" sz="1300" dirty="0"/>
           </a:p>
@@ -34894,7 +35398,7 @@
                 <a:ea typeface="Trebuchet MS" pitchFamily="34" charset="-122"/>
                 <a:cs typeface="Trebuchet MS" pitchFamily="34" charset="-120"/>
               </a:rPr>
-              <a:t>wonder</a:t>
+              <a:t>poison</a:t>
             </a:r>
             <a:endParaRPr lang="en-US" sz="1300" dirty="0"/>
           </a:p>
@@ -35156,7 +35660,7 @@
                 <a:ea typeface="Trebuchet MS" pitchFamily="34" charset="-122"/>
                 <a:cs typeface="Trebuchet MS" pitchFamily="34" charset="-120"/>
               </a:rPr>
-              <a:t>joyous</a:t>
+              <a:t>glorious</a:t>
             </a:r>
             <a:endParaRPr lang="en-US" sz="1200" dirty="0"/>
           </a:p>
@@ -35222,7 +35726,7 @@
                 <a:ea typeface="Trebuchet MS" pitchFamily="34" charset="-122"/>
                 <a:cs typeface="Trebuchet MS" pitchFamily="34" charset="-120"/>
               </a:rPr>
-              <a:t>poisonous</a:t>
+              <a:t>humorous</a:t>
             </a:r>
             <a:endParaRPr lang="en-US" sz="1200" dirty="0"/>
           </a:p>
@@ -35288,7 +35792,7 @@
                 <a:ea typeface="Trebuchet MS" pitchFamily="34" charset="-122"/>
                 <a:cs typeface="Trebuchet MS" pitchFamily="34" charset="-120"/>
               </a:rPr>
-              <a:t>wondrous</a:t>
+              <a:t>poisonous</a:t>
             </a:r>
             <a:endParaRPr lang="en-US" sz="1200" dirty="0"/>
           </a:p>
@@ -35420,7 +35924,7 @@
                 <a:ea typeface="Trebuchet MS" pitchFamily="34" charset="-122"/>
                 <a:cs typeface="Trebuchet MS" pitchFamily="34" charset="-120"/>
               </a:rPr>
-              <a:t>courageous</a:t>
+              <a:t>nervous</a:t>
             </a:r>
             <a:endParaRPr lang="en-US" sz="1200" dirty="0"/>
           </a:p>
@@ -35486,7 +35990,7 @@
                 <a:ea typeface="Trebuchet MS" pitchFamily="34" charset="-122"/>
                 <a:cs typeface="Trebuchet MS" pitchFamily="34" charset="-120"/>
               </a:rPr>
-              <a:t>mysterious</a:t>
+              <a:t>courageous</a:t>
             </a:r>
             <a:endParaRPr lang="en-US" sz="1200" dirty="0"/>
           </a:p>
@@ -36674,7 +37178,7 @@
                 <a:ea typeface="Calibri" pitchFamily="34" charset="-122"/>
                 <a:cs typeface="Calibri" pitchFamily="34" charset="-120"/>
               </a:rPr>
-              <a:t>1.  The suffix '-ous' means 'full of' or 'having a quality'.</a:t>
+              <a:t>1.  The suffix '-ous' turns a noun or base into an adjective.</a:t>
             </a:r>
             <a:endParaRPr lang="en-US" sz="1300" dirty="0"/>
           </a:p>
@@ -36813,7 +37317,7 @@
                 <a:ea typeface="Calibri" pitchFamily="34" charset="-122"/>
                 <a:cs typeface="Calibri" pitchFamily="34" charset="-120"/>
               </a:rPr>
-              <a:t>2.  The suffix '-ous' turns adjectives into nouns.</a:t>
+              <a:t>2.  The suffix '-ous' always makes a word mean the opposite of the base word.</a:t>
             </a:r>
             <a:endParaRPr lang="en-US" sz="1300" dirty="0"/>
           </a:p>
@@ -37091,7 +37595,7 @@
                 <a:ea typeface="Calibri" pitchFamily="34" charset="-122"/>
                 <a:cs typeface="Calibri" pitchFamily="34" charset="-120"/>
               </a:rPr>
-              <a:t>4.  Adding '-ous' to a base word makes it an adjective.</a:t>
+              <a:t>4.  The suffix '-ous' can mean 'full of' or 'having the quality of'.</a:t>
             </a:r>
             <a:endParaRPr lang="en-US" sz="1300" dirty="0"/>
           </a:p>
@@ -37230,7 +37734,7 @@
                 <a:ea typeface="Calibri" pitchFamily="34" charset="-122"/>
                 <a:cs typeface="Calibri" pitchFamily="34" charset="-120"/>
               </a:rPr>
-              <a:t>5.  The suffix '-ous' comes from Old English.</a:t>
+              <a:t>5.  The suffix '-ous' comes from an Old English origin.</a:t>
             </a:r>
             <a:endParaRPr lang="en-US" sz="1300" dirty="0"/>
           </a:p>
@@ -38001,7 +38505,7 @@
                 <a:ea typeface="Trebuchet MS" pitchFamily="34" charset="-122"/>
                 <a:cs typeface="Trebuchet MS" pitchFamily="34" charset="-120"/>
               </a:rPr>
-              <a:t>joyous</a:t>
+              <a:t>glorious</a:t>
             </a:r>
             <a:endParaRPr lang="en-US" sz="1300" dirty="0"/>
           </a:p>
@@ -38067,7 +38571,7 @@
                 <a:ea typeface="Trebuchet MS" pitchFamily="34" charset="-122"/>
                 <a:cs typeface="Trebuchet MS" pitchFamily="34" charset="-120"/>
               </a:rPr>
-              <a:t>poisonous</a:t>
+              <a:t>humorous</a:t>
             </a:r>
             <a:endParaRPr lang="en-US" sz="1300" dirty="0"/>
           </a:p>
@@ -38133,7 +38637,7 @@
                 <a:ea typeface="Trebuchet MS" pitchFamily="34" charset="-122"/>
                 <a:cs typeface="Trebuchet MS" pitchFamily="34" charset="-120"/>
               </a:rPr>
-              <a:t>wondrous</a:t>
+              <a:t>poisonous</a:t>
             </a:r>
             <a:endParaRPr lang="en-US" sz="1300" dirty="0"/>
           </a:p>
@@ -38265,7 +38769,7 @@
                 <a:ea typeface="Trebuchet MS" pitchFamily="34" charset="-122"/>
                 <a:cs typeface="Trebuchet MS" pitchFamily="34" charset="-120"/>
               </a:rPr>
-              <a:t>courageous</a:t>
+              <a:t>nervous</a:t>
             </a:r>
             <a:endParaRPr lang="en-US" sz="1300" dirty="0"/>
           </a:p>
@@ -38858,7 +39362,7 @@
                 <a:ea typeface="Trebuchet MS" pitchFamily="34" charset="-122"/>
                 <a:cs typeface="Trebuchet MS" pitchFamily="34" charset="-120"/>
               </a:rPr>
-              <a:t>un-</a:t>
+              <a:t>dan-</a:t>
             </a:r>
             <a:endParaRPr lang="en-US" sz="1300" dirty="0"/>
           </a:p>
@@ -39050,7 +39554,7 @@
                 <a:ea typeface="Trebuchet MS" pitchFamily="34" charset="-122"/>
                 <a:cs typeface="Trebuchet MS" pitchFamily="34" charset="-120"/>
               </a:rPr>
-              <a:t>in-</a:t>
+              <a:t>haz-</a:t>
             </a:r>
             <a:endParaRPr lang="en-US" sz="1300" dirty="0"/>
           </a:p>
@@ -39203,7 +39707,7 @@
                 <a:ea typeface="Trebuchet MS" pitchFamily="34" charset="-122"/>
                 <a:cs typeface="Trebuchet MS" pitchFamily="34" charset="-120"/>
               </a:rPr>
-              <a:t>dis-</a:t>
+              <a:t>fam-</a:t>
             </a:r>
             <a:endParaRPr lang="en-US" sz="1300" dirty="0"/>
           </a:p>
@@ -39267,7 +39771,7 @@
                 <a:ea typeface="Trebuchet MS" pitchFamily="34" charset="-122"/>
                 <a:cs typeface="Trebuchet MS" pitchFamily="34" charset="-120"/>
               </a:rPr>
-              <a:t>joy</a:t>
+              <a:t>glory</a:t>
             </a:r>
             <a:endParaRPr lang="en-US" sz="1300" dirty="0"/>
           </a:p>
@@ -39356,7 +39860,7 @@
                 <a:ea typeface="Trebuchet MS" pitchFamily="34" charset="-122"/>
                 <a:cs typeface="Trebuchet MS" pitchFamily="34" charset="-120"/>
               </a:rPr>
-              <a:t>over-</a:t>
+              <a:t>glo-</a:t>
             </a:r>
             <a:endParaRPr lang="en-US" sz="1300" dirty="0"/>
           </a:p>
@@ -39420,7 +39924,7 @@
                 <a:ea typeface="Trebuchet MS" pitchFamily="34" charset="-122"/>
                 <a:cs typeface="Trebuchet MS" pitchFamily="34" charset="-120"/>
               </a:rPr>
-              <a:t>poison</a:t>
+              <a:t>humour</a:t>
             </a:r>
             <a:endParaRPr lang="en-US" sz="1300" dirty="0"/>
           </a:p>
@@ -39509,7 +40013,7 @@
                 <a:ea typeface="Trebuchet MS" pitchFamily="34" charset="-122"/>
                 <a:cs typeface="Trebuchet MS" pitchFamily="34" charset="-120"/>
               </a:rPr>
-              <a:t>out-</a:t>
+              <a:t>env-</a:t>
             </a:r>
             <a:endParaRPr lang="en-US" sz="1300" dirty="0"/>
           </a:p>
@@ -39573,7 +40077,7 @@
                 <a:ea typeface="Trebuchet MS" pitchFamily="34" charset="-122"/>
                 <a:cs typeface="Trebuchet MS" pitchFamily="34" charset="-120"/>
               </a:rPr>
-              <a:t>wonder</a:t>
+              <a:t>poison</a:t>
             </a:r>
             <a:endParaRPr lang="en-US" sz="1300" dirty="0"/>
           </a:p>
@@ -39652,7 +40156,7 @@
         <p:spPr>
           <a:xfrm>
             <a:off x="1508760" y="4178808"/>
-            <a:ext cx="822960" cy="420624"/>
+            <a:ext cx="950976" cy="420624"/>
           </a:xfrm>
           <a:prstGeom prst="rect">
             <a:avLst>
@@ -39686,7 +40190,7 @@
         <p:spPr>
           <a:xfrm>
             <a:off x="1508760" y="4178808"/>
-            <a:ext cx="822960" cy="420624"/>
+            <a:ext cx="950976" cy="420624"/>
           </a:xfrm>
           <a:prstGeom prst="rect">
             <a:avLst/>
@@ -39710,7 +40214,7 @@
                 <a:ea typeface="Trebuchet MS" pitchFamily="34" charset="-122"/>
                 <a:cs typeface="Trebuchet MS" pitchFamily="34" charset="-120"/>
               </a:rPr>
-              <a:t>un-</a:t>
+              <a:t>dan-</a:t>
             </a:r>
             <a:endParaRPr lang="en-US" sz="1300" dirty="0"/>
           </a:p>
@@ -39724,7 +40228,7 @@
         </p:nvSpPr>
         <p:spPr>
           <a:xfrm>
-            <a:off x="2359152" y="4178808"/>
+            <a:off x="2487168" y="4178808"/>
             <a:ext cx="320040" cy="420624"/>
           </a:xfrm>
           <a:prstGeom prst="rect">
@@ -39763,7 +40267,7 @@
         </p:nvSpPr>
         <p:spPr>
           <a:xfrm>
-            <a:off x="2706624" y="4178808"/>
+            <a:off x="2834640" y="4178808"/>
             <a:ext cx="1243584" cy="420624"/>
           </a:xfrm>
           <a:prstGeom prst="rect">
@@ -39797,7 +40301,7 @@
         </p:nvSpPr>
         <p:spPr>
           <a:xfrm>
-            <a:off x="2706624" y="4178808"/>
+            <a:off x="2834640" y="4178808"/>
             <a:ext cx="1243584" cy="420624"/>
           </a:xfrm>
           <a:prstGeom prst="rect">
@@ -39836,7 +40340,7 @@
         </p:nvSpPr>
         <p:spPr>
           <a:xfrm>
-            <a:off x="3977640" y="4178808"/>
+            <a:off x="4105656" y="4178808"/>
             <a:ext cx="320040" cy="420624"/>
           </a:xfrm>
           <a:prstGeom prst="rect">
@@ -39875,7 +40379,7 @@
         </p:nvSpPr>
         <p:spPr>
           <a:xfrm>
-            <a:off x="4325112" y="4178808"/>
+            <a:off x="4453128" y="4178808"/>
             <a:ext cx="950976" cy="420624"/>
           </a:xfrm>
           <a:prstGeom prst="rect">
@@ -39909,7 +40413,7 @@
         </p:nvSpPr>
         <p:spPr>
           <a:xfrm>
-            <a:off x="4325112" y="4178808"/>
+            <a:off x="4453128" y="4178808"/>
             <a:ext cx="950976" cy="420624"/>
           </a:xfrm>
           <a:prstGeom prst="rect">
@@ -39948,7 +40452,7 @@
         </p:nvSpPr>
         <p:spPr>
           <a:xfrm>
-            <a:off x="5349240" y="4178808"/>
+            <a:off x="5477256" y="4178808"/>
             <a:ext cx="365760" cy="420624"/>
           </a:xfrm>
           <a:prstGeom prst="rect">
@@ -39987,7 +40491,7 @@
         </p:nvSpPr>
         <p:spPr>
           <a:xfrm>
-            <a:off x="5760720" y="4178808"/>
+            <a:off x="5888736" y="4178808"/>
             <a:ext cx="2194560" cy="420624"/>
           </a:xfrm>
           <a:prstGeom prst="rect">
@@ -40014,7 +40518,7 @@
         </p:nvSpPr>
         <p:spPr>
           <a:xfrm>
-            <a:off x="5760720" y="4178808"/>
+            <a:off x="5888736" y="4178808"/>
             <a:ext cx="2194560" cy="420624"/>
           </a:xfrm>
           <a:prstGeom prst="rect">
@@ -40509,7 +41013,7 @@
                 <a:ea typeface="Calibri" pitchFamily="34" charset="-122"/>
                 <a:cs typeface="Calibri" pitchFamily="34" charset="-120"/>
               </a:rPr>
-              <a:t>Brave enough to do something difficult or scary.</a:t>
+              <a:t>Feeling worried or anxious about something.</a:t>
             </a:r>
             <a:endParaRPr lang="en-US" sz="1200" dirty="0"/>
           </a:p>
@@ -40648,7 +41152,7 @@
                 <a:ea typeface="Calibri" pitchFamily="34" charset="-122"/>
                 <a:cs typeface="Calibri" pitchFamily="34" charset="-120"/>
               </a:rPr>
-              <a:t>Something that can make you very sick or cause death if eaten or touched.</a:t>
+              <a:t>Funny or making people laugh.</a:t>
             </a:r>
             <a:endParaRPr lang="en-US" sz="1200" dirty="0"/>
           </a:p>
@@ -40721,7 +41225,7 @@
                 <a:ea typeface="Trebuchet MS" pitchFamily="34" charset="-122"/>
                 <a:cs typeface="Trebuchet MS" pitchFamily="34" charset="-120"/>
               </a:rPr>
-              <a:t>joyous</a:t>
+              <a:t>glorious</a:t>
             </a:r>
             <a:endParaRPr lang="en-US" sz="1200" dirty="0"/>
           </a:p>
@@ -40787,7 +41291,7 @@
                 <a:ea typeface="Calibri" pitchFamily="34" charset="-122"/>
                 <a:cs typeface="Calibri" pitchFamily="34" charset="-120"/>
               </a:rPr>
-              <a:t>Extremely large in size.</a:t>
+              <a:t>Extremely large or huge.</a:t>
             </a:r>
             <a:endParaRPr lang="en-US" sz="1200" dirty="0"/>
           </a:p>
@@ -40860,7 +41364,7 @@
                 <a:ea typeface="Trebuchet MS" pitchFamily="34" charset="-122"/>
                 <a:cs typeface="Trebuchet MS" pitchFamily="34" charset="-120"/>
               </a:rPr>
-              <a:t>poisonous</a:t>
+              <a:t>humorous</a:t>
             </a:r>
             <a:endParaRPr lang="en-US" sz="1200" dirty="0"/>
           </a:p>
@@ -40999,7 +41503,7 @@
                 <a:ea typeface="Trebuchet MS" pitchFamily="34" charset="-122"/>
                 <a:cs typeface="Trebuchet MS" pitchFamily="34" charset="-120"/>
               </a:rPr>
-              <a:t>wondrous</a:t>
+              <a:t>poisonous</a:t>
             </a:r>
             <a:endParaRPr lang="en-US" sz="1200" dirty="0"/>
           </a:p>
@@ -41065,7 +41569,7 @@
                 <a:ea typeface="Calibri" pitchFamily="34" charset="-122"/>
                 <a:cs typeface="Calibri" pitchFamily="34" charset="-120"/>
               </a:rPr>
-              <a:t>Causing feelings of wonder and amazement.</a:t>
+              <a:t>Harmful or deadly if eaten, touched, or bitten.</a:t>
             </a:r>
             <a:endParaRPr lang="en-US" sz="1200" dirty="0"/>
           </a:p>
@@ -41204,7 +41708,7 @@
                 <a:ea typeface="Calibri" pitchFamily="34" charset="-122"/>
                 <a:cs typeface="Calibri" pitchFamily="34" charset="-120"/>
               </a:rPr>
-              <a:t>Full of great happiness and delight.</a:t>
+              <a:t>Wonderful, magnificent, or full of glory.</a:t>
             </a:r>
             <a:endParaRPr lang="en-US" sz="1200" dirty="0"/>
           </a:p>
@@ -41277,7 +41781,7 @@
                 <a:ea typeface="Trebuchet MS" pitchFamily="34" charset="-122"/>
                 <a:cs typeface="Trebuchet MS" pitchFamily="34" charset="-120"/>
               </a:rPr>
-              <a:t>courageous</a:t>
+              <a:t>nervous</a:t>
             </a:r>
             <a:endParaRPr lang="en-US" sz="1200" dirty="0"/>
           </a:p>
@@ -41838,7 +42342,7 @@
                 <a:ea typeface="Calibri" pitchFamily="34" charset="-122"/>
                 <a:cs typeface="Calibri" pitchFamily="34" charset="-120"/>
               </a:rPr>
-              <a:t>The enormous elephant splashed water all over the tourists at the zoo.</a:t>
+              <a:t>The enormous spider sat in the middle of the web.</a:t>
             </a:r>
             <a:endParaRPr lang="en-US" sz="1500" dirty="0"/>
           </a:p>
@@ -42002,7 +42506,7 @@
                 <a:ea typeface="Calibri" pitchFamily="34" charset="-122"/>
                 <a:cs typeface="Calibri" pitchFamily="34" charset="-120"/>
               </a:rPr>
-              <a:t>It is dangerous to swim at the beach when the red flag is flying.</a:t>
+              <a:t>It is dangerous to swim at the beach without a lifeguard watching.</a:t>
             </a:r>
             <a:endParaRPr lang="en-US" sz="1500" dirty="0"/>
           </a:p>
@@ -42166,7 +42670,7 @@
                 <a:ea typeface="Calibri" pitchFamily="34" charset="-122"/>
                 <a:cs typeface="Calibri" pitchFamily="34" charset="-120"/>
               </a:rPr>
-              <a:t>Everyone cheered at the joyous news that the school would get a new library.</a:t>
+              <a:t>The comedian was very humorous and made the whole class laugh.</a:t>
             </a:r>
             <a:endParaRPr lang="en-US" sz="1500" dirty="0"/>
           </a:p>

--- a/output/wordlabs-ous-suffix-3day.pptx
+++ b/output/wordlabs-ous-suffix-3day.pptx
@@ -10629,11 +10629,11 @@
         <p:spPr>
           <a:xfrm>
             <a:off x="1874520" y="4096512"/>
-            <a:ext cx="6903720" cy="804672"/>
+            <a:ext cx="6903720" cy="658368"/>
           </a:xfrm>
           <a:prstGeom prst="rect">
             <a:avLst>
-              <a:gd name="adj" fmla="val 6818"/>
+              <a:gd name="adj" fmla="val 8333"/>
             </a:avLst>
           </a:prstGeom>
           <a:solidFill>
@@ -10655,12 +10655,12 @@
         </p:nvSpPr>
         <p:spPr>
           <a:xfrm>
-            <a:off x="2427732" y="4169664"/>
-            <a:ext cx="685800" cy="384048"/>
+            <a:off x="2124837" y="4169664"/>
+            <a:ext cx="685800" cy="475488"/>
           </a:xfrm>
           <a:prstGeom prst="rect">
             <a:avLst>
-              <a:gd name="adj" fmla="val 9524"/>
+              <a:gd name="adj" fmla="val 7692"/>
             </a:avLst>
           </a:prstGeom>
           <a:solidFill>
@@ -10682,8 +10682,8 @@
         </p:nvSpPr>
         <p:spPr>
           <a:xfrm>
-            <a:off x="2427732" y="4169664"/>
-            <a:ext cx="685800" cy="384048"/>
+            <a:off x="2124837" y="4169664"/>
+            <a:ext cx="685800" cy="475488"/>
           </a:xfrm>
           <a:prstGeom prst="rect">
             <a:avLst/>
@@ -10707,7 +10707,7 @@
                 <a:ea typeface="Trebuchet MS" pitchFamily="34" charset="-122"/>
                 <a:cs typeface="Trebuchet MS" pitchFamily="34" charset="-120"/>
               </a:rPr>
-              <a:t>oi</a:t>
+              <a:t>p</a:t>
             </a:r>
             <a:endParaRPr lang="en-US" sz="900" dirty="0"/>
           </a:p>
@@ -10721,12 +10721,12 @@
         </p:nvSpPr>
         <p:spPr>
           <a:xfrm>
-            <a:off x="3639312" y="4169664"/>
-            <a:ext cx="685800" cy="384048"/>
+            <a:off x="3033522" y="4169664"/>
+            <a:ext cx="685800" cy="475488"/>
           </a:xfrm>
           <a:prstGeom prst="rect">
             <a:avLst>
-              <a:gd name="adj" fmla="val 9524"/>
+              <a:gd name="adj" fmla="val 7692"/>
             </a:avLst>
           </a:prstGeom>
           <a:solidFill>
@@ -10748,8 +10748,8 @@
         </p:nvSpPr>
         <p:spPr>
           <a:xfrm>
-            <a:off x="3639312" y="4169664"/>
-            <a:ext cx="685800" cy="384048"/>
+            <a:off x="3033522" y="4169664"/>
+            <a:ext cx="685800" cy="475488"/>
           </a:xfrm>
           <a:prstGeom prst="rect">
             <a:avLst/>
@@ -10773,7 +10773,7 @@
                 <a:ea typeface="Trebuchet MS" pitchFamily="34" charset="-122"/>
                 <a:cs typeface="Trebuchet MS" pitchFamily="34" charset="-120"/>
               </a:rPr>
-              <a:t>s</a:t>
+              <a:t>oi</a:t>
             </a:r>
             <a:endParaRPr lang="en-US" sz="900" dirty="0"/>
           </a:p>
@@ -10787,12 +10787,12 @@
         </p:nvSpPr>
         <p:spPr>
           <a:xfrm>
-            <a:off x="4850892" y="4169664"/>
-            <a:ext cx="685800" cy="384048"/>
+            <a:off x="3942207" y="4169664"/>
+            <a:ext cx="685800" cy="475488"/>
           </a:xfrm>
           <a:prstGeom prst="rect">
             <a:avLst>
-              <a:gd name="adj" fmla="val 9524"/>
+              <a:gd name="adj" fmla="val 7692"/>
             </a:avLst>
           </a:prstGeom>
           <a:solidFill>
@@ -10814,8 +10814,8 @@
         </p:nvSpPr>
         <p:spPr>
           <a:xfrm>
-            <a:off x="4850892" y="4169664"/>
-            <a:ext cx="685800" cy="384048"/>
+            <a:off x="3942207" y="4169664"/>
+            <a:ext cx="685800" cy="475488"/>
           </a:xfrm>
           <a:prstGeom prst="rect">
             <a:avLst/>
@@ -10839,7 +10839,7 @@
                 <a:ea typeface="Trebuchet MS" pitchFamily="34" charset="-122"/>
                 <a:cs typeface="Trebuchet MS" pitchFamily="34" charset="-120"/>
               </a:rPr>
-              <a:t>on</a:t>
+              <a:t>s</a:t>
             </a:r>
             <a:endParaRPr lang="en-US" sz="900" dirty="0"/>
           </a:p>
@@ -10853,12 +10853,12 @@
         </p:nvSpPr>
         <p:spPr>
           <a:xfrm>
-            <a:off x="6062472" y="4169664"/>
-            <a:ext cx="685800" cy="384048"/>
+            <a:off x="4850892" y="4169664"/>
+            <a:ext cx="685800" cy="475488"/>
           </a:xfrm>
           <a:prstGeom prst="rect">
             <a:avLst>
-              <a:gd name="adj" fmla="val 9524"/>
+              <a:gd name="adj" fmla="val 7692"/>
             </a:avLst>
           </a:prstGeom>
           <a:solidFill>
@@ -10880,8 +10880,8 @@
         </p:nvSpPr>
         <p:spPr>
           <a:xfrm>
-            <a:off x="6062472" y="4169664"/>
-            <a:ext cx="685800" cy="384048"/>
+            <a:off x="4850892" y="4169664"/>
+            <a:ext cx="685800" cy="475488"/>
           </a:xfrm>
           <a:prstGeom prst="rect">
             <a:avLst/>
@@ -10905,6 +10905,138 @@
                 <a:ea typeface="Trebuchet MS" pitchFamily="34" charset="-122"/>
                 <a:cs typeface="Trebuchet MS" pitchFamily="34" charset="-120"/>
               </a:rPr>
+              <a:t>o</a:t>
+            </a:r>
+            <a:endParaRPr lang="en-US" sz="900" dirty="0"/>
+          </a:p>
+        </p:txBody>
+      </p:sp>
+      <p:sp>
+        <p:nvSpPr>
+          <p:cNvPr id="44" name="Shape 42"/>
+          <p:cNvSpPr/>
+          <p:nvPr/>
+        </p:nvSpPr>
+        <p:spPr>
+          <a:xfrm>
+            <a:off x="5759577" y="4169664"/>
+            <a:ext cx="685800" cy="475488"/>
+          </a:xfrm>
+          <a:prstGeom prst="rect">
+            <a:avLst>
+              <a:gd name="adj" fmla="val 7692"/>
+            </a:avLst>
+          </a:prstGeom>
+          <a:solidFill>
+            <a:srgbClr val="FFFFFF"/>
+          </a:solidFill>
+          <a:ln w="12700">
+            <a:solidFill>
+              <a:srgbClr val="DB2777"/>
+            </a:solidFill>
+            <a:prstDash val="solid"/>
+          </a:ln>
+        </p:spPr>
+      </p:sp>
+      <p:sp>
+        <p:nvSpPr>
+          <p:cNvPr id="45" name="Text 43"/>
+          <p:cNvSpPr/>
+          <p:nvPr/>
+        </p:nvSpPr>
+        <p:spPr>
+          <a:xfrm>
+            <a:off x="5759577" y="4169664"/>
+            <a:ext cx="685800" cy="475488"/>
+          </a:xfrm>
+          <a:prstGeom prst="rect">
+            <a:avLst/>
+          </a:prstGeom>
+          <a:noFill/>
+          <a:ln/>
+        </p:spPr>
+        <p:txBody>
+          <a:bodyPr wrap="square" lIns="0" tIns="0" rIns="0" bIns="0" rtlCol="0" anchor="ctr"/>
+          <a:lstStyle/>
+          <a:p>
+            <a:pPr algn="ctr" indent="0" marL="0">
+              <a:buNone/>
+            </a:pPr>
+            <a:r>
+              <a:rPr lang="en-US" sz="900" b="1" dirty="0">
+                <a:solidFill>
+                  <a:srgbClr val="9D174D"/>
+                </a:solidFill>
+                <a:latin typeface="Trebuchet MS" pitchFamily="34" charset="0"/>
+                <a:ea typeface="Trebuchet MS" pitchFamily="34" charset="-122"/>
+                <a:cs typeface="Trebuchet MS" pitchFamily="34" charset="-120"/>
+              </a:rPr>
+              <a:t>n</a:t>
+            </a:r>
+            <a:endParaRPr lang="en-US" sz="900" dirty="0"/>
+          </a:p>
+        </p:txBody>
+      </p:sp>
+      <p:sp>
+        <p:nvSpPr>
+          <p:cNvPr id="46" name="Shape 44"/>
+          <p:cNvSpPr/>
+          <p:nvPr/>
+        </p:nvSpPr>
+        <p:spPr>
+          <a:xfrm>
+            <a:off x="6668262" y="4169664"/>
+            <a:ext cx="685800" cy="475488"/>
+          </a:xfrm>
+          <a:prstGeom prst="rect">
+            <a:avLst>
+              <a:gd name="adj" fmla="val 7692"/>
+            </a:avLst>
+          </a:prstGeom>
+          <a:solidFill>
+            <a:srgbClr val="FFFFFF"/>
+          </a:solidFill>
+          <a:ln w="12700">
+            <a:solidFill>
+              <a:srgbClr val="DB2777"/>
+            </a:solidFill>
+            <a:prstDash val="solid"/>
+          </a:ln>
+        </p:spPr>
+      </p:sp>
+      <p:sp>
+        <p:nvSpPr>
+          <p:cNvPr id="47" name="Text 45"/>
+          <p:cNvSpPr/>
+          <p:nvPr/>
+        </p:nvSpPr>
+        <p:spPr>
+          <a:xfrm>
+            <a:off x="6668262" y="4169664"/>
+            <a:ext cx="685800" cy="475488"/>
+          </a:xfrm>
+          <a:prstGeom prst="rect">
+            <a:avLst/>
+          </a:prstGeom>
+          <a:noFill/>
+          <a:ln/>
+        </p:spPr>
+        <p:txBody>
+          <a:bodyPr wrap="square" lIns="0" tIns="0" rIns="0" bIns="0" rtlCol="0" anchor="ctr"/>
+          <a:lstStyle/>
+          <a:p>
+            <a:pPr algn="ctr" indent="0" marL="0">
+              <a:buNone/>
+            </a:pPr>
+            <a:r>
+              <a:rPr lang="en-US" sz="900" b="1" dirty="0">
+                <a:solidFill>
+                  <a:srgbClr val="9D174D"/>
+                </a:solidFill>
+                <a:latin typeface="Trebuchet MS" pitchFamily="34" charset="0"/>
+                <a:ea typeface="Trebuchet MS" pitchFamily="34" charset="-122"/>
+                <a:cs typeface="Trebuchet MS" pitchFamily="34" charset="-120"/>
+              </a:rPr>
               <a:t>ou</a:t>
             </a:r>
             <a:endParaRPr lang="en-US" sz="900" dirty="0"/>
@@ -10913,57 +11045,18 @@
       </p:sp>
       <p:sp>
         <p:nvSpPr>
-          <p:cNvPr id="44" name="Text 42"/>
-          <p:cNvSpPr/>
-          <p:nvPr/>
-        </p:nvSpPr>
-        <p:spPr>
-          <a:xfrm>
-            <a:off x="6062472" y="4572000"/>
-            <a:ext cx="685800" cy="219456"/>
-          </a:xfrm>
-          <a:prstGeom prst="rect">
-            <a:avLst/>
-          </a:prstGeom>
-          <a:noFill/>
-          <a:ln/>
-        </p:spPr>
-        <p:txBody>
-          <a:bodyPr wrap="square" lIns="0" tIns="0" rIns="0" bIns="0" rtlCol="0" anchor="t"/>
-          <a:lstStyle/>
-          <a:p>
-            <a:pPr algn="ctr" indent="0" marL="0">
-              <a:buNone/>
-            </a:pPr>
-            <a:r>
-              <a:rPr lang="en-US" sz="750" i="1" dirty="0">
-                <a:solidFill>
-                  <a:srgbClr val="94A3B8"/>
-                </a:solidFill>
-                <a:latin typeface="Calibri" pitchFamily="34" charset="0"/>
-                <a:ea typeface="Calibri" pitchFamily="34" charset="-122"/>
-                <a:cs typeface="Calibri" pitchFamily="34" charset="-120"/>
-              </a:rPr>
-              <a:t>/u/</a:t>
-            </a:r>
-            <a:endParaRPr lang="en-US" sz="750" dirty="0"/>
-          </a:p>
-        </p:txBody>
-      </p:sp>
-      <p:sp>
-        <p:nvSpPr>
-          <p:cNvPr id="45" name="Shape 43"/>
-          <p:cNvSpPr/>
-          <p:nvPr/>
-        </p:nvSpPr>
-        <p:spPr>
-          <a:xfrm>
-            <a:off x="7274052" y="4169664"/>
-            <a:ext cx="685800" cy="384048"/>
+          <p:cNvPr id="48" name="Shape 46"/>
+          <p:cNvSpPr/>
+          <p:nvPr/>
+        </p:nvSpPr>
+        <p:spPr>
+          <a:xfrm>
+            <a:off x="7576947" y="4169664"/>
+            <a:ext cx="685800" cy="475488"/>
           </a:xfrm>
           <a:prstGeom prst="rect">
             <a:avLst>
-              <a:gd name="adj" fmla="val 9524"/>
+              <a:gd name="adj" fmla="val 7692"/>
             </a:avLst>
           </a:prstGeom>
           <a:solidFill>
@@ -10979,14 +11072,14 @@
       </p:sp>
       <p:sp>
         <p:nvSpPr>
-          <p:cNvPr id="46" name="Text 44"/>
-          <p:cNvSpPr/>
-          <p:nvPr/>
-        </p:nvSpPr>
-        <p:spPr>
-          <a:xfrm>
-            <a:off x="7274052" y="4169664"/>
-            <a:ext cx="685800" cy="384048"/>
+          <p:cNvPr id="49" name="Text 47"/>
+          <p:cNvSpPr/>
+          <p:nvPr/>
+        </p:nvSpPr>
+        <p:spPr>
+          <a:xfrm>
+            <a:off x="7576947" y="4169664"/>
+            <a:ext cx="685800" cy="475488"/>
           </a:xfrm>
           <a:prstGeom prst="rect">
             <a:avLst/>
@@ -37456,7 +37549,7 @@
                 <a:ea typeface="Calibri" pitchFamily="34" charset="-122"/>
                 <a:cs typeface="Calibri" pitchFamily="34" charset="-120"/>
               </a:rPr>
-              <a:t>3.  The word 'dangerous' contains the suffix '-ous'.</a:t>
+              <a:t>3.  The suffix '-ous' can mean 'full of' or 'having the quality of'.</a:t>
             </a:r>
             <a:endParaRPr lang="en-US" sz="1300" dirty="0"/>
           </a:p>
@@ -37595,7 +37688,7 @@
                 <a:ea typeface="Calibri" pitchFamily="34" charset="-122"/>
                 <a:cs typeface="Calibri" pitchFamily="34" charset="-120"/>
               </a:rPr>
-              <a:t>4.  The suffix '-ous' can mean 'full of' or 'having the quality of'.</a:t>
+              <a:t>4.  The word 'dangerous' contains the suffix '-ous'.</a:t>
             </a:r>
             <a:endParaRPr lang="en-US" sz="1300" dirty="0"/>
           </a:p>
